--- a/courses/apcsa/APExam.pptx
+++ b/courses/apcsa/APExam.pptx
@@ -12,6 +12,7 @@
     <p:sldId id="560" r:id="rId3"/>
     <p:sldId id="349" r:id="rId4"/>
     <p:sldId id="350" r:id="rId5"/>
+    <p:sldId id="569" r:id="rId54"/>
     <p:sldId id="567" r:id="rId6"/>
     <p:sldId id="568" r:id="rId7"/>
     <p:sldId id="352" r:id="rId8"/>
@@ -8014,6 +8015,615 @@
           <a:p>
             <a:r>
               <a:rPr lang="en-US" dirty="0"/>
+              <a:t>Free Response </a:t>
+            </a:r>
+          </a:p>
+        </p:txBody>
+      </p:sp>
+      <p:sp>
+        <p:nvSpPr>
+          <p:cNvPr id="3" name="Content Placeholder 2">
+            <a:extLst>
+              <a:ext uri="{FF2B5EF4-FFF2-40B4-BE49-F238E27FC236}">
+                <a16:creationId xmlns:a16="http://schemas.microsoft.com/office/drawing/2014/main" id="{03423960-73AA-8F4D-8DA1-9E54D69D5DA3}"/>
+              </a:ext>
+            </a:extLst>
+          </p:cNvPr>
+          <p:cNvSpPr>
+            <a:spLocks noGrp="1"/>
+          </p:cNvSpPr>
+          <p:nvPr>
+            <p:ph idx="1"/>
+          </p:nvPr>
+        </p:nvSpPr>
+        <p:spPr>
+          <a:xfrm>
+            <a:off x="170916" y="769121"/>
+            <a:ext cx="8716710" cy="4666003"/>
+          </a:xfrm>
+        </p:spPr>
+        <p:txBody>
+          <a:bodyPr>
+            <a:normAutofit fontScale="92500" lnSpcReduction="10000"/>
+          </a:bodyPr>
+          <a:lstStyle/>
+          <a:p>
+            <a:pPr marL="0" indent="0">
+              <a:buNone/>
+            </a:pPr>
+            <a:r>
+              <a:rPr lang="en-US" dirty="0"/>
+              <a:t>General Strategies for FRQS:</a:t>
+            </a:r>
+          </a:p>
+          <a:p>
+            <a:pPr marL="0" indent="0" fontAlgn="base">
+              <a:buNone/>
+            </a:pPr>
+            <a:r>
+              <a:rPr lang="en-US" sz="2000" dirty="0"/>
+              <a:t>8) Write down some code for every question! </a:t>
+            </a:r>
+            <a:r>
+              <a:rPr lang="en-US" sz="2000" dirty="0">
+                <a:solidFill>
+                  <a:srgbClr val="FF0000"/>
+                </a:solidFill>
+              </a:rPr>
+              <a:t>Leave Nothing Blank! Get partial credit if not full credit!</a:t>
+            </a:r>
+          </a:p>
+          <a:p>
+            <a:pPr lvl="1" fontAlgn="base"/>
+            <a:r>
+              <a:rPr lang="en-US" dirty="0"/>
+              <a:t>does it need a loop?</a:t>
+            </a:r>
+          </a:p>
+          <a:p>
+            <a:pPr lvl="1" fontAlgn="base"/>
+            <a:r>
+              <a:rPr lang="en-US" dirty="0"/>
+              <a:t>an if statement?</a:t>
+            </a:r>
+          </a:p>
+          <a:p>
+            <a:pPr lvl="1" fontAlgn="base"/>
+            <a:r>
+              <a:rPr lang="en-US" dirty="0"/>
+              <a:t>return statement or assignment statement?</a:t>
+            </a:r>
+          </a:p>
+          <a:p>
+            <a:pPr marL="0" indent="0">
+              <a:buNone/>
+            </a:pPr>
+            <a:endParaRPr lang="en-US" dirty="0"/>
+          </a:p>
+          <a:p>
+            <a:pPr marL="0" indent="0">
+              <a:buNone/>
+            </a:pPr>
+            <a:r>
+              <a:rPr lang="en-US" dirty="0"/>
+              <a:t>Example 1:</a:t>
+            </a:r>
+          </a:p>
+          <a:p>
+            <a:pPr marL="0" indent="0">
+              <a:buNone/>
+            </a:pPr>
+            <a:r>
+              <a:rPr lang="en-US" dirty="0">
+                <a:latin typeface="Courier New" panose="02070309020205020404" pitchFamily="49" charset="0"/>
+                <a:cs typeface="Courier New" panose="02070309020205020404" pitchFamily="49" charset="0"/>
+              </a:rPr>
+              <a:t>public </a:t>
+            </a:r>
+            <a:r>
+              <a:rPr lang="en-US" dirty="0">
+                <a:solidFill>
+                  <a:srgbClr val="FF0000"/>
+                </a:solidFill>
+                <a:latin typeface="Courier New" panose="02070309020205020404" pitchFamily="49" charset="0"/>
+                <a:cs typeface="Courier New" panose="02070309020205020404" pitchFamily="49" charset="0"/>
+              </a:rPr>
+              <a:t>double</a:t>
+            </a:r>
+            <a:r>
+              <a:rPr lang="en-US" dirty="0">
+                <a:latin typeface="Courier New" panose="02070309020205020404" pitchFamily="49" charset="0"/>
+                <a:cs typeface="Courier New" panose="02070309020205020404" pitchFamily="49" charset="0"/>
+              </a:rPr>
+              <a:t> </a:t>
+            </a:r>
+            <a:r>
+              <a:rPr lang="en-US" dirty="0" err="1">
+                <a:latin typeface="Courier New" panose="02070309020205020404" pitchFamily="49" charset="0"/>
+                <a:cs typeface="Courier New" panose="02070309020205020404" pitchFamily="49" charset="0"/>
+              </a:rPr>
+              <a:t>funMethod</a:t>
+            </a:r>
+            <a:r>
+              <a:rPr lang="en-US" dirty="0">
+                <a:latin typeface="Courier New" panose="02070309020205020404" pitchFamily="49" charset="0"/>
+                <a:cs typeface="Courier New" panose="02070309020205020404" pitchFamily="49" charset="0"/>
+              </a:rPr>
+              <a:t>(){</a:t>
+            </a:r>
+          </a:p>
+          <a:p>
+            <a:pPr marL="0" indent="0">
+              <a:buNone/>
+            </a:pPr>
+            <a:r>
+              <a:rPr lang="en-US" dirty="0">
+                <a:latin typeface="Courier New" panose="02070309020205020404" pitchFamily="49" charset="0"/>
+                <a:cs typeface="Courier New" panose="02070309020205020404" pitchFamily="49" charset="0"/>
+              </a:rPr>
+              <a:t>	double result;</a:t>
+            </a:r>
+          </a:p>
+          <a:p>
+            <a:pPr marL="0" indent="0">
+              <a:buNone/>
+            </a:pPr>
+            <a:r>
+              <a:rPr lang="en-US" dirty="0">
+                <a:latin typeface="Courier New" panose="02070309020205020404" pitchFamily="49" charset="0"/>
+                <a:cs typeface="Courier New" panose="02070309020205020404" pitchFamily="49" charset="0"/>
+              </a:rPr>
+              <a:t>	…</a:t>
+            </a:r>
+          </a:p>
+          <a:p>
+            <a:pPr marL="0" indent="0">
+              <a:buNone/>
+            </a:pPr>
+            <a:r>
+              <a:rPr lang="en-US" dirty="0">
+                <a:latin typeface="Courier New" panose="02070309020205020404" pitchFamily="49" charset="0"/>
+                <a:cs typeface="Courier New" panose="02070309020205020404" pitchFamily="49" charset="0"/>
+              </a:rPr>
+              <a:t>	</a:t>
+            </a:r>
+            <a:r>
+              <a:rPr lang="en-US" dirty="0">
+                <a:solidFill>
+                  <a:srgbClr val="FF0000"/>
+                </a:solidFill>
+                <a:latin typeface="Courier New" panose="02070309020205020404" pitchFamily="49" charset="0"/>
+                <a:cs typeface="Courier New" panose="02070309020205020404" pitchFamily="49" charset="0"/>
+              </a:rPr>
+              <a:t>return result;</a:t>
+            </a:r>
+          </a:p>
+          <a:p>
+            <a:pPr marL="0" indent="0">
+              <a:buNone/>
+            </a:pPr>
+            <a:r>
+              <a:rPr lang="en-US" dirty="0">
+                <a:latin typeface="Courier New" panose="02070309020205020404" pitchFamily="49" charset="0"/>
+                <a:cs typeface="Courier New" panose="02070309020205020404" pitchFamily="49" charset="0"/>
+              </a:rPr>
+              <a:t>}</a:t>
+            </a:r>
+          </a:p>
+          <a:p>
+            <a:pPr marL="0" indent="0">
+              <a:buNone/>
+            </a:pPr>
+            <a:br>
+              <a:rPr lang="en-US" dirty="0"/>
+            </a:br>
+            <a:endParaRPr lang="en-US" dirty="0"/>
+          </a:p>
+        </p:txBody>
+      </p:sp>
+    </p:spTree>
+    <p:extLst>
+      <p:ext uri="{BB962C8B-B14F-4D97-AF65-F5344CB8AC3E}">
+        <p14:creationId xmlns:p14="http://schemas.microsoft.com/office/powerpoint/2010/main" val="3582612531"/>
+      </p:ext>
+    </p:extLst>
+  </p:cSld>
+  <p:clrMapOvr>
+    <a:masterClrMapping/>
+  </p:clrMapOvr>
+  <p:timing>
+    <p:tnLst>
+      <p:par>
+        <p:cTn id="1" dur="indefinite" restart="never" nodeType="tmRoot">
+          <p:childTnLst>
+            <p:seq concurrent="1" nextAc="seek">
+              <p:cTn id="2" dur="indefinite" nodeType="mainSeq">
+                <p:childTnLst>
+                  <p:par>
+                    <p:cTn id="3" fill="hold">
+                      <p:stCondLst>
+                        <p:cond delay="indefinite"/>
+                      </p:stCondLst>
+                      <p:childTnLst>
+                        <p:par>
+                          <p:cTn id="4" fill="hold">
+                            <p:stCondLst>
+                              <p:cond delay="0"/>
+                            </p:stCondLst>
+                            <p:childTnLst>
+                              <p:par>
+                                <p:cTn id="5" presetID="1" presetClass="entr" presetSubtype="0" fill="hold" nodeType="clickEffect">
+                                  <p:stCondLst>
+                                    <p:cond delay="0"/>
+                                  </p:stCondLst>
+                                  <p:childTnLst>
+                                    <p:set>
+                                      <p:cBhvr>
+                                        <p:cTn id="6" dur="1" fill="hold">
+                                          <p:stCondLst>
+                                            <p:cond delay="0"/>
+                                          </p:stCondLst>
+                                        </p:cTn>
+                                        <p:tgtEl>
+                                          <p:spTgt spid="3">
+                                            <p:txEl>
+                                              <p:pRg st="2" end="2"/>
+                                            </p:txEl>
+                                          </p:spTgt>
+                                        </p:tgtEl>
+                                        <p:attrNameLst>
+                                          <p:attrName>style.visibility</p:attrName>
+                                        </p:attrNameLst>
+                                      </p:cBhvr>
+                                      <p:to>
+                                        <p:strVal val="visible"/>
+                                      </p:to>
+                                    </p:set>
+                                  </p:childTnLst>
+                                </p:cTn>
+                              </p:par>
+                              <p:par>
+                                <p:cTn id="7" presetID="1" presetClass="entr" presetSubtype="0" fill="hold" nodeType="withEffect">
+                                  <p:stCondLst>
+                                    <p:cond delay="0"/>
+                                  </p:stCondLst>
+                                  <p:childTnLst>
+                                    <p:set>
+                                      <p:cBhvr>
+                                        <p:cTn id="8" dur="1" fill="hold">
+                                          <p:stCondLst>
+                                            <p:cond delay="0"/>
+                                          </p:stCondLst>
+                                        </p:cTn>
+                                        <p:tgtEl>
+                                          <p:spTgt spid="3">
+                                            <p:txEl>
+                                              <p:pRg st="3" end="3"/>
+                                            </p:txEl>
+                                          </p:spTgt>
+                                        </p:tgtEl>
+                                        <p:attrNameLst>
+                                          <p:attrName>style.visibility</p:attrName>
+                                        </p:attrNameLst>
+                                      </p:cBhvr>
+                                      <p:to>
+                                        <p:strVal val="visible"/>
+                                      </p:to>
+                                    </p:set>
+                                  </p:childTnLst>
+                                </p:cTn>
+                              </p:par>
+                              <p:par>
+                                <p:cTn id="9" presetID="1" presetClass="entr" presetSubtype="0" fill="hold" nodeType="withEffect">
+                                  <p:stCondLst>
+                                    <p:cond delay="0"/>
+                                  </p:stCondLst>
+                                  <p:childTnLst>
+                                    <p:set>
+                                      <p:cBhvr>
+                                        <p:cTn id="10" dur="1" fill="hold">
+                                          <p:stCondLst>
+                                            <p:cond delay="0"/>
+                                          </p:stCondLst>
+                                        </p:cTn>
+                                        <p:tgtEl>
+                                          <p:spTgt spid="3">
+                                            <p:txEl>
+                                              <p:pRg st="4" end="4"/>
+                                            </p:txEl>
+                                          </p:spTgt>
+                                        </p:tgtEl>
+                                        <p:attrNameLst>
+                                          <p:attrName>style.visibility</p:attrName>
+                                        </p:attrNameLst>
+                                      </p:cBhvr>
+                                      <p:to>
+                                        <p:strVal val="visible"/>
+                                      </p:to>
+                                    </p:set>
+                                  </p:childTnLst>
+                                </p:cTn>
+                              </p:par>
+                            </p:childTnLst>
+                          </p:cTn>
+                        </p:par>
+                      </p:childTnLst>
+                    </p:cTn>
+                  </p:par>
+                  <p:par>
+                    <p:cTn id="11" fill="hold">
+                      <p:stCondLst>
+                        <p:cond delay="indefinite"/>
+                      </p:stCondLst>
+                      <p:childTnLst>
+                        <p:par>
+                          <p:cTn id="12" fill="hold">
+                            <p:stCondLst>
+                              <p:cond delay="0"/>
+                            </p:stCondLst>
+                            <p:childTnLst>
+                              <p:par>
+                                <p:cTn id="13" presetID="1" presetClass="entr" presetSubtype="0" fill="hold" nodeType="clickEffect">
+                                  <p:stCondLst>
+                                    <p:cond delay="0"/>
+                                  </p:stCondLst>
+                                  <p:childTnLst>
+                                    <p:set>
+                                      <p:cBhvr>
+                                        <p:cTn id="14" dur="1" fill="hold">
+                                          <p:stCondLst>
+                                            <p:cond delay="0"/>
+                                          </p:stCondLst>
+                                        </p:cTn>
+                                        <p:tgtEl>
+                                          <p:spTgt spid="3">
+                                            <p:txEl>
+                                              <p:pRg st="6" end="6"/>
+                                            </p:txEl>
+                                          </p:spTgt>
+                                        </p:tgtEl>
+                                        <p:attrNameLst>
+                                          <p:attrName>style.visibility</p:attrName>
+                                        </p:attrNameLst>
+                                      </p:cBhvr>
+                                      <p:to>
+                                        <p:strVal val="visible"/>
+                                      </p:to>
+                                    </p:set>
+                                  </p:childTnLst>
+                                </p:cTn>
+                              </p:par>
+                              <p:par>
+                                <p:cTn id="15" presetID="1" presetClass="entr" presetSubtype="0" fill="hold" nodeType="withEffect">
+                                  <p:stCondLst>
+                                    <p:cond delay="0"/>
+                                  </p:stCondLst>
+                                  <p:childTnLst>
+                                    <p:set>
+                                      <p:cBhvr>
+                                        <p:cTn id="16" dur="1" fill="hold">
+                                          <p:stCondLst>
+                                            <p:cond delay="0"/>
+                                          </p:stCondLst>
+                                        </p:cTn>
+                                        <p:tgtEl>
+                                          <p:spTgt spid="3">
+                                            <p:txEl>
+                                              <p:pRg st="7" end="7"/>
+                                            </p:txEl>
+                                          </p:spTgt>
+                                        </p:tgtEl>
+                                        <p:attrNameLst>
+                                          <p:attrName>style.visibility</p:attrName>
+                                        </p:attrNameLst>
+                                      </p:cBhvr>
+                                      <p:to>
+                                        <p:strVal val="visible"/>
+                                      </p:to>
+                                    </p:set>
+                                  </p:childTnLst>
+                                </p:cTn>
+                              </p:par>
+                              <p:par>
+                                <p:cTn id="17" presetID="1" presetClass="entr" presetSubtype="0" fill="hold" nodeType="withEffect">
+                                  <p:stCondLst>
+                                    <p:cond delay="0"/>
+                                  </p:stCondLst>
+                                  <p:childTnLst>
+                                    <p:set>
+                                      <p:cBhvr>
+                                        <p:cTn id="18" dur="1" fill="hold">
+                                          <p:stCondLst>
+                                            <p:cond delay="0"/>
+                                          </p:stCondLst>
+                                        </p:cTn>
+                                        <p:tgtEl>
+                                          <p:spTgt spid="3">
+                                            <p:txEl>
+                                              <p:pRg st="8" end="8"/>
+                                            </p:txEl>
+                                          </p:spTgt>
+                                        </p:tgtEl>
+                                        <p:attrNameLst>
+                                          <p:attrName>style.visibility</p:attrName>
+                                        </p:attrNameLst>
+                                      </p:cBhvr>
+                                      <p:to>
+                                        <p:strVal val="visible"/>
+                                      </p:to>
+                                    </p:set>
+                                  </p:childTnLst>
+                                </p:cTn>
+                              </p:par>
+                              <p:par>
+                                <p:cTn id="19" presetID="1" presetClass="entr" presetSubtype="0" fill="hold" nodeType="withEffect">
+                                  <p:stCondLst>
+                                    <p:cond delay="0"/>
+                                  </p:stCondLst>
+                                  <p:childTnLst>
+                                    <p:set>
+                                      <p:cBhvr>
+                                        <p:cTn id="20" dur="1" fill="hold">
+                                          <p:stCondLst>
+                                            <p:cond delay="0"/>
+                                          </p:stCondLst>
+                                        </p:cTn>
+                                        <p:tgtEl>
+                                          <p:spTgt spid="3">
+                                            <p:txEl>
+                                              <p:pRg st="9" end="9"/>
+                                            </p:txEl>
+                                          </p:spTgt>
+                                        </p:tgtEl>
+                                        <p:attrNameLst>
+                                          <p:attrName>style.visibility</p:attrName>
+                                        </p:attrNameLst>
+                                      </p:cBhvr>
+                                      <p:to>
+                                        <p:strVal val="visible"/>
+                                      </p:to>
+                                    </p:set>
+                                  </p:childTnLst>
+                                </p:cTn>
+                              </p:par>
+                              <p:par>
+                                <p:cTn id="21" presetID="1" presetClass="entr" presetSubtype="0" fill="hold" nodeType="withEffect">
+                                  <p:stCondLst>
+                                    <p:cond delay="0"/>
+                                  </p:stCondLst>
+                                  <p:childTnLst>
+                                    <p:set>
+                                      <p:cBhvr>
+                                        <p:cTn id="22" dur="1" fill="hold">
+                                          <p:stCondLst>
+                                            <p:cond delay="0"/>
+                                          </p:stCondLst>
+                                        </p:cTn>
+                                        <p:tgtEl>
+                                          <p:spTgt spid="3">
+                                            <p:txEl>
+                                              <p:pRg st="10" end="10"/>
+                                            </p:txEl>
+                                          </p:spTgt>
+                                        </p:tgtEl>
+                                        <p:attrNameLst>
+                                          <p:attrName>style.visibility</p:attrName>
+                                        </p:attrNameLst>
+                                      </p:cBhvr>
+                                      <p:to>
+                                        <p:strVal val="visible"/>
+                                      </p:to>
+                                    </p:set>
+                                  </p:childTnLst>
+                                </p:cTn>
+                              </p:par>
+                              <p:par>
+                                <p:cTn id="23" presetID="1" presetClass="entr" presetSubtype="0" fill="hold" nodeType="withEffect">
+                                  <p:stCondLst>
+                                    <p:cond delay="0"/>
+                                  </p:stCondLst>
+                                  <p:childTnLst>
+                                    <p:set>
+                                      <p:cBhvr>
+                                        <p:cTn id="24" dur="1" fill="hold">
+                                          <p:stCondLst>
+                                            <p:cond delay="0"/>
+                                          </p:stCondLst>
+                                        </p:cTn>
+                                        <p:tgtEl>
+                                          <p:spTgt spid="3">
+                                            <p:txEl>
+                                              <p:pRg st="11" end="11"/>
+                                            </p:txEl>
+                                          </p:spTgt>
+                                        </p:tgtEl>
+                                        <p:attrNameLst>
+                                          <p:attrName>style.visibility</p:attrName>
+                                        </p:attrNameLst>
+                                      </p:cBhvr>
+                                      <p:to>
+                                        <p:strVal val="visible"/>
+                                      </p:to>
+                                    </p:set>
+                                  </p:childTnLst>
+                                </p:cTn>
+                              </p:par>
+                            </p:childTnLst>
+                          </p:cTn>
+                        </p:par>
+                      </p:childTnLst>
+                    </p:cTn>
+                  </p:par>
+                </p:childTnLst>
+              </p:cTn>
+              <p:prevCondLst>
+                <p:cond evt="onPrev" delay="0">
+                  <p:tgtEl>
+                    <p:sldTgt/>
+                  </p:tgtEl>
+                </p:cond>
+              </p:prevCondLst>
+              <p:nextCondLst>
+                <p:cond evt="onNext" delay="0">
+                  <p:tgtEl>
+                    <p:sldTgt/>
+                  </p:tgtEl>
+                </p:cond>
+              </p:nextCondLst>
+            </p:seq>
+          </p:childTnLst>
+        </p:cTn>
+      </p:par>
+    </p:tnLst>
+  </p:timing>
+</p:sld>
+</file>
+
+<file path=ppt/slides/slide11.xml><?xml version="1.0" encoding="utf-8"?>
+<p:sld xmlns:a="http://schemas.openxmlformats.org/drawingml/2006/main" xmlns:r="http://schemas.openxmlformats.org/officeDocument/2006/relationships" xmlns:p="http://schemas.openxmlformats.org/presentationml/2006/main">
+  <p:cSld>
+    <p:spTree>
+      <p:nvGrpSpPr>
+        <p:cNvPr id="1" name=""/>
+        <p:cNvGrpSpPr/>
+        <p:nvPr/>
+      </p:nvGrpSpPr>
+      <p:grpSpPr>
+        <a:xfrm>
+          <a:off x="0" y="0"/>
+          <a:ext cx="0" cy="0"/>
+          <a:chOff x="0" y="0"/>
+          <a:chExt cx="0" cy="0"/>
+        </a:xfrm>
+      </p:grpSpPr>
+      <p:sp>
+        <p:nvSpPr>
+          <p:cNvPr id="2" name="Title 1">
+            <a:extLst>
+              <a:ext uri="{FF2B5EF4-FFF2-40B4-BE49-F238E27FC236}">
+                <a16:creationId xmlns:a16="http://schemas.microsoft.com/office/drawing/2014/main" id="{8AF91A8F-AAF8-3144-AEDE-0172CA6382EB}"/>
+              </a:ext>
+            </a:extLst>
+          </p:cNvPr>
+          <p:cNvSpPr>
+            <a:spLocks noGrp="1"/>
+          </p:cNvSpPr>
+          <p:nvPr>
+            <p:ph type="title"/>
+          </p:nvPr>
+        </p:nvSpPr>
+        <p:spPr>
+          <a:xfrm>
+            <a:off x="94004" y="133611"/>
+            <a:ext cx="7891506" cy="616283"/>
+          </a:xfrm>
+        </p:spPr>
+        <p:txBody>
+          <a:bodyPr/>
+          <a:lstStyle/>
+          <a:p>
+            <a:r>
+              <a:rPr lang="en-US" dirty="0"/>
               <a:t>More Examples</a:t>
             </a:r>
           </a:p>
@@ -8538,7 +9148,7 @@
 </p:sld>
 </file>
 
-<file path=ppt/slides/slide11.xml><?xml version="1.0" encoding="utf-8"?>
+<file path=ppt/slides/slide12.xml><?xml version="1.0" encoding="utf-8"?>
 <p:sld xmlns:a="http://schemas.openxmlformats.org/drawingml/2006/main" xmlns:r="http://schemas.openxmlformats.org/officeDocument/2006/relationships" xmlns:p="http://schemas.openxmlformats.org/presentationml/2006/main">
   <p:cSld>
     <p:spTree>
@@ -8811,85 +9421,6 @@
     <p:extLst>
       <p:ext uri="{BB962C8B-B14F-4D97-AF65-F5344CB8AC3E}">
         <p14:creationId xmlns:p14="http://schemas.microsoft.com/office/powerpoint/2010/main" val="1418230355"/>
-      </p:ext>
-    </p:extLst>
-  </p:cSld>
-  <p:clrMapOvr>
-    <a:masterClrMapping/>
-  </p:clrMapOvr>
-</p:sld>
-</file>
-
-<file path=ppt/slides/slide12.xml><?xml version="1.0" encoding="utf-8"?>
-<p:sld xmlns:a="http://schemas.openxmlformats.org/drawingml/2006/main" xmlns:r="http://schemas.openxmlformats.org/officeDocument/2006/relationships" xmlns:p="http://schemas.openxmlformats.org/presentationml/2006/main">
-  <p:cSld>
-    <p:spTree>
-      <p:nvGrpSpPr>
-        <p:cNvPr id="1" name=""/>
-        <p:cNvGrpSpPr/>
-        <p:nvPr/>
-      </p:nvGrpSpPr>
-      <p:grpSpPr>
-        <a:xfrm>
-          <a:off x="0" y="0"/>
-          <a:ext cx="0" cy="0"/>
-          <a:chOff x="0" y="0"/>
-          <a:chExt cx="0" cy="0"/>
-        </a:xfrm>
-      </p:grpSpPr>
-      <p:sp>
-        <p:nvSpPr>
-          <p:cNvPr id="2" name="Title 1">
-            <a:extLst>
-              <a:ext uri="{FF2B5EF4-FFF2-40B4-BE49-F238E27FC236}">
-                <a16:creationId xmlns:a16="http://schemas.microsoft.com/office/drawing/2014/main" id="{BC6F9511-CB58-AC49-AD98-860912780FFE}"/>
-              </a:ext>
-            </a:extLst>
-          </p:cNvPr>
-          <p:cNvSpPr>
-            <a:spLocks noGrp="1"/>
-          </p:cNvSpPr>
-          <p:nvPr>
-            <p:ph type="title"/>
-          </p:nvPr>
-        </p:nvSpPr>
-        <p:spPr>
-          <a:xfrm>
-            <a:off x="628650" y="2563244"/>
-            <a:ext cx="7886700" cy="588511"/>
-          </a:xfrm>
-        </p:spPr>
-        <p:txBody>
-          <a:bodyPr>
-            <a:normAutofit fontScale="90000"/>
-          </a:bodyPr>
-          <a:lstStyle/>
-          <a:p>
-            <a:r>
-              <a:rPr lang="en-US" dirty="0"/>
-              <a:t>Question 1: Methods and Control Structures</a:t>
-            </a:r>
-            <a:br>
-              <a:rPr lang="en-US" dirty="0"/>
-            </a:br>
-            <a:r>
-              <a:rPr lang="en-US" dirty="0"/>
-              <a:t>See previous years' similar FRQs: </a:t>
-            </a:r>
-            <a:br>
-              <a:rPr lang="en-US" dirty="0"/>
-            </a:br>
-            <a:r>
-              <a:rPr lang="en-US" dirty="0"/>
-              <a:t>2018 #1, 2019 #1, 2017 #3, 2018 #2, 2021#1</a:t>
-            </a:r>
-          </a:p>
-        </p:txBody>
-      </p:sp>
-    </p:spTree>
-    <p:extLst>
-      <p:ext uri="{BB962C8B-B14F-4D97-AF65-F5344CB8AC3E}">
-        <p14:creationId xmlns:p14="http://schemas.microsoft.com/office/powerpoint/2010/main" val="344695802"/>
       </p:ext>
     </p:extLst>
   </p:cSld>
@@ -8934,188 +9465,41 @@
         </p:nvSpPr>
         <p:spPr>
           <a:xfrm>
-            <a:off x="167177" y="128185"/>
+            <a:off x="628650" y="2563244"/>
             <a:ext cx="7886700" cy="588511"/>
           </a:xfrm>
         </p:spPr>
         <p:txBody>
-          <a:bodyPr/>
-          <a:lstStyle/>
-          <a:p>
-            <a:r>
-              <a:rPr lang="en-US" dirty="0"/>
-              <a:t>Methods and Control Structures</a:t>
-            </a:r>
-          </a:p>
-        </p:txBody>
-      </p:sp>
-      <p:sp>
-        <p:nvSpPr>
-          <p:cNvPr id="3" name="Content Placeholder 2">
-            <a:extLst>
-              <a:ext uri="{FF2B5EF4-FFF2-40B4-BE49-F238E27FC236}">
-                <a16:creationId xmlns:a16="http://schemas.microsoft.com/office/drawing/2014/main" id="{CE6BD10B-9D13-604D-9877-97B355109287}"/>
-              </a:ext>
-            </a:extLst>
-          </p:cNvPr>
-          <p:cNvSpPr>
-            <a:spLocks noGrp="1"/>
-          </p:cNvSpPr>
-          <p:nvPr>
-            <p:ph idx="1"/>
-          </p:nvPr>
-        </p:nvSpPr>
-        <p:spPr>
-          <a:xfrm>
-            <a:off x="167177" y="888763"/>
-            <a:ext cx="8780270" cy="4623273"/>
-          </a:xfrm>
-        </p:spPr>
-        <p:txBody>
           <a:bodyPr>
-            <a:normAutofit lnSpcReduction="10000"/>
+            <a:normAutofit fontScale="90000"/>
           </a:bodyPr>
           <a:lstStyle/>
           <a:p>
-            <a:pPr marL="0" indent="0">
-              <a:buNone/>
-            </a:pPr>
-            <a:r>
-              <a:rPr lang="en-US" dirty="0">
-                <a:latin typeface="Gill Sans MT" panose="020B0502020104020203" pitchFamily="34" charset="77"/>
-                <a:cs typeface="Courier New" panose="02070309020205020404" pitchFamily="49" charset="0"/>
-              </a:rPr>
-              <a:t>Question 1 of the FRQ will likely ask you to write methods that utilize control structures(for vs while loops, conditionals). </a:t>
-            </a:r>
-          </a:p>
-          <a:p>
-            <a:pPr marL="0" indent="0">
-              <a:buNone/>
-            </a:pPr>
-            <a:endParaRPr lang="en-US" dirty="0">
-              <a:latin typeface="Gill Sans MT" panose="020B0502020104020203" pitchFamily="34" charset="77"/>
-              <a:cs typeface="Courier New" panose="02070309020205020404" pitchFamily="49" charset="0"/>
-            </a:endParaRPr>
-          </a:p>
-          <a:p>
-            <a:pPr marL="0" indent="0">
-              <a:buNone/>
-            </a:pPr>
-            <a:r>
-              <a:rPr lang="en-US" dirty="0">
-                <a:latin typeface="Gill Sans MT" panose="020B0502020104020203" pitchFamily="34" charset="77"/>
-                <a:cs typeface="Courier New" panose="02070309020205020404" pitchFamily="49" charset="0"/>
-              </a:rPr>
-              <a:t>You are given (usually static) methods with parameters and will be asked to write a method that calls one of the given methods in its implementation. </a:t>
-            </a:r>
-          </a:p>
-          <a:p>
-            <a:pPr marL="0" indent="0">
-              <a:buNone/>
-            </a:pPr>
-            <a:endParaRPr lang="en-US" dirty="0">
-              <a:latin typeface="Gill Sans MT" panose="020B0502020104020203" pitchFamily="34" charset="77"/>
-              <a:cs typeface="Courier New" panose="02070309020205020404" pitchFamily="49" charset="0"/>
-            </a:endParaRPr>
-          </a:p>
-          <a:p>
-            <a:pPr marL="0" indent="0">
-              <a:buNone/>
-            </a:pPr>
             <a:r>
               <a:rPr lang="en-US" dirty="0"/>
-              <a:t>If a method comment says /* Implementation not shown */. You do not to implement the method. But you'll likely need to use the method in your code at least once.</a:t>
-            </a:r>
-          </a:p>
-          <a:p>
-            <a:pPr marL="0" indent="0">
-              <a:buNone/>
-            </a:pPr>
-            <a:endParaRPr lang="en-US" dirty="0"/>
-          </a:p>
-          <a:p>
-            <a:pPr marL="0" indent="0">
-              <a:buNone/>
-            </a:pPr>
-            <a:r>
-              <a:rPr lang="en-US" dirty="0">
-                <a:solidFill>
-                  <a:srgbClr val="FF0000"/>
-                </a:solidFill>
-              </a:rPr>
-              <a:t>AVOID using arrays/</a:t>
-            </a:r>
-            <a:r>
-              <a:rPr lang="en-US" dirty="0" err="1">
-                <a:solidFill>
-                  <a:srgbClr val="FF0000"/>
-                </a:solidFill>
-              </a:rPr>
-              <a:t>arraylists</a:t>
-            </a:r>
-            <a:r>
-              <a:rPr lang="en-US" dirty="0">
-                <a:solidFill>
-                  <a:srgbClr val="FF0000"/>
-                </a:solidFill>
-              </a:rPr>
-              <a:t> for this problem.</a:t>
-            </a:r>
-          </a:p>
-          <a:p>
-            <a:pPr marL="0" indent="0">
-              <a:buNone/>
-            </a:pPr>
-            <a:endParaRPr lang="en-US" dirty="0">
-              <a:latin typeface="Gill Sans MT" panose="020B0502020104020203" pitchFamily="34" charset="77"/>
-              <a:cs typeface="Courier New" panose="02070309020205020404" pitchFamily="49" charset="0"/>
-            </a:endParaRPr>
-          </a:p>
-          <a:p>
-            <a:pPr marL="0" indent="0">
-              <a:buNone/>
-            </a:pPr>
-            <a:r>
-              <a:rPr lang="en-US" dirty="0">
-                <a:latin typeface="Gill Sans MT" panose="020B0502020104020203" pitchFamily="34" charset="77"/>
-                <a:cs typeface="Courier New" panose="02070309020205020404" pitchFamily="49" charset="0"/>
-              </a:rPr>
-              <a:t>2019 #1 is a good example of this problem. </a:t>
-            </a:r>
-          </a:p>
-          <a:p>
-            <a:pPr marL="0" indent="0">
-              <a:buNone/>
-            </a:pPr>
-            <a:endParaRPr lang="en-US" dirty="0">
-              <a:latin typeface="Gill Sans MT" panose="020B0502020104020203" pitchFamily="34" charset="77"/>
-              <a:cs typeface="Courier New" panose="02070309020205020404" pitchFamily="49" charset="0"/>
-            </a:endParaRPr>
-          </a:p>
-          <a:p>
-            <a:pPr marL="0" indent="0">
-              <a:buNone/>
-            </a:pPr>
-            <a:endParaRPr lang="en-US" dirty="0">
-              <a:latin typeface="Gill Sans MT" panose="020B0502020104020203" pitchFamily="34" charset="77"/>
-              <a:cs typeface="Courier New" panose="02070309020205020404" pitchFamily="49" charset="0"/>
-            </a:endParaRPr>
-          </a:p>
-          <a:p>
-            <a:pPr marL="0" indent="0">
-              <a:buNone/>
-            </a:pPr>
-            <a:endParaRPr lang="en-US" dirty="0">
-              <a:latin typeface="Gill Sans MT" panose="020B0502020104020203" pitchFamily="34" charset="77"/>
-              <a:cs typeface="Courier New" panose="02070309020205020404" pitchFamily="49" charset="0"/>
-            </a:endParaRPr>
+              <a:t>Question 1: Methods and Control Structures</a:t>
+            </a:r>
+            <a:br>
+              <a:rPr lang="en-US" dirty="0"/>
+            </a:br>
+            <a:r>
+              <a:rPr lang="en-US" dirty="0"/>
+              <a:t>See previous years' similar FRQs: </a:t>
+            </a:r>
+            <a:br>
+              <a:rPr lang="en-US" dirty="0"/>
+            </a:br>
+            <a:r>
+              <a:rPr lang="en-US" dirty="0"/>
+              <a:t>2018 #1, 2019 #1, 2017 #3, 2018 #2, 2021#1</a:t>
+            </a:r>
           </a:p>
         </p:txBody>
       </p:sp>
     </p:spTree>
     <p:extLst>
       <p:ext uri="{BB962C8B-B14F-4D97-AF65-F5344CB8AC3E}">
-        <p14:creationId xmlns:p14="http://schemas.microsoft.com/office/powerpoint/2010/main" val="102519431"/>
+        <p14:creationId xmlns:p14="http://schemas.microsoft.com/office/powerpoint/2010/main" val="344695802"/>
       </p:ext>
     </p:extLst>
   </p:cSld>
@@ -9198,6 +9582,232 @@
           </a:xfrm>
         </p:spPr>
         <p:txBody>
+          <a:bodyPr>
+            <a:normAutofit lnSpcReduction="10000"/>
+          </a:bodyPr>
+          <a:lstStyle/>
+          <a:p>
+            <a:pPr marL="0" indent="0">
+              <a:buNone/>
+            </a:pPr>
+            <a:r>
+              <a:rPr lang="en-US" dirty="0">
+                <a:latin typeface="Gill Sans MT" panose="020B0502020104020203" pitchFamily="34" charset="77"/>
+                <a:cs typeface="Courier New" panose="02070309020205020404" pitchFamily="49" charset="0"/>
+              </a:rPr>
+              <a:t>Question 1 of the FRQ will likely ask you to write methods that utilize control structures(for vs while loops, conditionals). </a:t>
+            </a:r>
+          </a:p>
+          <a:p>
+            <a:pPr marL="0" indent="0">
+              <a:buNone/>
+            </a:pPr>
+            <a:endParaRPr lang="en-US" dirty="0">
+              <a:latin typeface="Gill Sans MT" panose="020B0502020104020203" pitchFamily="34" charset="77"/>
+              <a:cs typeface="Courier New" panose="02070309020205020404" pitchFamily="49" charset="0"/>
+            </a:endParaRPr>
+          </a:p>
+          <a:p>
+            <a:pPr marL="0" indent="0">
+              <a:buNone/>
+            </a:pPr>
+            <a:r>
+              <a:rPr lang="en-US" dirty="0">
+                <a:latin typeface="Gill Sans MT" panose="020B0502020104020203" pitchFamily="34" charset="77"/>
+                <a:cs typeface="Courier New" panose="02070309020205020404" pitchFamily="49" charset="0"/>
+              </a:rPr>
+              <a:t>You are given (usually static) methods with parameters and will be asked to write a method that calls one of the given methods in its implementation. </a:t>
+            </a:r>
+          </a:p>
+          <a:p>
+            <a:pPr marL="0" indent="0">
+              <a:buNone/>
+            </a:pPr>
+            <a:endParaRPr lang="en-US" dirty="0">
+              <a:latin typeface="Gill Sans MT" panose="020B0502020104020203" pitchFamily="34" charset="77"/>
+              <a:cs typeface="Courier New" panose="02070309020205020404" pitchFamily="49" charset="0"/>
+            </a:endParaRPr>
+          </a:p>
+          <a:p>
+            <a:pPr marL="0" indent="0">
+              <a:buNone/>
+            </a:pPr>
+            <a:r>
+              <a:rPr lang="en-US" dirty="0"/>
+              <a:t>If a method comment says /* Implementation not shown */. You do not to implement the method. But you'll likely need to use the method in your code at least once.</a:t>
+            </a:r>
+          </a:p>
+          <a:p>
+            <a:pPr marL="0" indent="0">
+              <a:buNone/>
+            </a:pPr>
+            <a:endParaRPr lang="en-US" dirty="0"/>
+          </a:p>
+          <a:p>
+            <a:pPr marL="0" indent="0">
+              <a:buNone/>
+            </a:pPr>
+            <a:r>
+              <a:rPr lang="en-US" dirty="0">
+                <a:solidFill>
+                  <a:srgbClr val="FF0000"/>
+                </a:solidFill>
+              </a:rPr>
+              <a:t>AVOID using arrays/</a:t>
+            </a:r>
+            <a:r>
+              <a:rPr lang="en-US" dirty="0" err="1">
+                <a:solidFill>
+                  <a:srgbClr val="FF0000"/>
+                </a:solidFill>
+              </a:rPr>
+              <a:t>arraylists</a:t>
+            </a:r>
+            <a:r>
+              <a:rPr lang="en-US" dirty="0">
+                <a:solidFill>
+                  <a:srgbClr val="FF0000"/>
+                </a:solidFill>
+              </a:rPr>
+              <a:t> for this problem.</a:t>
+            </a:r>
+          </a:p>
+          <a:p>
+            <a:pPr marL="0" indent="0">
+              <a:buNone/>
+            </a:pPr>
+            <a:endParaRPr lang="en-US" dirty="0">
+              <a:latin typeface="Gill Sans MT" panose="020B0502020104020203" pitchFamily="34" charset="77"/>
+              <a:cs typeface="Courier New" panose="02070309020205020404" pitchFamily="49" charset="0"/>
+            </a:endParaRPr>
+          </a:p>
+          <a:p>
+            <a:pPr marL="0" indent="0">
+              <a:buNone/>
+            </a:pPr>
+            <a:r>
+              <a:rPr lang="en-US" dirty="0">
+                <a:latin typeface="Gill Sans MT" panose="020B0502020104020203" pitchFamily="34" charset="77"/>
+                <a:cs typeface="Courier New" panose="02070309020205020404" pitchFamily="49" charset="0"/>
+              </a:rPr>
+              <a:t>2019 #1 is a good example of this problem. </a:t>
+            </a:r>
+          </a:p>
+          <a:p>
+            <a:pPr marL="0" indent="0">
+              <a:buNone/>
+            </a:pPr>
+            <a:endParaRPr lang="en-US" dirty="0">
+              <a:latin typeface="Gill Sans MT" panose="020B0502020104020203" pitchFamily="34" charset="77"/>
+              <a:cs typeface="Courier New" panose="02070309020205020404" pitchFamily="49" charset="0"/>
+            </a:endParaRPr>
+          </a:p>
+          <a:p>
+            <a:pPr marL="0" indent="0">
+              <a:buNone/>
+            </a:pPr>
+            <a:endParaRPr lang="en-US" dirty="0">
+              <a:latin typeface="Gill Sans MT" panose="020B0502020104020203" pitchFamily="34" charset="77"/>
+              <a:cs typeface="Courier New" panose="02070309020205020404" pitchFamily="49" charset="0"/>
+            </a:endParaRPr>
+          </a:p>
+          <a:p>
+            <a:pPr marL="0" indent="0">
+              <a:buNone/>
+            </a:pPr>
+            <a:endParaRPr lang="en-US" dirty="0">
+              <a:latin typeface="Gill Sans MT" panose="020B0502020104020203" pitchFamily="34" charset="77"/>
+              <a:cs typeface="Courier New" panose="02070309020205020404" pitchFamily="49" charset="0"/>
+            </a:endParaRPr>
+          </a:p>
+        </p:txBody>
+      </p:sp>
+    </p:spTree>
+    <p:extLst>
+      <p:ext uri="{BB962C8B-B14F-4D97-AF65-F5344CB8AC3E}">
+        <p14:creationId xmlns:p14="http://schemas.microsoft.com/office/powerpoint/2010/main" val="102519431"/>
+      </p:ext>
+    </p:extLst>
+  </p:cSld>
+  <p:clrMapOvr>
+    <a:masterClrMapping/>
+  </p:clrMapOvr>
+</p:sld>
+</file>
+
+<file path=ppt/slides/slide15.xml><?xml version="1.0" encoding="utf-8"?>
+<p:sld xmlns:a="http://schemas.openxmlformats.org/drawingml/2006/main" xmlns:r="http://schemas.openxmlformats.org/officeDocument/2006/relationships" xmlns:p="http://schemas.openxmlformats.org/presentationml/2006/main">
+  <p:cSld>
+    <p:spTree>
+      <p:nvGrpSpPr>
+        <p:cNvPr id="1" name=""/>
+        <p:cNvGrpSpPr/>
+        <p:nvPr/>
+      </p:nvGrpSpPr>
+      <p:grpSpPr>
+        <a:xfrm>
+          <a:off x="0" y="0"/>
+          <a:ext cx="0" cy="0"/>
+          <a:chOff x="0" y="0"/>
+          <a:chExt cx="0" cy="0"/>
+        </a:xfrm>
+      </p:grpSpPr>
+      <p:sp>
+        <p:nvSpPr>
+          <p:cNvPr id="2" name="Title 1">
+            <a:extLst>
+              <a:ext uri="{FF2B5EF4-FFF2-40B4-BE49-F238E27FC236}">
+                <a16:creationId xmlns:a16="http://schemas.microsoft.com/office/drawing/2014/main" id="{BC6F9511-CB58-AC49-AD98-860912780FFE}"/>
+              </a:ext>
+            </a:extLst>
+          </p:cNvPr>
+          <p:cNvSpPr>
+            <a:spLocks noGrp="1"/>
+          </p:cNvSpPr>
+          <p:nvPr>
+            <p:ph type="title"/>
+          </p:nvPr>
+        </p:nvSpPr>
+        <p:spPr>
+          <a:xfrm>
+            <a:off x="167177" y="128185"/>
+            <a:ext cx="7886700" cy="588511"/>
+          </a:xfrm>
+        </p:spPr>
+        <p:txBody>
+          <a:bodyPr/>
+          <a:lstStyle/>
+          <a:p>
+            <a:r>
+              <a:rPr lang="en-US" dirty="0"/>
+              <a:t>Methods and Control Structures</a:t>
+            </a:r>
+          </a:p>
+        </p:txBody>
+      </p:sp>
+      <p:sp>
+        <p:nvSpPr>
+          <p:cNvPr id="3" name="Content Placeholder 2">
+            <a:extLst>
+              <a:ext uri="{FF2B5EF4-FFF2-40B4-BE49-F238E27FC236}">
+                <a16:creationId xmlns:a16="http://schemas.microsoft.com/office/drawing/2014/main" id="{CE6BD10B-9D13-604D-9877-97B355109287}"/>
+              </a:ext>
+            </a:extLst>
+          </p:cNvPr>
+          <p:cNvSpPr>
+            <a:spLocks noGrp="1"/>
+          </p:cNvSpPr>
+          <p:nvPr>
+            <p:ph idx="1"/>
+          </p:nvPr>
+        </p:nvSpPr>
+        <p:spPr>
+          <a:xfrm>
+            <a:off x="167177" y="888763"/>
+            <a:ext cx="8780270" cy="4623273"/>
+          </a:xfrm>
+        </p:spPr>
+        <p:txBody>
           <a:bodyPr/>
           <a:lstStyle/>
           <a:p>
@@ -9343,7 +9953,7 @@
 </p:sld>
 </file>
 
-<file path=ppt/slides/slide15.xml><?xml version="1.0" encoding="utf-8"?>
+<file path=ppt/slides/slide16.xml><?xml version="1.0" encoding="utf-8"?>
 <p:sld xmlns:a="http://schemas.openxmlformats.org/drawingml/2006/main" xmlns:r="http://schemas.openxmlformats.org/officeDocument/2006/relationships" xmlns:p="http://schemas.openxmlformats.org/presentationml/2006/main">
   <p:cSld>
     <p:spTree>
@@ -9513,8 +10123,8 @@
           <p:nvPr/>
         </p:nvGraphicFramePr>
         <p:xfrm>
-          <a:off x="889000" y="1143000"/>
-          <a:ext cx="7366000" cy="4008439"/>
+          <a:off x="889000" y="841248"/>
+          <a:ext cx="7366000" cy="4538791"/>
         </p:xfrm>
         <a:graphic>
           <a:graphicData uri="http://schemas.openxmlformats.org/drawingml/2006/table">
@@ -9559,7 +10169,7 @@
                         <a:tabLst/>
                       </a:pPr>
                       <a:r>
-                        <a:rPr kumimoji="0" lang="en-US" sz="1500" b="0" i="0" u="none" strike="noStrike" cap="none" normalizeH="0" baseline="0">
+                        <a:rPr kumimoji="0" lang="en-US" sz="1400" b="0" i="0" u="none" strike="noStrike" cap="none" normalizeH="0" baseline="0">
                           <a:ln>
                             <a:noFill/>
                           </a:ln>
@@ -9642,7 +10252,7 @@
                         <a:tabLst/>
                       </a:pPr>
                       <a:r>
-                        <a:rPr kumimoji="0" lang="en-US" sz="1500" b="0" i="0" u="none" strike="noStrike" cap="none" normalizeH="0" baseline="0">
+                        <a:rPr kumimoji="0" lang="en-US" sz="1400" b="0" i="0" u="none" strike="noStrike" cap="none" normalizeH="0" baseline="0">
                           <a:ln>
                             <a:noFill/>
                           </a:ln>
@@ -9733,7 +10343,7 @@
                         <a:defRPr/>
                       </a:pPr>
                       <a:r>
-                        <a:rPr lang="en-US" sz="1500" kern="1200" dirty="0">
+                        <a:rPr lang="en-US" sz="1400" kern="1200" dirty="0">
                           <a:solidFill>
                             <a:schemeClr val="tx1"/>
                           </a:solidFill>
@@ -9815,7 +10425,7 @@
                         <a:defRPr/>
                       </a:pPr>
                       <a:r>
-                        <a:rPr lang="en-US" sz="1500" kern="1200" dirty="0">
+                        <a:rPr lang="en-US" sz="1400" kern="1200" dirty="0">
                           <a:solidFill>
                             <a:schemeClr val="tx1"/>
                           </a:solidFill>
@@ -9906,7 +10516,7 @@
                         <a:tabLst/>
                       </a:pPr>
                       <a:r>
-                        <a:rPr kumimoji="0" lang="en-US" sz="1500" b="0" i="0" u="none" strike="noStrike" cap="none" normalizeH="0" baseline="0" dirty="0">
+                        <a:rPr kumimoji="0" lang="en-US" sz="1400" b="0" i="0" u="none" strike="noStrike" cap="none" normalizeH="0" baseline="0" dirty="0">
                           <a:ln>
                             <a:noFill/>
                           </a:ln>
@@ -9989,7 +10599,7 @@
                         <a:tabLst/>
                       </a:pPr>
                       <a:r>
-                        <a:rPr kumimoji="0" lang="en-US" sz="1500" b="0" i="0" u="none" strike="noStrike" cap="none" normalizeH="0" baseline="0" dirty="0">
+                        <a:rPr kumimoji="0" lang="en-US" sz="1400" b="0" i="0" u="none" strike="noStrike" cap="none" normalizeH="0" baseline="0" dirty="0">
                           <a:ln>
                             <a:noFill/>
                           </a:ln>
@@ -10079,7 +10689,7 @@
                         <a:tabLst/>
                       </a:pPr>
                       <a:r>
-                        <a:rPr kumimoji="0" lang="en-US" sz="1500" b="0" i="0" u="none" strike="noStrike" cap="none" normalizeH="0" baseline="0" dirty="0">
+                        <a:rPr kumimoji="0" lang="en-US" sz="1400" b="0" i="0" u="none" strike="noStrike" cap="none" normalizeH="0" baseline="0" dirty="0">
                           <a:ln>
                             <a:noFill/>
                           </a:ln>
@@ -10093,7 +10703,7 @@
                         <a:t>substring(</a:t>
                       </a:r>
                       <a:r>
-                        <a:rPr kumimoji="0" lang="en-US" sz="1500" b="1" i="0" u="none" strike="noStrike" cap="none" normalizeH="0" baseline="0" dirty="0">
+                        <a:rPr kumimoji="0" lang="en-US" sz="1400" b="1" i="0" u="none" strike="noStrike" cap="none" normalizeH="0" baseline="0" dirty="0">
                           <a:ln>
                             <a:noFill/>
                           </a:ln>
@@ -10107,7 +10717,7 @@
                         <a:t>index1</a:t>
                       </a:r>
                       <a:r>
-                        <a:rPr kumimoji="0" lang="en-US" sz="1500" b="0" i="0" u="none" strike="noStrike" cap="none" normalizeH="0" baseline="0" dirty="0">
+                        <a:rPr kumimoji="0" lang="en-US" sz="1400" b="0" i="0" u="none" strike="noStrike" cap="none" normalizeH="0" baseline="0" dirty="0">
                           <a:ln>
                             <a:noFill/>
                           </a:ln>
@@ -10121,7 +10731,7 @@
                         <a:t>, </a:t>
                       </a:r>
                       <a:r>
-                        <a:rPr kumimoji="0" lang="en-US" sz="1500" b="1" i="0" u="none" strike="noStrike" cap="none" normalizeH="0" baseline="0" dirty="0">
+                        <a:rPr kumimoji="0" lang="en-US" sz="1400" b="1" i="0" u="none" strike="noStrike" cap="none" normalizeH="0" baseline="0" dirty="0">
                           <a:ln>
                             <a:noFill/>
                           </a:ln>
@@ -10135,7 +10745,7 @@
                         <a:t>index2</a:t>
                       </a:r>
                       <a:r>
-                        <a:rPr kumimoji="0" lang="en-US" sz="1500" b="0" i="0" u="none" strike="noStrike" cap="none" normalizeH="0" baseline="0" dirty="0">
+                        <a:rPr kumimoji="0" lang="en-US" sz="1400" b="0" i="0" u="none" strike="noStrike" cap="none" normalizeH="0" baseline="0" dirty="0">
                           <a:ln>
                             <a:noFill/>
                           </a:ln>
@@ -10167,7 +10777,7 @@
                         <a:tabLst/>
                       </a:pPr>
                       <a:r>
-                        <a:rPr kumimoji="0" lang="en-US" sz="1500" b="0" i="0" u="none" strike="noStrike" cap="none" normalizeH="0" baseline="0" dirty="0">
+                        <a:rPr kumimoji="0" lang="en-US" sz="1400" b="0" i="0" u="none" strike="noStrike" cap="none" normalizeH="0" baseline="0" dirty="0">
                           <a:ln>
                             <a:noFill/>
                           </a:ln>
@@ -10199,7 +10809,7 @@
                         <a:tabLst/>
                       </a:pPr>
                       <a:r>
-                        <a:rPr kumimoji="0" lang="en-US" sz="1500" b="0" i="0" u="none" strike="noStrike" cap="none" normalizeH="0" baseline="0" dirty="0">
+                        <a:rPr kumimoji="0" lang="en-US" sz="1400" b="0" i="0" u="none" strike="noStrike" cap="none" normalizeH="0" baseline="0" dirty="0">
                           <a:ln>
                             <a:noFill/>
                           </a:ln>
@@ -10213,7 +10823,7 @@
                         <a:t>substring(</a:t>
                       </a:r>
                       <a:r>
-                        <a:rPr kumimoji="0" lang="en-US" sz="1500" b="1" i="0" u="none" strike="noStrike" cap="none" normalizeH="0" baseline="0" dirty="0">
+                        <a:rPr kumimoji="0" lang="en-US" sz="1400" b="1" i="0" u="none" strike="noStrike" cap="none" normalizeH="0" baseline="0" dirty="0">
                           <a:ln>
                             <a:noFill/>
                           </a:ln>
@@ -10227,7 +10837,7 @@
                         <a:t>index1</a:t>
                       </a:r>
                       <a:r>
-                        <a:rPr kumimoji="0" lang="en-US" sz="1500" b="0" i="0" u="none" strike="noStrike" cap="none" normalizeH="0" baseline="0" dirty="0">
+                        <a:rPr kumimoji="0" lang="en-US" sz="1400" b="0" i="0" u="none" strike="noStrike" cap="none" normalizeH="0" baseline="0" dirty="0">
                           <a:ln>
                             <a:noFill/>
                           </a:ln>
@@ -10310,7 +10920,7 @@
                         <a:tabLst/>
                       </a:pPr>
                       <a:r>
-                        <a:rPr kumimoji="0" lang="en-US" sz="1500" b="0" i="0" u="none" strike="noStrike" cap="none" normalizeH="0" baseline="0" dirty="0">
+                        <a:rPr kumimoji="0" lang="en-US" sz="1400" b="0" i="0" u="none" strike="noStrike" cap="none" normalizeH="0" baseline="0" dirty="0">
                           <a:ln>
                             <a:noFill/>
                           </a:ln>
@@ -10324,7 +10934,7 @@
                         <a:t>Returns the characters in this string from </a:t>
                       </a:r>
                       <a:r>
-                        <a:rPr kumimoji="0" lang="en-US" sz="1500" b="0" i="1" u="none" strike="noStrike" cap="none" normalizeH="0" baseline="0" dirty="0">
+                        <a:rPr kumimoji="0" lang="en-US" sz="1400" b="0" i="1" u="none" strike="noStrike" cap="none" normalizeH="0" baseline="0" dirty="0">
                           <a:ln>
                             <a:noFill/>
                           </a:ln>
@@ -10338,7 +10948,7 @@
                         <a:t>index1</a:t>
                       </a:r>
                       <a:r>
-                        <a:rPr kumimoji="0" lang="en-US" sz="1500" b="0" i="0" u="none" strike="noStrike" cap="none" normalizeH="0" baseline="0" dirty="0">
+                        <a:rPr kumimoji="0" lang="en-US" sz="1400" b="0" i="0" u="none" strike="noStrike" cap="none" normalizeH="0" baseline="0" dirty="0">
                           <a:ln>
                             <a:noFill/>
                           </a:ln>
@@ -10352,7 +10962,7 @@
                         <a:t> (inclusive) to </a:t>
                       </a:r>
                       <a:r>
-                        <a:rPr kumimoji="0" lang="en-US" sz="1500" b="0" i="1" u="none" strike="noStrike" cap="none" normalizeH="0" baseline="0" dirty="0">
+                        <a:rPr kumimoji="0" lang="en-US" sz="1400" b="0" i="1" u="none" strike="noStrike" cap="none" normalizeH="0" baseline="0" dirty="0">
                           <a:ln>
                             <a:noFill/>
                           </a:ln>
@@ -10366,7 +10976,7 @@
                         <a:t>index2</a:t>
                       </a:r>
                       <a:r>
-                        <a:rPr kumimoji="0" lang="en-US" sz="1500" b="0" i="0" u="none" strike="noStrike" cap="none" normalizeH="0" baseline="0" dirty="0">
+                        <a:rPr kumimoji="0" lang="en-US" sz="1400" b="0" i="0" u="none" strike="noStrike" cap="none" normalizeH="0" baseline="0" dirty="0">
                           <a:ln>
                             <a:noFill/>
                           </a:ln>
@@ -10380,7 +10990,7 @@
                         <a:t> (</a:t>
                       </a:r>
                       <a:r>
-                        <a:rPr kumimoji="0" lang="en-US" sz="1500" b="0" i="0" u="sng" strike="noStrike" cap="none" normalizeH="0" baseline="0" dirty="0">
+                        <a:rPr kumimoji="0" lang="en-US" sz="1400" b="0" i="0" u="sng" strike="noStrike" cap="none" normalizeH="0" baseline="0" dirty="0">
                           <a:ln>
                             <a:noFill/>
                           </a:ln>
@@ -10394,7 +11004,7 @@
                         <a:t>exclusive</a:t>
                       </a:r>
                       <a:r>
-                        <a:rPr kumimoji="0" lang="en-US" sz="1500" b="0" i="0" u="none" strike="noStrike" cap="none" normalizeH="0" baseline="0" dirty="0">
+                        <a:rPr kumimoji="0" lang="en-US" sz="1400" b="0" i="0" u="none" strike="noStrike" cap="none" normalizeH="0" baseline="0" dirty="0">
                           <a:ln>
                             <a:noFill/>
                           </a:ln>
@@ -10426,7 +11036,7 @@
                         <a:tabLst/>
                       </a:pPr>
                       <a:r>
-                        <a:rPr kumimoji="0" lang="en-US" sz="1500" b="0" i="0" u="none" strike="noStrike" cap="none" normalizeH="0" baseline="0" dirty="0">
+                        <a:rPr kumimoji="0" lang="en-US" sz="1400" b="0" i="0" u="none" strike="noStrike" cap="none" normalizeH="0" baseline="0" dirty="0">
                           <a:ln>
                             <a:noFill/>
                           </a:ln>
@@ -10440,7 +11050,7 @@
                         <a:t>if </a:t>
                       </a:r>
                       <a:r>
-                        <a:rPr kumimoji="0" lang="en-US" sz="1500" b="0" i="1" u="none" strike="noStrike" cap="none" normalizeH="0" baseline="0" dirty="0">
+                        <a:rPr kumimoji="0" lang="en-US" sz="1400" b="0" i="1" u="none" strike="noStrike" cap="none" normalizeH="0" baseline="0" dirty="0">
                           <a:ln>
                             <a:noFill/>
                           </a:ln>
@@ -10454,7 +11064,7 @@
                         <a:t>index2</a:t>
                       </a:r>
                       <a:r>
-                        <a:rPr kumimoji="0" lang="en-US" sz="1500" b="0" i="0" u="none" strike="noStrike" cap="none" normalizeH="0" baseline="0" dirty="0">
+                        <a:rPr kumimoji="0" lang="en-US" sz="1400" b="0" i="0" u="none" strike="noStrike" cap="none" normalizeH="0" baseline="0" dirty="0">
                           <a:ln>
                             <a:noFill/>
                           </a:ln>
@@ -10528,7 +11138,7 @@
                     <a:lstStyle/>
                     <a:p>
                       <a:r>
-                        <a:rPr lang="en-US" sz="1500" kern="1200" dirty="0" err="1">
+                        <a:rPr lang="en-US" sz="1400" kern="1200" dirty="0" err="1">
                           <a:solidFill>
                             <a:schemeClr val="tx1"/>
                           </a:solidFill>
@@ -10540,7 +11150,7 @@
                         <a:t>boolean</a:t>
                       </a:r>
                       <a:r>
-                        <a:rPr lang="en-US" sz="1500" kern="1200" dirty="0">
+                        <a:rPr lang="en-US" sz="1400" kern="1200" dirty="0">
                           <a:solidFill>
                             <a:schemeClr val="tx1"/>
                           </a:solidFill>
@@ -10549,7 +11159,7 @@
                           <a:ea typeface="+mn-ea"/>
                           <a:cs typeface="Courier New" panose="02070309020205020404" pitchFamily="49" charset="0"/>
                         </a:rPr>
-                        <a:t> equals(String other)</a:t>
+                        <a:t> equals(Object other)</a:t>
                       </a:r>
                       <a:endParaRPr lang="en-US" sz="1500" dirty="0">
                         <a:effectLst/>
@@ -10626,7 +11236,7 @@
                         <a:tabLst/>
                       </a:pPr>
                       <a:r>
-                        <a:rPr lang="en-US" sz="1500" kern="1200" dirty="0">
+                        <a:rPr lang="en-US" sz="1400" kern="1200" dirty="0">
                           <a:solidFill>
                             <a:schemeClr val="tx1"/>
                           </a:solidFill>
@@ -10709,7 +11319,7 @@
                     <a:lstStyle/>
                     <a:p>
                       <a:r>
-                        <a:rPr lang="en-US" sz="1500" kern="1200" dirty="0">
+                        <a:rPr lang="en-US" sz="1400" kern="1200" dirty="0">
                           <a:solidFill>
                             <a:schemeClr val="tx1"/>
                           </a:solidFill>
@@ -10721,7 +11331,7 @@
                         <a:t>int </a:t>
                       </a:r>
                       <a:r>
-                        <a:rPr lang="en-US" sz="1500" kern="1200" dirty="0" err="1">
+                        <a:rPr lang="en-US" sz="1400" kern="1200" dirty="0" err="1">
                           <a:solidFill>
                             <a:schemeClr val="tx1"/>
                           </a:solidFill>
@@ -10733,7 +11343,7 @@
                         <a:t>compareTo</a:t>
                       </a:r>
                       <a:r>
-                        <a:rPr lang="en-US" sz="1500" kern="1200" dirty="0">
+                        <a:rPr lang="en-US" sz="1400" kern="1200" dirty="0">
                           <a:solidFill>
                             <a:schemeClr val="tx1"/>
                           </a:solidFill>
@@ -10803,7 +11413,7 @@
                     <a:lstStyle/>
                     <a:p>
                       <a:r>
-                        <a:rPr lang="en-US" sz="1500" kern="1200" dirty="0">
+                        <a:rPr lang="en-US" sz="1400" kern="1200" dirty="0">
                           <a:solidFill>
                             <a:schemeClr val="tx1"/>
                           </a:solidFill>
@@ -10895,7 +11505,7 @@
                         <a:defRPr/>
                       </a:pPr>
                       <a:r>
-                        <a:rPr kumimoji="0" lang="en-US" sz="1500" b="0" i="0" u="none" strike="noStrike" cap="none" normalizeH="0" baseline="0" dirty="0" err="1">
+                        <a:rPr kumimoji="0" lang="en-US" sz="1400" b="0" i="0" u="none" strike="noStrike" cap="none" normalizeH="0" baseline="0" dirty="0" err="1">
                           <a:ln>
                             <a:noFill/>
                           </a:ln>
@@ -10909,7 +11519,7 @@
                         <a:t>indexOf</a:t>
                       </a:r>
                       <a:r>
-                        <a:rPr kumimoji="0" lang="en-US" sz="1500" b="0" i="0" u="none" strike="noStrike" cap="none" normalizeH="0" baseline="0" dirty="0">
+                        <a:rPr kumimoji="0" lang="en-US" sz="1400" b="0" i="0" u="none" strike="noStrike" cap="none" normalizeH="0" baseline="0" dirty="0">
                           <a:ln>
                             <a:noFill/>
                           </a:ln>
@@ -10923,7 +11533,7 @@
                         <a:t>(</a:t>
                       </a:r>
                       <a:r>
-                        <a:rPr kumimoji="0" lang="en-US" sz="1500" b="1" i="0" u="none" strike="noStrike" cap="none" normalizeH="0" baseline="0" dirty="0">
+                        <a:rPr kumimoji="0" lang="en-US" sz="1400" b="1" i="0" u="none" strike="noStrike" cap="none" normalizeH="0" baseline="0" dirty="0">
                           <a:ln>
                             <a:noFill/>
                           </a:ln>
@@ -10937,7 +11547,7 @@
                         <a:t>str</a:t>
                       </a:r>
                       <a:r>
-                        <a:rPr kumimoji="0" lang="en-US" sz="1500" b="0" i="0" u="none" strike="noStrike" cap="none" normalizeH="0" baseline="0" dirty="0">
+                        <a:rPr kumimoji="0" lang="en-US" sz="1400" b="0" i="0" u="none" strike="noStrike" cap="none" normalizeH="0" baseline="0" dirty="0">
                           <a:ln>
                             <a:noFill/>
                           </a:ln>
@@ -11028,7 +11638,7 @@
                         <a:defRPr/>
                       </a:pPr>
                       <a:r>
-                        <a:rPr kumimoji="0" lang="en-US" sz="1500" b="0" i="0" u="none" strike="noStrike" cap="none" normalizeH="0" baseline="0" dirty="0">
+                        <a:rPr kumimoji="0" lang="en-US" sz="1400" b="0" i="0" u="none" strike="noStrike" cap="none" normalizeH="0" baseline="0" dirty="0">
                           <a:ln>
                             <a:noFill/>
                           </a:ln>
@@ -11046,6 +11656,223 @@
                       <a:endParaRPr lang="en-US" sz="1500" dirty="0">
                         <a:effectLst/>
                       </a:endParaRPr>
+                    </a:p>
+                  </a:txBody>
+                  <a:tcPr marL="76200" marR="76200" marT="38096" marB="38096" horzOverflow="overflow">
+                    <a:lnL w="12700" cap="flat" cmpd="sng" algn="ctr">
+                      <a:solidFill>
+                        <a:schemeClr val="tx1"/>
+                      </a:solidFill>
+                      <a:prstDash val="solid"/>
+                      <a:miter lim="800000"/>
+                      <a:headEnd type="none" w="med" len="med"/>
+                      <a:tailEnd type="none" w="med" len="med"/>
+                    </a:lnL>
+                    <a:lnR w="28575" cap="flat" cmpd="sng" algn="ctr">
+                      <a:solidFill>
+                        <a:schemeClr val="tx1"/>
+                      </a:solidFill>
+                      <a:prstDash val="solid"/>
+                      <a:miter lim="800000"/>
+                      <a:headEnd type="none" w="med" len="med"/>
+                      <a:tailEnd type="none" w="med" len="med"/>
+                    </a:lnR>
+                    <a:lnT w="12700" cap="flat" cmpd="sng" algn="ctr">
+                      <a:solidFill>
+                        <a:schemeClr val="tx1"/>
+                      </a:solidFill>
+                      <a:prstDash val="solid"/>
+                      <a:miter lim="800000"/>
+                      <a:headEnd type="none" w="med" len="med"/>
+                      <a:tailEnd type="none" w="med" len="med"/>
+                    </a:lnT>
+                    <a:lnB w="28575" cap="flat" cmpd="sng" algn="ctr">
+                      <a:solidFill>
+                        <a:schemeClr val="tx1"/>
+                      </a:solidFill>
+                      <a:prstDash val="solid"/>
+                      <a:miter lim="800000"/>
+                      <a:headEnd type="none" w="med" len="med"/>
+                      <a:tailEnd type="none" w="med" len="med"/>
+                    </a:lnB>
+                    <a:lnTlToBr>
+                      <a:noFill/>
+                    </a:lnTlToBr>
+                    <a:lnBlToTr>
+                      <a:noFill/>
+                    </a:lnBlToTr>
+                    <a:noFill/>
+                  </a:tcPr>
+                </a:tc>
+                <a:extLst>
+                  <a:ext uri="{0D108BD9-81ED-4DB2-BD59-A6C34878D82A}">
+                    <a16:rowId xmlns:a16="http://schemas.microsoft.com/office/drawing/2014/main" val="10006"/>
+                  </a:ext>
+                </a:extLst>
+              </a:tr>
+              <a:tr h="530352">
+                <a:tc>
+                  <a:txBody>
+                    <a:bodyPr/>
+                    <a:lstStyle/>
+                    <a:p>
+                      <a:pPr marL="0" marR="0" lvl="0" indent="0" algn="l" defTabSz="914400" rtl="0" eaLnBrk="1" fontAlgn="auto" latinLnBrk="0" hangingPunct="1">
+                        <a:lnSpc>
+                          <a:spcPct val="100000"/>
+                        </a:lnSpc>
+                        <a:spcBef>
+                          <a:spcPts val="0"/>
+                        </a:spcBef>
+                        <a:spcAft>
+                          <a:spcPts val="0"/>
+                        </a:spcAft>
+                        <a:buClrTx/>
+                        <a:buSzTx/>
+                        <a:buFontTx/>
+                        <a:buNone/>
+                        <a:tabLst/>
+                        <a:defRPr/>
+                      </a:pPr>
+                      <a:r>
+                        <a:rPr kumimoji="0" lang="en-US" sz="1400" b="0" i="0" u="none" strike="noStrike" cap="none" normalizeH="0" baseline="0" dirty="0" err="1">
+                          <a:ln>
+                            <a:noFill/>
+                          </a:ln>
+                          <a:solidFill>
+                            <a:schemeClr val="tx1"/>
+                          </a:solidFill>
+                          <a:effectLst/>
+                          <a:latin typeface="Courier New" pitchFamily="49" charset="0"/>
+                          <a:cs typeface="Times New Roman" pitchFamily="18" charset="0"/>
+                        </a:rPr>
+                        <a:t>String[] split(String del)</a:t>
+                      </a:r>
+                      <a:r>
+                        <a:rPr kumimoji="0" lang="en-US" sz="1400" b="0" i="0" u="none" strike="noStrike" cap="none" normalizeH="0" baseline="0" dirty="0">
+                          <a:ln>
+                            <a:noFill/>
+                          </a:ln>
+                          <a:solidFill>
+                            <a:schemeClr val="tx1"/>
+                          </a:solidFill>
+                          <a:effectLst/>
+                          <a:latin typeface="Courier New" pitchFamily="49" charset="0"/>
+                          <a:cs typeface="Times New Roman" pitchFamily="18" charset="0"/>
+                        </a:rPr>
+                        <a:t/>
+                      </a:r>
+                      <a:r>
+                        <a:rPr kumimoji="0" lang="en-US" sz="1400" b="1" i="0" u="none" strike="noStrike" cap="none" normalizeH="0" baseline="0" dirty="0">
+                          <a:ln>
+                            <a:noFill/>
+                          </a:ln>
+                          <a:solidFill>
+                            <a:schemeClr val="tx1"/>
+                          </a:solidFill>
+                          <a:effectLst/>
+                          <a:latin typeface="Tahoma" pitchFamily="34" charset="0"/>
+                          <a:cs typeface="Times New Roman" pitchFamily="18" charset="0"/>
+                        </a:rPr>
+                        <a:t/>
+                      </a:r>
+                      <a:r>
+                        <a:rPr kumimoji="0" lang="en-US" sz="1400" b="0" i="0" u="none" strike="noStrike" cap="none" normalizeH="0" baseline="0" dirty="0">
+                          <a:ln>
+                            <a:noFill/>
+                          </a:ln>
+                          <a:solidFill>
+                            <a:schemeClr val="tx1"/>
+                          </a:solidFill>
+                          <a:effectLst/>
+                          <a:latin typeface="Courier New" pitchFamily="49" charset="0"/>
+                          <a:cs typeface="Times New Roman" pitchFamily="18" charset="0"/>
+                        </a:rPr>
+                        <a:t/>
+                      </a:r>
+                    </a:p>
+                  </a:txBody>
+                  <a:tcPr marL="76200" marR="76200" marT="38096" marB="38096" horzOverflow="overflow">
+                    <a:lnL w="28575" cap="flat" cmpd="sng" algn="ctr">
+                      <a:solidFill>
+                        <a:schemeClr val="tx1"/>
+                      </a:solidFill>
+                      <a:prstDash val="solid"/>
+                      <a:miter lim="800000"/>
+                      <a:headEnd type="none" w="med" len="med"/>
+                      <a:tailEnd type="none" w="med" len="med"/>
+                    </a:lnL>
+                    <a:lnR w="12700" cap="flat" cmpd="sng" algn="ctr">
+                      <a:solidFill>
+                        <a:schemeClr val="tx1"/>
+                      </a:solidFill>
+                      <a:prstDash val="solid"/>
+                      <a:miter lim="800000"/>
+                      <a:headEnd type="none" w="med" len="med"/>
+                      <a:tailEnd type="none" w="med" len="med"/>
+                    </a:lnR>
+                    <a:lnT w="12700" cap="flat" cmpd="sng" algn="ctr">
+                      <a:solidFill>
+                        <a:schemeClr val="tx1"/>
+                      </a:solidFill>
+                      <a:prstDash val="solid"/>
+                      <a:miter lim="800000"/>
+                      <a:headEnd type="none" w="med" len="med"/>
+                      <a:tailEnd type="none" w="med" len="med"/>
+                    </a:lnT>
+                    <a:lnB w="28575" cap="flat" cmpd="sng" algn="ctr">
+                      <a:solidFill>
+                        <a:schemeClr val="tx1"/>
+                      </a:solidFill>
+                      <a:prstDash val="solid"/>
+                      <a:miter lim="800000"/>
+                      <a:headEnd type="none" w="med" len="med"/>
+                      <a:tailEnd type="none" w="med" len="med"/>
+                    </a:lnB>
+                    <a:lnTlToBr>
+                      <a:noFill/>
+                    </a:lnTlToBr>
+                    <a:lnBlToTr>
+                      <a:noFill/>
+                    </a:lnBlToTr>
+                    <a:noFill/>
+                  </a:tcPr>
+                </a:tc>
+                <a:tc>
+                  <a:txBody>
+                    <a:bodyPr/>
+                    <a:lstStyle/>
+                    <a:p>
+                      <a:pPr marL="0" marR="0" lvl="0" indent="0" algn="l" defTabSz="914400" rtl="0" eaLnBrk="1" fontAlgn="auto" latinLnBrk="0" hangingPunct="1">
+                        <a:lnSpc>
+                          <a:spcPct val="100000"/>
+                        </a:lnSpc>
+                        <a:spcBef>
+                          <a:spcPts val="0"/>
+                        </a:spcBef>
+                        <a:spcAft>
+                          <a:spcPts val="0"/>
+                        </a:spcAft>
+                        <a:buClrTx/>
+                        <a:buSzTx/>
+                        <a:buFontTx/>
+                        <a:buNone/>
+                        <a:tabLst/>
+                        <a:defRPr/>
+                      </a:pPr>
+                      <a:r>
+                        <a:rPr kumimoji="0" lang="en-US" sz="1400" b="0" i="0" u="none" strike="noStrike" cap="none" normalizeH="0" baseline="0" dirty="0">
+                          <a:ln>
+                            <a:noFill/>
+                          </a:ln>
+                          <a:solidFill>
+                            <a:schemeClr val="tx1"/>
+                          </a:solidFill>
+                          <a:effectLst/>
+                          <a:latin typeface="Tahoma" pitchFamily="34" charset="0"/>
+                          <a:cs typeface="Times New Roman" pitchFamily="18" charset="0"/>
+                        </a:rPr>
+                        <a:t>Returns an array of the substrings of this string, split around del</a:t>
+                      </a:r>
                     </a:p>
                   </a:txBody>
                   <a:tcPr marL="76200" marR="76200" marT="38096" marB="38096" horzOverflow="overflow">
@@ -11118,7 +11945,7 @@
 </p:sld>
 </file>
 
-<file path=ppt/slides/slide16.xml><?xml version="1.0" encoding="utf-8"?>
+<file path=ppt/slides/slide17.xml><?xml version="1.0" encoding="utf-8"?>
 <p:sld xmlns:a="http://schemas.openxmlformats.org/drawingml/2006/main" xmlns:r="http://schemas.openxmlformats.org/officeDocument/2006/relationships" xmlns:p="http://schemas.openxmlformats.org/presentationml/2006/main" showMasterPhAnim="0">
   <p:cSld>
     <p:spTree>
@@ -12460,7 +13287,7 @@
 </p:sld>
 </file>
 
-<file path=ppt/slides/slide17.xml><?xml version="1.0" encoding="utf-8"?>
+<file path=ppt/slides/slide18.xml><?xml version="1.0" encoding="utf-8"?>
 <p:sld xmlns:a="http://schemas.openxmlformats.org/drawingml/2006/main" xmlns:r="http://schemas.openxmlformats.org/officeDocument/2006/relationships" xmlns:p="http://schemas.openxmlformats.org/presentationml/2006/main" showMasterPhAnim="0">
   <p:cSld>
     <p:spTree>
@@ -13600,7 +14427,7 @@
 </p:sld>
 </file>
 
-<file path=ppt/slides/slide18.xml><?xml version="1.0" encoding="utf-8"?>
+<file path=ppt/slides/slide19.xml><?xml version="1.0" encoding="utf-8"?>
 <p:sld xmlns:a="http://schemas.openxmlformats.org/drawingml/2006/main" xmlns:r="http://schemas.openxmlformats.org/officeDocument/2006/relationships" xmlns:p="http://schemas.openxmlformats.org/presentationml/2006/main">
   <p:cSld>
     <p:spTree>
@@ -13768,85 +14595,6 @@
     <p:extLst>
       <p:ext uri="{BB962C8B-B14F-4D97-AF65-F5344CB8AC3E}">
         <p14:creationId xmlns:p14="http://schemas.microsoft.com/office/powerpoint/2010/main" val="370739180"/>
-      </p:ext>
-    </p:extLst>
-  </p:cSld>
-  <p:clrMapOvr>
-    <a:masterClrMapping/>
-  </p:clrMapOvr>
-</p:sld>
-</file>
-
-<file path=ppt/slides/slide19.xml><?xml version="1.0" encoding="utf-8"?>
-<p:sld xmlns:a="http://schemas.openxmlformats.org/drawingml/2006/main" xmlns:r="http://schemas.openxmlformats.org/officeDocument/2006/relationships" xmlns:p="http://schemas.openxmlformats.org/presentationml/2006/main">
-  <p:cSld>
-    <p:spTree>
-      <p:nvGrpSpPr>
-        <p:cNvPr id="1" name=""/>
-        <p:cNvGrpSpPr/>
-        <p:nvPr/>
-      </p:nvGrpSpPr>
-      <p:grpSpPr>
-        <a:xfrm>
-          <a:off x="0" y="0"/>
-          <a:ext cx="0" cy="0"/>
-          <a:chOff x="0" y="0"/>
-          <a:chExt cx="0" cy="0"/>
-        </a:xfrm>
-      </p:grpSpPr>
-      <p:sp>
-        <p:nvSpPr>
-          <p:cNvPr id="2" name="Title 1">
-            <a:extLst>
-              <a:ext uri="{FF2B5EF4-FFF2-40B4-BE49-F238E27FC236}">
-                <a16:creationId xmlns:a16="http://schemas.microsoft.com/office/drawing/2014/main" id="{BC6F9511-CB58-AC49-AD98-860912780FFE}"/>
-              </a:ext>
-            </a:extLst>
-          </p:cNvPr>
-          <p:cNvSpPr>
-            <a:spLocks noGrp="1"/>
-          </p:cNvSpPr>
-          <p:nvPr>
-            <p:ph type="title"/>
-          </p:nvPr>
-        </p:nvSpPr>
-        <p:spPr>
-          <a:xfrm>
-            <a:off x="628650" y="2563244"/>
-            <a:ext cx="7886700" cy="588511"/>
-          </a:xfrm>
-        </p:spPr>
-        <p:txBody>
-          <a:bodyPr>
-            <a:normAutofit fontScale="90000"/>
-          </a:bodyPr>
-          <a:lstStyle/>
-          <a:p>
-            <a:r>
-              <a:rPr lang="en-US" dirty="0"/>
-              <a:t>Question 2: Writing Classes</a:t>
-            </a:r>
-            <a:br>
-              <a:rPr lang="en-US" dirty="0"/>
-            </a:br>
-            <a:r>
-              <a:rPr lang="en-US" dirty="0"/>
-              <a:t>See previous years' similar FRQs: </a:t>
-            </a:r>
-            <a:br>
-              <a:rPr lang="en-US" dirty="0"/>
-            </a:br>
-            <a:r>
-              <a:rPr lang="en-US" dirty="0"/>
-              <a:t>2019 #2, 2021 #2, 2016 #1, 2015 #2, 2021#2</a:t>
-            </a:r>
-          </a:p>
-        </p:txBody>
-      </p:sp>
-    </p:spTree>
-    <p:extLst>
-      <p:ext uri="{BB962C8B-B14F-4D97-AF65-F5344CB8AC3E}">
-        <p14:creationId xmlns:p14="http://schemas.microsoft.com/office/powerpoint/2010/main" val="3871005740"/>
       </p:ext>
     </p:extLst>
   </p:cSld>
@@ -14040,6 +14788,85 @@
         </p:nvSpPr>
         <p:spPr>
           <a:xfrm>
+            <a:off x="628650" y="2563244"/>
+            <a:ext cx="7886700" cy="588511"/>
+          </a:xfrm>
+        </p:spPr>
+        <p:txBody>
+          <a:bodyPr>
+            <a:normAutofit fontScale="90000"/>
+          </a:bodyPr>
+          <a:lstStyle/>
+          <a:p>
+            <a:r>
+              <a:rPr lang="en-US" dirty="0"/>
+              <a:t>Question 2: Class Design</a:t>
+            </a:r>
+            <a:br>
+              <a:rPr lang="en-US" dirty="0"/>
+            </a:br>
+            <a:r>
+              <a:rPr lang="en-US" dirty="0"/>
+              <a:t>See previous years' similar FRQs: </a:t>
+            </a:r>
+            <a:br>
+              <a:rPr lang="en-US" dirty="0"/>
+            </a:br>
+            <a:r>
+              <a:rPr lang="en-US" dirty="0"/>
+              <a:t>2019 #2, 2021 #2, 2016 #1, 2015 #2, 2021#2</a:t>
+            </a:r>
+          </a:p>
+        </p:txBody>
+      </p:sp>
+    </p:spTree>
+    <p:extLst>
+      <p:ext uri="{BB962C8B-B14F-4D97-AF65-F5344CB8AC3E}">
+        <p14:creationId xmlns:p14="http://schemas.microsoft.com/office/powerpoint/2010/main" val="3871005740"/>
+      </p:ext>
+    </p:extLst>
+  </p:cSld>
+  <p:clrMapOvr>
+    <a:masterClrMapping/>
+  </p:clrMapOvr>
+</p:sld>
+</file>
+
+<file path=ppt/slides/slide21.xml><?xml version="1.0" encoding="utf-8"?>
+<p:sld xmlns:a="http://schemas.openxmlformats.org/drawingml/2006/main" xmlns:r="http://schemas.openxmlformats.org/officeDocument/2006/relationships" xmlns:p="http://schemas.openxmlformats.org/presentationml/2006/main">
+  <p:cSld>
+    <p:spTree>
+      <p:nvGrpSpPr>
+        <p:cNvPr id="1" name=""/>
+        <p:cNvGrpSpPr/>
+        <p:nvPr/>
+      </p:nvGrpSpPr>
+      <p:grpSpPr>
+        <a:xfrm>
+          <a:off x="0" y="0"/>
+          <a:ext cx="0" cy="0"/>
+          <a:chOff x="0" y="0"/>
+          <a:chExt cx="0" cy="0"/>
+        </a:xfrm>
+      </p:grpSpPr>
+      <p:sp>
+        <p:nvSpPr>
+          <p:cNvPr id="2" name="Title 1">
+            <a:extLst>
+              <a:ext uri="{FF2B5EF4-FFF2-40B4-BE49-F238E27FC236}">
+                <a16:creationId xmlns:a16="http://schemas.microsoft.com/office/drawing/2014/main" id="{BC6F9511-CB58-AC49-AD98-860912780FFE}"/>
+              </a:ext>
+            </a:extLst>
+          </p:cNvPr>
+          <p:cNvSpPr>
+            <a:spLocks noGrp="1"/>
+          </p:cNvSpPr>
+          <p:nvPr>
+            <p:ph type="title"/>
+          </p:nvPr>
+        </p:nvSpPr>
+        <p:spPr>
+          <a:xfrm>
             <a:off x="167177" y="128185"/>
             <a:ext cx="7886700" cy="588511"/>
           </a:xfrm>
@@ -14216,7 +15043,7 @@
 </p:sld>
 </file>
 
-<file path=ppt/slides/slide21.xml><?xml version="1.0" encoding="utf-8"?>
+<file path=ppt/slides/slide22.xml><?xml version="1.0" encoding="utf-8"?>
 <p:sld xmlns:a="http://schemas.openxmlformats.org/drawingml/2006/main" xmlns:r="http://schemas.openxmlformats.org/officeDocument/2006/relationships" xmlns:p="http://schemas.openxmlformats.org/presentationml/2006/main">
   <p:cSld>
     <p:spTree>
@@ -15966,7 +16793,7 @@
 </p:sld>
 </file>
 
-<file path=ppt/slides/slide22.xml><?xml version="1.0" encoding="utf-8"?>
+<file path=ppt/slides/slide23.xml><?xml version="1.0" encoding="utf-8"?>
 <p:sld xmlns:a="http://schemas.openxmlformats.org/drawingml/2006/main" xmlns:r="http://schemas.openxmlformats.org/officeDocument/2006/relationships" xmlns:p="http://schemas.openxmlformats.org/presentationml/2006/main">
   <p:cSld>
     <p:spTree>
@@ -16438,7 +17265,7 @@
 </p:sld>
 </file>
 
-<file path=ppt/slides/slide23.xml><?xml version="1.0" encoding="utf-8"?>
+<file path=ppt/slides/slide24.xml><?xml version="1.0" encoding="utf-8"?>
 <p:sld xmlns:a="http://schemas.openxmlformats.org/drawingml/2006/main" xmlns:r="http://schemas.openxmlformats.org/officeDocument/2006/relationships" xmlns:p="http://schemas.openxmlformats.org/presentationml/2006/main">
   <p:cSld>
     <p:spTree>
@@ -16650,7 +17477,7 @@
 </p:sld>
 </file>
 
-<file path=ppt/slides/slide24.xml><?xml version="1.0" encoding="utf-8"?>
+<file path=ppt/slides/slide25.xml><?xml version="1.0" encoding="utf-8"?>
 <p:sld xmlns:a="http://schemas.openxmlformats.org/drawingml/2006/main" xmlns:r="http://schemas.openxmlformats.org/officeDocument/2006/relationships" xmlns:p="http://schemas.openxmlformats.org/presentationml/2006/main">
   <p:cSld>
     <p:spTree>
@@ -16835,7 +17662,7 @@
 </p:sld>
 </file>
 
-<file path=ppt/slides/slide25.xml><?xml version="1.0" encoding="utf-8"?>
+<file path=ppt/slides/slide26.xml><?xml version="1.0" encoding="utf-8"?>
 <p:sld xmlns:a="http://schemas.openxmlformats.org/drawingml/2006/main" xmlns:r="http://schemas.openxmlformats.org/officeDocument/2006/relationships" xmlns:p="http://schemas.openxmlformats.org/presentationml/2006/main">
   <p:cSld>
     <p:spTree>
@@ -17055,7 +17882,7 @@
 </p:sld>
 </file>
 
-<file path=ppt/slides/slide26.xml><?xml version="1.0" encoding="utf-8"?>
+<file path=ppt/slides/slide27.xml><?xml version="1.0" encoding="utf-8"?>
 <p:sld xmlns:a="http://schemas.openxmlformats.org/drawingml/2006/main" xmlns:r="http://schemas.openxmlformats.org/officeDocument/2006/relationships" xmlns:p="http://schemas.openxmlformats.org/presentationml/2006/main">
   <p:cSld>
     <p:spTree>
@@ -17102,15 +17929,15 @@
           <a:p>
             <a:r>
               <a:rPr lang="en-US" dirty="0"/>
-              <a:t>Question 3: </a:t>
+              <a:t>Question 3: Data Analysis with </a:t>
             </a:r>
             <a:r>
               <a:rPr lang="en-US" dirty="0" err="1"/>
-              <a:t>Arraylist</a:t>
+              <a:t>ArrayList</a:t>
             </a:r>
             <a:r>
               <a:rPr lang="en-US" dirty="0"/>
-              <a:t>/1D Array</a:t>
+              <a:t/>
             </a:r>
             <a:br>
               <a:rPr lang="en-US" dirty="0"/>
@@ -17142,7 +17969,7 @@
 </p:sld>
 </file>
 
-<file path=ppt/slides/slide27.xml><?xml version="1.0" encoding="utf-8"?>
+<file path=ppt/slides/slide28.xml><?xml version="1.0" encoding="utf-8"?>
 <p:sld xmlns:a="http://schemas.openxmlformats.org/drawingml/2006/main" xmlns:r="http://schemas.openxmlformats.org/officeDocument/2006/relationships" xmlns:p="http://schemas.openxmlformats.org/presentationml/2006/main">
   <p:cSld>
     <p:spTree>
@@ -17191,7 +18018,7 @@
             </a:r>
             <a:r>
               <a:rPr lang="en-US" dirty="0"/>
-              <a:t>/1D Arrays</a:t>
+              <a:t> — Question 3</a:t>
             </a:r>
           </a:p>
         </p:txBody>
@@ -17237,7 +18064,7 @@
             </a:r>
             <a:r>
               <a:rPr lang="en-US" dirty="0"/>
-              <a:t> and 1D arrays. This will be Question 3 on the Free Response. </a:t>
+              <a:t> and 1D arrays. Question 3 is now Data Analysis with ArrayList. </a:t>
             </a:r>
           </a:p>
           <a:p>
@@ -17249,7 +18076,7 @@
                 <a:latin typeface="Gill Sans MT" panose="020B0502020104020203" pitchFamily="34" charset="77"/>
                 <a:cs typeface="Courier New" panose="02070309020205020404" pitchFamily="49" charset="0"/>
               </a:rPr>
-              <a:t>From previous years' exams, it is likely that Question 3 is an </a:t>
+              <a:t>As of the 2025–26 revision, Question 3 is strictly an </a:t>
             </a:r>
             <a:r>
               <a:rPr lang="en-US" dirty="0" err="1">
@@ -17263,7 +18090,7 @@
                 <a:latin typeface="Gill Sans MT" panose="020B0502020104020203" pitchFamily="34" charset="77"/>
                 <a:cs typeface="Courier New" panose="02070309020205020404" pitchFamily="49" charset="0"/>
               </a:rPr>
-              <a:t> question instead of/in addition to an 1D array question.(</a:t>
+              <a:t> question — the College Board removed 1D arrays from it. Arrays are still on the exam elsewhere (Question 1 and the multiple choice), so review both, but expect only </a:t>
             </a:r>
             <a:r>
               <a:rPr lang="en-US" dirty="0" err="1">
@@ -17277,7 +18104,7 @@
                 <a:latin typeface="Gill Sans MT" panose="020B0502020104020203" pitchFamily="34" charset="77"/>
                 <a:cs typeface="Courier New" panose="02070309020205020404" pitchFamily="49" charset="0"/>
               </a:rPr>
-              <a:t> or both, unlikely to be just a 1D array question)</a:t>
+              <a:t> in Question 3.</a:t>
             </a:r>
           </a:p>
           <a:p>
@@ -17731,7 +18558,7 @@
 </p:sld>
 </file>
 
-<file path=ppt/slides/slide28.xml><?xml version="1.0" encoding="utf-8"?>
+<file path=ppt/slides/slide29.xml><?xml version="1.0" encoding="utf-8"?>
 <p:sld xmlns:a="http://schemas.openxmlformats.org/drawingml/2006/main" xmlns:r="http://schemas.openxmlformats.org/officeDocument/2006/relationships" xmlns:p="http://schemas.openxmlformats.org/presentationml/2006/main">
   <p:cSld>
     <p:spTree>
@@ -18583,7 +19410,222 @@
 </p:sld>
 </file>
 
-<file path=ppt/slides/slide29.xml><?xml version="1.0" encoding="utf-8"?>
+<file path=ppt/slides/slide3.xml><?xml version="1.0" encoding="utf-8"?>
+<p:sld xmlns:a="http://schemas.openxmlformats.org/drawingml/2006/main" xmlns:r="http://schemas.openxmlformats.org/officeDocument/2006/relationships" xmlns:p="http://schemas.openxmlformats.org/presentationml/2006/main">
+  <p:cSld>
+    <p:spTree>
+      <p:nvGrpSpPr>
+        <p:cNvPr id="1" name=""/>
+        <p:cNvGrpSpPr/>
+        <p:nvPr/>
+      </p:nvGrpSpPr>
+      <p:grpSpPr>
+        <a:xfrm>
+          <a:off x="0" y="0"/>
+          <a:ext cx="0" cy="0"/>
+          <a:chOff x="0" y="0"/>
+          <a:chExt cx="0" cy="0"/>
+        </a:xfrm>
+      </p:grpSpPr>
+      <p:sp>
+        <p:nvSpPr>
+          <p:cNvPr id="2" name="Title 1">
+            <a:extLst>
+              <a:ext uri="{FF2B5EF4-FFF2-40B4-BE49-F238E27FC236}">
+                <a16:creationId xmlns:a16="http://schemas.microsoft.com/office/drawing/2014/main" id="{5E187FE3-4193-2A46-9798-38F290C2BFE3}"/>
+              </a:ext>
+            </a:extLst>
+          </p:cNvPr>
+          <p:cNvSpPr>
+            <a:spLocks noGrp="1"/>
+          </p:cNvSpPr>
+          <p:nvPr>
+            <p:ph type="title"/>
+          </p:nvPr>
+        </p:nvSpPr>
+        <p:spPr/>
+        <p:txBody>
+          <a:bodyPr/>
+          <a:lstStyle/>
+          <a:p>
+            <a:endParaRPr lang="en-US"/>
+          </a:p>
+        </p:txBody>
+      </p:sp>
+      <p:sp>
+        <p:nvSpPr>
+          <p:cNvPr id="3" name="Content Placeholder 2">
+            <a:extLst>
+              <a:ext uri="{FF2B5EF4-FFF2-40B4-BE49-F238E27FC236}">
+                <a16:creationId xmlns:a16="http://schemas.microsoft.com/office/drawing/2014/main" id="{E9E9A067-9774-A84B-BF09-4C5C6A0989AC}"/>
+              </a:ext>
+            </a:extLst>
+          </p:cNvPr>
+          <p:cNvSpPr>
+            <a:spLocks noGrp="1"/>
+          </p:cNvSpPr>
+          <p:nvPr>
+            <p:ph idx="1"/>
+          </p:nvPr>
+        </p:nvSpPr>
+        <p:spPr/>
+        <p:txBody>
+          <a:bodyPr/>
+          <a:lstStyle/>
+          <a:p>
+            <a:endParaRPr lang="en-US"/>
+          </a:p>
+        </p:txBody>
+      </p:sp>
+      <p:pic>
+        <p:nvPicPr>
+          <p:cNvPr id="4" name="Picture 3">
+            <a:extLst>
+              <a:ext uri="{FF2B5EF4-FFF2-40B4-BE49-F238E27FC236}">
+                <a16:creationId xmlns:a16="http://schemas.microsoft.com/office/drawing/2014/main" id="{B6115EDE-48DD-E04F-99B8-F4C5D428CE40}"/>
+              </a:ext>
+            </a:extLst>
+          </p:cNvPr>
+          <p:cNvPicPr>
+            <a:picLocks noChangeAspect="1"/>
+          </p:cNvPicPr>
+          <p:nvPr/>
+        </p:nvPicPr>
+        <p:blipFill>
+          <a:blip r:embed="rId2"/>
+          <a:stretch>
+            <a:fillRect/>
+          </a:stretch>
+        </p:blipFill>
+        <p:spPr>
+          <a:xfrm>
+            <a:off x="0" y="304271"/>
+            <a:ext cx="9144000" cy="2911835"/>
+          </a:xfrm>
+          <a:prstGeom prst="rect">
+            <a:avLst/>
+          </a:prstGeom>
+        </p:spPr>
+      </p:pic>
+      <p:pic>
+        <p:nvPicPr>
+          <p:cNvPr id="5" name="Picture 4">
+            <a:extLst>
+              <a:ext uri="{FF2B5EF4-FFF2-40B4-BE49-F238E27FC236}">
+                <a16:creationId xmlns:a16="http://schemas.microsoft.com/office/drawing/2014/main" id="{C13432EF-E0F0-E345-8329-4BA0D851A4C7}"/>
+              </a:ext>
+            </a:extLst>
+          </p:cNvPr>
+          <p:cNvPicPr>
+            <a:picLocks noChangeAspect="1"/>
+          </p:cNvPicPr>
+          <p:nvPr/>
+        </p:nvPicPr>
+        <p:blipFill>
+          <a:blip r:embed="rId3"/>
+          <a:stretch>
+            <a:fillRect/>
+          </a:stretch>
+        </p:blipFill>
+        <p:spPr>
+          <a:xfrm>
+            <a:off x="752030" y="3328553"/>
+            <a:ext cx="7409203" cy="937491"/>
+          </a:xfrm>
+          <a:prstGeom prst="rect">
+            <a:avLst/>
+          </a:prstGeom>
+        </p:spPr>
+      </p:pic>
+    </p:spTree>
+    <p:extLst>
+      <p:ext uri="{BB962C8B-B14F-4D97-AF65-F5344CB8AC3E}">
+        <p14:creationId xmlns:p14="http://schemas.microsoft.com/office/powerpoint/2010/main" val="1351446093"/>
+      </p:ext>
+    </p:extLst>
+  </p:cSld>
+  <p:clrMapOvr>
+    <a:masterClrMapping/>
+  </p:clrMapOvr>
+  <p:timing>
+    <p:tnLst>
+      <p:par>
+        <p:cTn id="1" dur="indefinite" restart="never" nodeType="tmRoot">
+          <p:childTnLst>
+            <p:seq concurrent="1" nextAc="seek">
+              <p:cTn id="2" dur="indefinite" nodeType="mainSeq">
+                <p:childTnLst>
+                  <p:par>
+                    <p:cTn id="3" fill="hold">
+                      <p:stCondLst>
+                        <p:cond delay="indefinite"/>
+                      </p:stCondLst>
+                      <p:childTnLst>
+                        <p:par>
+                          <p:cTn id="4" fill="hold">
+                            <p:stCondLst>
+                              <p:cond delay="0"/>
+                            </p:stCondLst>
+                            <p:childTnLst>
+                              <p:par>
+                                <p:cTn id="5" presetID="1" presetClass="entr" presetSubtype="0" fill="hold" nodeType="clickEffect">
+                                  <p:stCondLst>
+                                    <p:cond delay="0"/>
+                                  </p:stCondLst>
+                                  <p:childTnLst>
+                                    <p:set>
+                                      <p:cBhvr>
+                                        <p:cTn id="6" dur="1" fill="hold">
+                                          <p:stCondLst>
+                                            <p:cond delay="0"/>
+                                          </p:stCondLst>
+                                        </p:cTn>
+                                        <p:tgtEl>
+                                          <p:spTgt spid="5"/>
+                                        </p:tgtEl>
+                                        <p:attrNameLst>
+                                          <p:attrName>style.visibility</p:attrName>
+                                        </p:attrNameLst>
+                                      </p:cBhvr>
+                                      <p:to>
+                                        <p:strVal val="visible"/>
+                                      </p:to>
+                                    </p:set>
+                                  </p:childTnLst>
+                                </p:cTn>
+                              </p:par>
+                            </p:childTnLst>
+                          </p:cTn>
+                        </p:par>
+                      </p:childTnLst>
+                    </p:cTn>
+                  </p:par>
+                </p:childTnLst>
+              </p:cTn>
+              <p:prevCondLst>
+                <p:cond evt="onPrev" delay="0">
+                  <p:tgtEl>
+                    <p:sldTgt/>
+                  </p:tgtEl>
+                </p:cond>
+              </p:prevCondLst>
+              <p:nextCondLst>
+                <p:cond evt="onNext" delay="0">
+                  <p:tgtEl>
+                    <p:sldTgt/>
+                  </p:tgtEl>
+                </p:cond>
+              </p:nextCondLst>
+            </p:seq>
+          </p:childTnLst>
+        </p:cTn>
+      </p:par>
+    </p:tnLst>
+  </p:timing>
+</p:sld>
+</file>
+
+<file path=ppt/slides/slide30.xml><?xml version="1.0" encoding="utf-8"?>
 <p:sld xmlns:a="http://schemas.openxmlformats.org/drawingml/2006/main" xmlns:r="http://schemas.openxmlformats.org/officeDocument/2006/relationships" xmlns:p="http://schemas.openxmlformats.org/presentationml/2006/main">
   <p:cSld>
     <p:spTree>
@@ -19254,222 +20296,7 @@
 </p:sld>
 </file>
 
-<file path=ppt/slides/slide3.xml><?xml version="1.0" encoding="utf-8"?>
-<p:sld xmlns:a="http://schemas.openxmlformats.org/drawingml/2006/main" xmlns:r="http://schemas.openxmlformats.org/officeDocument/2006/relationships" xmlns:p="http://schemas.openxmlformats.org/presentationml/2006/main">
-  <p:cSld>
-    <p:spTree>
-      <p:nvGrpSpPr>
-        <p:cNvPr id="1" name=""/>
-        <p:cNvGrpSpPr/>
-        <p:nvPr/>
-      </p:nvGrpSpPr>
-      <p:grpSpPr>
-        <a:xfrm>
-          <a:off x="0" y="0"/>
-          <a:ext cx="0" cy="0"/>
-          <a:chOff x="0" y="0"/>
-          <a:chExt cx="0" cy="0"/>
-        </a:xfrm>
-      </p:grpSpPr>
-      <p:sp>
-        <p:nvSpPr>
-          <p:cNvPr id="2" name="Title 1">
-            <a:extLst>
-              <a:ext uri="{FF2B5EF4-FFF2-40B4-BE49-F238E27FC236}">
-                <a16:creationId xmlns:a16="http://schemas.microsoft.com/office/drawing/2014/main" id="{5E187FE3-4193-2A46-9798-38F290C2BFE3}"/>
-              </a:ext>
-            </a:extLst>
-          </p:cNvPr>
-          <p:cNvSpPr>
-            <a:spLocks noGrp="1"/>
-          </p:cNvSpPr>
-          <p:nvPr>
-            <p:ph type="title"/>
-          </p:nvPr>
-        </p:nvSpPr>
-        <p:spPr/>
-        <p:txBody>
-          <a:bodyPr/>
-          <a:lstStyle/>
-          <a:p>
-            <a:endParaRPr lang="en-US"/>
-          </a:p>
-        </p:txBody>
-      </p:sp>
-      <p:sp>
-        <p:nvSpPr>
-          <p:cNvPr id="3" name="Content Placeholder 2">
-            <a:extLst>
-              <a:ext uri="{FF2B5EF4-FFF2-40B4-BE49-F238E27FC236}">
-                <a16:creationId xmlns:a16="http://schemas.microsoft.com/office/drawing/2014/main" id="{E9E9A067-9774-A84B-BF09-4C5C6A0989AC}"/>
-              </a:ext>
-            </a:extLst>
-          </p:cNvPr>
-          <p:cNvSpPr>
-            <a:spLocks noGrp="1"/>
-          </p:cNvSpPr>
-          <p:nvPr>
-            <p:ph idx="1"/>
-          </p:nvPr>
-        </p:nvSpPr>
-        <p:spPr/>
-        <p:txBody>
-          <a:bodyPr/>
-          <a:lstStyle/>
-          <a:p>
-            <a:endParaRPr lang="en-US"/>
-          </a:p>
-        </p:txBody>
-      </p:sp>
-      <p:pic>
-        <p:nvPicPr>
-          <p:cNvPr id="4" name="Picture 3">
-            <a:extLst>
-              <a:ext uri="{FF2B5EF4-FFF2-40B4-BE49-F238E27FC236}">
-                <a16:creationId xmlns:a16="http://schemas.microsoft.com/office/drawing/2014/main" id="{B6115EDE-48DD-E04F-99B8-F4C5D428CE40}"/>
-              </a:ext>
-            </a:extLst>
-          </p:cNvPr>
-          <p:cNvPicPr>
-            <a:picLocks noChangeAspect="1"/>
-          </p:cNvPicPr>
-          <p:nvPr/>
-        </p:nvPicPr>
-        <p:blipFill>
-          <a:blip r:embed="rId2"/>
-          <a:stretch>
-            <a:fillRect/>
-          </a:stretch>
-        </p:blipFill>
-        <p:spPr>
-          <a:xfrm>
-            <a:off x="0" y="304271"/>
-            <a:ext cx="9144000" cy="2911835"/>
-          </a:xfrm>
-          <a:prstGeom prst="rect">
-            <a:avLst/>
-          </a:prstGeom>
-        </p:spPr>
-      </p:pic>
-      <p:pic>
-        <p:nvPicPr>
-          <p:cNvPr id="5" name="Picture 4">
-            <a:extLst>
-              <a:ext uri="{FF2B5EF4-FFF2-40B4-BE49-F238E27FC236}">
-                <a16:creationId xmlns:a16="http://schemas.microsoft.com/office/drawing/2014/main" id="{C13432EF-E0F0-E345-8329-4BA0D851A4C7}"/>
-              </a:ext>
-            </a:extLst>
-          </p:cNvPr>
-          <p:cNvPicPr>
-            <a:picLocks noChangeAspect="1"/>
-          </p:cNvPicPr>
-          <p:nvPr/>
-        </p:nvPicPr>
-        <p:blipFill>
-          <a:blip r:embed="rId3"/>
-          <a:stretch>
-            <a:fillRect/>
-          </a:stretch>
-        </p:blipFill>
-        <p:spPr>
-          <a:xfrm>
-            <a:off x="752030" y="3328553"/>
-            <a:ext cx="7409203" cy="937491"/>
-          </a:xfrm>
-          <a:prstGeom prst="rect">
-            <a:avLst/>
-          </a:prstGeom>
-        </p:spPr>
-      </p:pic>
-    </p:spTree>
-    <p:extLst>
-      <p:ext uri="{BB962C8B-B14F-4D97-AF65-F5344CB8AC3E}">
-        <p14:creationId xmlns:p14="http://schemas.microsoft.com/office/powerpoint/2010/main" val="1351446093"/>
-      </p:ext>
-    </p:extLst>
-  </p:cSld>
-  <p:clrMapOvr>
-    <a:masterClrMapping/>
-  </p:clrMapOvr>
-  <p:timing>
-    <p:tnLst>
-      <p:par>
-        <p:cTn id="1" dur="indefinite" restart="never" nodeType="tmRoot">
-          <p:childTnLst>
-            <p:seq concurrent="1" nextAc="seek">
-              <p:cTn id="2" dur="indefinite" nodeType="mainSeq">
-                <p:childTnLst>
-                  <p:par>
-                    <p:cTn id="3" fill="hold">
-                      <p:stCondLst>
-                        <p:cond delay="indefinite"/>
-                      </p:stCondLst>
-                      <p:childTnLst>
-                        <p:par>
-                          <p:cTn id="4" fill="hold">
-                            <p:stCondLst>
-                              <p:cond delay="0"/>
-                            </p:stCondLst>
-                            <p:childTnLst>
-                              <p:par>
-                                <p:cTn id="5" presetID="1" presetClass="entr" presetSubtype="0" fill="hold" nodeType="clickEffect">
-                                  <p:stCondLst>
-                                    <p:cond delay="0"/>
-                                  </p:stCondLst>
-                                  <p:childTnLst>
-                                    <p:set>
-                                      <p:cBhvr>
-                                        <p:cTn id="6" dur="1" fill="hold">
-                                          <p:stCondLst>
-                                            <p:cond delay="0"/>
-                                          </p:stCondLst>
-                                        </p:cTn>
-                                        <p:tgtEl>
-                                          <p:spTgt spid="5"/>
-                                        </p:tgtEl>
-                                        <p:attrNameLst>
-                                          <p:attrName>style.visibility</p:attrName>
-                                        </p:attrNameLst>
-                                      </p:cBhvr>
-                                      <p:to>
-                                        <p:strVal val="visible"/>
-                                      </p:to>
-                                    </p:set>
-                                  </p:childTnLst>
-                                </p:cTn>
-                              </p:par>
-                            </p:childTnLst>
-                          </p:cTn>
-                        </p:par>
-                      </p:childTnLst>
-                    </p:cTn>
-                  </p:par>
-                </p:childTnLst>
-              </p:cTn>
-              <p:prevCondLst>
-                <p:cond evt="onPrev" delay="0">
-                  <p:tgtEl>
-                    <p:sldTgt/>
-                  </p:tgtEl>
-                </p:cond>
-              </p:prevCondLst>
-              <p:nextCondLst>
-                <p:cond evt="onNext" delay="0">
-                  <p:tgtEl>
-                    <p:sldTgt/>
-                  </p:tgtEl>
-                </p:cond>
-              </p:nextCondLst>
-            </p:seq>
-          </p:childTnLst>
-        </p:cTn>
-      </p:par>
-    </p:tnLst>
-  </p:timing>
-</p:sld>
-</file>
-
-<file path=ppt/slides/slide30.xml><?xml version="1.0" encoding="utf-8"?>
+<file path=ppt/slides/slide31.xml><?xml version="1.0" encoding="utf-8"?>
 <p:sld xmlns:a="http://schemas.openxmlformats.org/drawingml/2006/main" xmlns:r="http://schemas.openxmlformats.org/officeDocument/2006/relationships" xmlns:p="http://schemas.openxmlformats.org/presentationml/2006/main">
   <p:cSld>
     <p:spTree>
@@ -19964,7 +20791,7 @@
 </p:sld>
 </file>
 
-<file path=ppt/slides/slide31.xml><?xml version="1.0" encoding="utf-8"?>
+<file path=ppt/slides/slide32.xml><?xml version="1.0" encoding="utf-8"?>
 <p:sld xmlns:a="http://schemas.openxmlformats.org/drawingml/2006/main" xmlns:r="http://schemas.openxmlformats.org/officeDocument/2006/relationships" xmlns:p="http://schemas.openxmlformats.org/presentationml/2006/main">
   <p:cSld>
     <p:spTree>
@@ -20309,7 +21136,7 @@
 </p:sld>
 </file>
 
-<file path=ppt/slides/slide32.xml><?xml version="1.0" encoding="utf-8"?>
+<file path=ppt/slides/slide33.xml><?xml version="1.0" encoding="utf-8"?>
 <p:sld xmlns:a="http://schemas.openxmlformats.org/drawingml/2006/main" xmlns:r="http://schemas.openxmlformats.org/officeDocument/2006/relationships" xmlns:p="http://schemas.openxmlformats.org/presentationml/2006/main">
   <p:cSld>
     <p:spTree>
@@ -21023,319 +21850,6 @@
 </p:sld>
 </file>
 
-<file path=ppt/slides/slide33.xml><?xml version="1.0" encoding="utf-8"?>
-<p:sld xmlns:a="http://schemas.openxmlformats.org/drawingml/2006/main" xmlns:r="http://schemas.openxmlformats.org/officeDocument/2006/relationships" xmlns:p="http://schemas.openxmlformats.org/presentationml/2006/main">
-  <p:cSld>
-    <p:spTree>
-      <p:nvGrpSpPr>
-        <p:cNvPr id="1" name=""/>
-        <p:cNvGrpSpPr/>
-        <p:nvPr/>
-      </p:nvGrpSpPr>
-      <p:grpSpPr>
-        <a:xfrm>
-          <a:off x="0" y="0"/>
-          <a:ext cx="0" cy="0"/>
-          <a:chOff x="0" y="0"/>
-          <a:chExt cx="0" cy="0"/>
-        </a:xfrm>
-      </p:grpSpPr>
-      <p:sp>
-        <p:nvSpPr>
-          <p:cNvPr id="2" name="Title 1">
-            <a:extLst>
-              <a:ext uri="{FF2B5EF4-FFF2-40B4-BE49-F238E27FC236}">
-                <a16:creationId xmlns:a16="http://schemas.microsoft.com/office/drawing/2014/main" id="{BC6F9511-CB58-AC49-AD98-860912780FFE}"/>
-              </a:ext>
-            </a:extLst>
-          </p:cNvPr>
-          <p:cNvSpPr>
-            <a:spLocks noGrp="1"/>
-          </p:cNvSpPr>
-          <p:nvPr>
-            <p:ph type="title"/>
-          </p:nvPr>
-        </p:nvSpPr>
-        <p:spPr>
-          <a:xfrm>
-            <a:off x="167177" y="128185"/>
-            <a:ext cx="7886700" cy="588511"/>
-          </a:xfrm>
-        </p:spPr>
-        <p:txBody>
-          <a:bodyPr/>
-          <a:lstStyle/>
-          <a:p>
-            <a:r>
-              <a:rPr lang="en-US" dirty="0" err="1"/>
-              <a:t>ArrayList</a:t>
-            </a:r>
-            <a:r>
-              <a:rPr lang="en-US" dirty="0"/>
-              <a:t>/1D Array Tips</a:t>
-            </a:r>
-          </a:p>
-        </p:txBody>
-      </p:sp>
-      <p:sp>
-        <p:nvSpPr>
-          <p:cNvPr id="3" name="Content Placeholder 2">
-            <a:extLst>
-              <a:ext uri="{FF2B5EF4-FFF2-40B4-BE49-F238E27FC236}">
-                <a16:creationId xmlns:a16="http://schemas.microsoft.com/office/drawing/2014/main" id="{CE6BD10B-9D13-604D-9877-97B355109287}"/>
-              </a:ext>
-            </a:extLst>
-          </p:cNvPr>
-          <p:cNvSpPr>
-            <a:spLocks noGrp="1"/>
-          </p:cNvSpPr>
-          <p:nvPr>
-            <p:ph idx="1"/>
-          </p:nvPr>
-        </p:nvSpPr>
-        <p:spPr>
-          <a:xfrm>
-            <a:off x="167177" y="801189"/>
-            <a:ext cx="8780270" cy="4710847"/>
-          </a:xfrm>
-        </p:spPr>
-        <p:txBody>
-          <a:bodyPr>
-            <a:normAutofit lnSpcReduction="10000"/>
-          </a:bodyPr>
-          <a:lstStyle/>
-          <a:p>
-            <a:pPr marL="0" indent="0">
-              <a:buNone/>
-            </a:pPr>
-            <a:r>
-              <a:rPr lang="en-US" dirty="0"/>
-              <a:t>Avoid array and </a:t>
-            </a:r>
-            <a:r>
-              <a:rPr lang="en-US" dirty="0" err="1"/>
-              <a:t>ArrayList</a:t>
-            </a:r>
-            <a:r>
-              <a:rPr lang="en-US" dirty="0"/>
-              <a:t> out-of-bounds exceptions! Especially when comparing consecutive elements.</a:t>
-            </a:r>
-          </a:p>
-          <a:p>
-            <a:pPr marL="0" indent="0">
-              <a:buNone/>
-            </a:pPr>
-            <a:endParaRPr lang="en-US" dirty="0"/>
-          </a:p>
-          <a:p>
-            <a:pPr marL="0" indent="0">
-              <a:buNone/>
-            </a:pPr>
-            <a:r>
-              <a:rPr lang="en-US" err="1"/>
-              <a:t>Example</a:t>
-            </a:r>
-            <a:r>
-              <a:rPr lang="en-US"/>
-              <a:t>: You </a:t>
-            </a:r>
-            <a:r>
-              <a:rPr lang="en-US" dirty="0"/>
-              <a:t>need to compare consecutive elements to determine if the values are increasing.</a:t>
-            </a:r>
-          </a:p>
-          <a:p>
-            <a:pPr marL="0" indent="0">
-              <a:buNone/>
-            </a:pPr>
-            <a:endParaRPr lang="en-US" dirty="0">
-              <a:latin typeface="Courier New" panose="02070309020205020404" pitchFamily="49" charset="0"/>
-              <a:cs typeface="Courier New" panose="02070309020205020404" pitchFamily="49" charset="0"/>
-            </a:endParaRPr>
-          </a:p>
-          <a:p>
-            <a:pPr marL="0" indent="0">
-              <a:buNone/>
-            </a:pPr>
-            <a:r>
-              <a:rPr lang="en-US" dirty="0">
-                <a:latin typeface="Courier New" panose="02070309020205020404" pitchFamily="49" charset="0"/>
-                <a:cs typeface="Courier New" panose="02070309020205020404" pitchFamily="49" charset="0"/>
-              </a:rPr>
-              <a:t>public </a:t>
-            </a:r>
-            <a:r>
-              <a:rPr lang="en-US" dirty="0" err="1">
-                <a:latin typeface="Courier New" panose="02070309020205020404" pitchFamily="49" charset="0"/>
-                <a:cs typeface="Courier New" panose="02070309020205020404" pitchFamily="49" charset="0"/>
-              </a:rPr>
-              <a:t>boolean</a:t>
-            </a:r>
-            <a:r>
-              <a:rPr lang="en-US" dirty="0">
-                <a:latin typeface="Courier New" panose="02070309020205020404" pitchFamily="49" charset="0"/>
-                <a:cs typeface="Courier New" panose="02070309020205020404" pitchFamily="49" charset="0"/>
-              </a:rPr>
-              <a:t> increasing(int[] numbers){</a:t>
-            </a:r>
-          </a:p>
-          <a:p>
-            <a:pPr marL="0" indent="0">
-              <a:buNone/>
-            </a:pPr>
-            <a:r>
-              <a:rPr lang="en-US" dirty="0">
-                <a:latin typeface="Courier New" panose="02070309020205020404" pitchFamily="49" charset="0"/>
-                <a:cs typeface="Courier New" panose="02070309020205020404" pitchFamily="49" charset="0"/>
-              </a:rPr>
-              <a:t>	for(int </a:t>
-            </a:r>
-            <a:r>
-              <a:rPr lang="en-US" dirty="0" err="1">
-                <a:latin typeface="Courier New" panose="02070309020205020404" pitchFamily="49" charset="0"/>
-                <a:cs typeface="Courier New" panose="02070309020205020404" pitchFamily="49" charset="0"/>
-              </a:rPr>
-              <a:t>i</a:t>
-            </a:r>
-            <a:r>
-              <a:rPr lang="en-US" dirty="0">
-                <a:latin typeface="Courier New" panose="02070309020205020404" pitchFamily="49" charset="0"/>
-                <a:cs typeface="Courier New" panose="02070309020205020404" pitchFamily="49" charset="0"/>
-              </a:rPr>
-              <a:t>=0; </a:t>
-            </a:r>
-            <a:r>
-              <a:rPr lang="en-US" dirty="0" err="1">
-                <a:latin typeface="Courier New" panose="02070309020205020404" pitchFamily="49" charset="0"/>
-                <a:cs typeface="Courier New" panose="02070309020205020404" pitchFamily="49" charset="0"/>
-              </a:rPr>
-              <a:t>i</a:t>
-            </a:r>
-            <a:r>
-              <a:rPr lang="en-US" dirty="0">
-                <a:latin typeface="Courier New" panose="02070309020205020404" pitchFamily="49" charset="0"/>
-                <a:cs typeface="Courier New" panose="02070309020205020404" pitchFamily="49" charset="0"/>
-              </a:rPr>
-              <a:t> &lt; </a:t>
-            </a:r>
-            <a:r>
-              <a:rPr lang="en-US" dirty="0">
-                <a:solidFill>
-                  <a:srgbClr val="FF0000"/>
-                </a:solidFill>
-                <a:latin typeface="Courier New" panose="02070309020205020404" pitchFamily="49" charset="0"/>
-                <a:cs typeface="Courier New" panose="02070309020205020404" pitchFamily="49" charset="0"/>
-              </a:rPr>
-              <a:t>numbers.length-1</a:t>
-            </a:r>
-            <a:r>
-              <a:rPr lang="en-US" dirty="0">
-                <a:latin typeface="Courier New" panose="02070309020205020404" pitchFamily="49" charset="0"/>
-                <a:cs typeface="Courier New" panose="02070309020205020404" pitchFamily="49" charset="0"/>
-              </a:rPr>
-              <a:t>; </a:t>
-            </a:r>
-            <a:r>
-              <a:rPr lang="en-US" dirty="0" err="1">
-                <a:latin typeface="Courier New" panose="02070309020205020404" pitchFamily="49" charset="0"/>
-                <a:cs typeface="Courier New" panose="02070309020205020404" pitchFamily="49" charset="0"/>
-              </a:rPr>
-              <a:t>i</a:t>
-            </a:r>
-            <a:r>
-              <a:rPr lang="en-US" dirty="0">
-                <a:latin typeface="Courier New" panose="02070309020205020404" pitchFamily="49" charset="0"/>
-                <a:cs typeface="Courier New" panose="02070309020205020404" pitchFamily="49" charset="0"/>
-              </a:rPr>
-              <a:t>++)</a:t>
-            </a:r>
-          </a:p>
-          <a:p>
-            <a:pPr marL="0" indent="0">
-              <a:buNone/>
-            </a:pPr>
-            <a:r>
-              <a:rPr lang="en-US" dirty="0">
-                <a:latin typeface="Courier New" panose="02070309020205020404" pitchFamily="49" charset="0"/>
-                <a:cs typeface="Courier New" panose="02070309020205020404" pitchFamily="49" charset="0"/>
-              </a:rPr>
-              <a:t>		if(numbers[</a:t>
-            </a:r>
-            <a:r>
-              <a:rPr lang="en-US" dirty="0" err="1">
-                <a:latin typeface="Courier New" panose="02070309020205020404" pitchFamily="49" charset="0"/>
-                <a:cs typeface="Courier New" panose="02070309020205020404" pitchFamily="49" charset="0"/>
-              </a:rPr>
-              <a:t>i</a:t>
-            </a:r>
-            <a:r>
-              <a:rPr lang="en-US" dirty="0">
-                <a:latin typeface="Courier New" panose="02070309020205020404" pitchFamily="49" charset="0"/>
-                <a:cs typeface="Courier New" panose="02070309020205020404" pitchFamily="49" charset="0"/>
-              </a:rPr>
-              <a:t>] &gt;= numbers[i+1])</a:t>
-            </a:r>
-          </a:p>
-          <a:p>
-            <a:pPr marL="0" indent="0">
-              <a:buNone/>
-            </a:pPr>
-            <a:r>
-              <a:rPr lang="en-US" dirty="0">
-                <a:latin typeface="Courier New" panose="02070309020205020404" pitchFamily="49" charset="0"/>
-                <a:cs typeface="Courier New" panose="02070309020205020404" pitchFamily="49" charset="0"/>
-              </a:rPr>
-              <a:t>			return false;</a:t>
-            </a:r>
-          </a:p>
-          <a:p>
-            <a:pPr marL="0" indent="0">
-              <a:buNone/>
-            </a:pPr>
-            <a:r>
-              <a:rPr lang="en-US" dirty="0">
-                <a:latin typeface="Courier New" panose="02070309020205020404" pitchFamily="49" charset="0"/>
-                <a:cs typeface="Courier New" panose="02070309020205020404" pitchFamily="49" charset="0"/>
-              </a:rPr>
-              <a:t>	return true;</a:t>
-            </a:r>
-          </a:p>
-          <a:p>
-            <a:pPr marL="0" indent="0">
-              <a:buNone/>
-            </a:pPr>
-            <a:r>
-              <a:rPr lang="en-US" dirty="0">
-                <a:latin typeface="Courier New" panose="02070309020205020404" pitchFamily="49" charset="0"/>
-                <a:cs typeface="Courier New" panose="02070309020205020404" pitchFamily="49" charset="0"/>
-              </a:rPr>
-              <a:t>}</a:t>
-            </a:r>
-          </a:p>
-          <a:p>
-            <a:pPr marL="0" indent="0">
-              <a:buNone/>
-            </a:pPr>
-            <a:br>
-              <a:rPr lang="en-US" dirty="0"/>
-            </a:br>
-            <a:endParaRPr lang="en-US" dirty="0"/>
-          </a:p>
-        </p:txBody>
-      </p:sp>
-    </p:spTree>
-    <p:extLst>
-      <p:ext uri="{BB962C8B-B14F-4D97-AF65-F5344CB8AC3E}">
-        <p14:creationId xmlns:p14="http://schemas.microsoft.com/office/powerpoint/2010/main" val="1789203214"/>
-      </p:ext>
-    </p:extLst>
-  </p:cSld>
-  <p:clrMapOvr>
-    <a:masterClrMapping/>
-  </p:clrMapOvr>
-</p:sld>
-</file>
-
 <file path=ppt/slides/slide34.xml><?xml version="1.0" encoding="utf-8"?>
 <p:sld xmlns:a="http://schemas.openxmlformats.org/drawingml/2006/main" xmlns:r="http://schemas.openxmlformats.org/officeDocument/2006/relationships" xmlns:p="http://schemas.openxmlformats.org/presentationml/2006/main">
   <p:cSld>
@@ -21380,8 +21894,12 @@
           <a:lstStyle/>
           <a:p>
             <a:r>
+              <a:rPr lang="en-US" dirty="0" err="1"/>
+              <a:t>ArrayList</a:t>
+            </a:r>
+            <a:r>
               <a:rPr lang="en-US" dirty="0"/>
-              <a:t>Finding the smallest or largest</a:t>
+              <a:t>/1D Array Tips</a:t>
             </a:r>
           </a:p>
         </p:txBody>
@@ -21404,13 +21922,13 @@
         </p:nvSpPr>
         <p:spPr>
           <a:xfrm>
-            <a:off x="167177" y="888763"/>
-            <a:ext cx="8780270" cy="4623273"/>
+            <a:off x="167177" y="801189"/>
+            <a:ext cx="8780270" cy="4710847"/>
           </a:xfrm>
         </p:spPr>
         <p:txBody>
           <a:bodyPr>
-            <a:normAutofit fontScale="92500" lnSpcReduction="10000"/>
+            <a:normAutofit lnSpcReduction="10000"/>
           </a:bodyPr>
           <a:lstStyle/>
           <a:p>
@@ -21419,86 +21937,182 @@
             </a:pPr>
             <a:r>
               <a:rPr lang="en-US" dirty="0"/>
-              <a:t>When you need to return an element in a list (i.e. largest, smallest,…), assign the initial element to the </a:t>
-            </a:r>
-            <a:r>
-              <a:rPr lang="en-US" b="1" dirty="0">
+              <a:t>Avoid array and </a:t>
+            </a:r>
+            <a:r>
+              <a:rPr lang="en-US" dirty="0" err="1"/>
+              <a:t>ArrayList</a:t>
+            </a:r>
+            <a:r>
+              <a:rPr lang="en-US" dirty="0"/>
+              <a:t> out-of-bounds exceptions! Especially when comparing consecutive elements.</a:t>
+            </a:r>
+          </a:p>
+          <a:p>
+            <a:pPr marL="0" indent="0">
+              <a:buNone/>
+            </a:pPr>
+            <a:endParaRPr lang="en-US" dirty="0"/>
+          </a:p>
+          <a:p>
+            <a:pPr marL="0" indent="0">
+              <a:buNone/>
+            </a:pPr>
+            <a:r>
+              <a:rPr lang="en-US" err="1"/>
+              <a:t>Example</a:t>
+            </a:r>
+            <a:r>
+              <a:rPr lang="en-US"/>
+              <a:t>: You </a:t>
+            </a:r>
+            <a:r>
+              <a:rPr lang="en-US" dirty="0"/>
+              <a:t>need to compare consecutive elements to determine if the values are increasing.</a:t>
+            </a:r>
+          </a:p>
+          <a:p>
+            <a:pPr marL="0" indent="0">
+              <a:buNone/>
+            </a:pPr>
+            <a:endParaRPr lang="en-US" dirty="0">
+              <a:latin typeface="Courier New" panose="02070309020205020404" pitchFamily="49" charset="0"/>
+              <a:cs typeface="Courier New" panose="02070309020205020404" pitchFamily="49" charset="0"/>
+            </a:endParaRPr>
+          </a:p>
+          <a:p>
+            <a:pPr marL="0" indent="0">
+              <a:buNone/>
+            </a:pPr>
+            <a:r>
+              <a:rPr lang="en-US" dirty="0">
+                <a:latin typeface="Courier New" panose="02070309020205020404" pitchFamily="49" charset="0"/>
+                <a:cs typeface="Courier New" panose="02070309020205020404" pitchFamily="49" charset="0"/>
+              </a:rPr>
+              <a:t>public </a:t>
+            </a:r>
+            <a:r>
+              <a:rPr lang="en-US" dirty="0" err="1">
+                <a:latin typeface="Courier New" panose="02070309020205020404" pitchFamily="49" charset="0"/>
+                <a:cs typeface="Courier New" panose="02070309020205020404" pitchFamily="49" charset="0"/>
+              </a:rPr>
+              <a:t>boolean</a:t>
+            </a:r>
+            <a:r>
+              <a:rPr lang="en-US" dirty="0">
+                <a:latin typeface="Courier New" panose="02070309020205020404" pitchFamily="49" charset="0"/>
+                <a:cs typeface="Courier New" panose="02070309020205020404" pitchFamily="49" charset="0"/>
+              </a:rPr>
+              <a:t> increasing(int[] numbers){</a:t>
+            </a:r>
+          </a:p>
+          <a:p>
+            <a:pPr marL="0" indent="0">
+              <a:buNone/>
+            </a:pPr>
+            <a:r>
+              <a:rPr lang="en-US" dirty="0">
+                <a:latin typeface="Courier New" panose="02070309020205020404" pitchFamily="49" charset="0"/>
+                <a:cs typeface="Courier New" panose="02070309020205020404" pitchFamily="49" charset="0"/>
+              </a:rPr>
+              <a:t>	for(int </a:t>
+            </a:r>
+            <a:r>
+              <a:rPr lang="en-US" dirty="0" err="1">
+                <a:latin typeface="Courier New" panose="02070309020205020404" pitchFamily="49" charset="0"/>
+                <a:cs typeface="Courier New" panose="02070309020205020404" pitchFamily="49" charset="0"/>
+              </a:rPr>
+              <a:t>i</a:t>
+            </a:r>
+            <a:r>
+              <a:rPr lang="en-US" dirty="0">
+                <a:latin typeface="Courier New" panose="02070309020205020404" pitchFamily="49" charset="0"/>
+                <a:cs typeface="Courier New" panose="02070309020205020404" pitchFamily="49" charset="0"/>
+              </a:rPr>
+              <a:t>=0; </a:t>
+            </a:r>
+            <a:r>
+              <a:rPr lang="en-US" dirty="0" err="1">
+                <a:latin typeface="Courier New" panose="02070309020205020404" pitchFamily="49" charset="0"/>
+                <a:cs typeface="Courier New" panose="02070309020205020404" pitchFamily="49" charset="0"/>
+              </a:rPr>
+              <a:t>i</a:t>
+            </a:r>
+            <a:r>
+              <a:rPr lang="en-US" dirty="0">
+                <a:latin typeface="Courier New" panose="02070309020205020404" pitchFamily="49" charset="0"/>
+                <a:cs typeface="Courier New" panose="02070309020205020404" pitchFamily="49" charset="0"/>
+              </a:rPr>
+              <a:t> &lt; </a:t>
+            </a:r>
+            <a:r>
+              <a:rPr lang="en-US" dirty="0">
                 <a:solidFill>
                   <a:srgbClr val="FF0000"/>
                 </a:solidFill>
-              </a:rPr>
-              <a:t>first one </a:t>
-            </a:r>
-            <a:r>
-              <a:rPr lang="en-US" dirty="0"/>
-              <a:t>in the list.</a:t>
-            </a:r>
-          </a:p>
-          <a:p>
-            <a:pPr marL="0" indent="0">
-              <a:buNone/>
-            </a:pPr>
-            <a:endParaRPr lang="en-US" dirty="0"/>
-          </a:p>
-          <a:p>
-            <a:pPr marL="0" indent="0">
-              <a:buNone/>
-            </a:pPr>
-            <a:r>
-              <a:rPr lang="en-US" dirty="0"/>
-              <a:t>Example : You need to find the Dog with the most fleas.</a:t>
-            </a:r>
-          </a:p>
-          <a:p>
-            <a:pPr marL="0" indent="0">
-              <a:buNone/>
-            </a:pPr>
+                <a:latin typeface="Courier New" panose="02070309020205020404" pitchFamily="49" charset="0"/>
+                <a:cs typeface="Courier New" panose="02070309020205020404" pitchFamily="49" charset="0"/>
+              </a:rPr>
+              <a:t>numbers.length-1</a:t>
+            </a:r>
             <a:r>
               <a:rPr lang="en-US" dirty="0">
                 <a:latin typeface="Courier New" panose="02070309020205020404" pitchFamily="49" charset="0"/>
                 <a:cs typeface="Courier New" panose="02070309020205020404" pitchFamily="49" charset="0"/>
               </a:rPr>
-              <a:t>//returns the Dog object in pack with the most fleas</a:t>
-            </a:r>
-          </a:p>
-          <a:p>
-            <a:pPr marL="0" indent="0">
-              <a:buNone/>
-            </a:pPr>
+              <a:t>; </a:t>
+            </a:r>
+            <a:r>
+              <a:rPr lang="en-US" dirty="0" err="1">
+                <a:latin typeface="Courier New" panose="02070309020205020404" pitchFamily="49" charset="0"/>
+                <a:cs typeface="Courier New" panose="02070309020205020404" pitchFamily="49" charset="0"/>
+              </a:rPr>
+              <a:t>i</a:t>
+            </a:r>
             <a:r>
               <a:rPr lang="en-US" dirty="0">
                 <a:latin typeface="Courier New" panose="02070309020205020404" pitchFamily="49" charset="0"/>
                 <a:cs typeface="Courier New" panose="02070309020205020404" pitchFamily="49" charset="0"/>
               </a:rPr>
-              <a:t>public Dog </a:t>
+              <a:t>++)</a:t>
+            </a:r>
+          </a:p>
+          <a:p>
+            <a:pPr marL="0" indent="0">
+              <a:buNone/>
+            </a:pPr>
+            <a:r>
+              <a:rPr lang="en-US" dirty="0">
+                <a:latin typeface="Courier New" panose="02070309020205020404" pitchFamily="49" charset="0"/>
+                <a:cs typeface="Courier New" panose="02070309020205020404" pitchFamily="49" charset="0"/>
+              </a:rPr>
+              <a:t>		if(numbers[</a:t>
             </a:r>
             <a:r>
               <a:rPr lang="en-US" dirty="0" err="1">
                 <a:latin typeface="Courier New" panose="02070309020205020404" pitchFamily="49" charset="0"/>
                 <a:cs typeface="Courier New" panose="02070309020205020404" pitchFamily="49" charset="0"/>
               </a:rPr>
-              <a:t>mostFleas</a:t>
+              <a:t>i</a:t>
             </a:r>
             <a:r>
               <a:rPr lang="en-US" dirty="0">
                 <a:latin typeface="Courier New" panose="02070309020205020404" pitchFamily="49" charset="0"/>
                 <a:cs typeface="Courier New" panose="02070309020205020404" pitchFamily="49" charset="0"/>
               </a:rPr>
-              <a:t>(</a:t>
-            </a:r>
-            <a:r>
-              <a:rPr lang="en-US" dirty="0" err="1">
-                <a:latin typeface="Courier New" panose="02070309020205020404" pitchFamily="49" charset="0"/>
-                <a:cs typeface="Courier New" panose="02070309020205020404" pitchFamily="49" charset="0"/>
-              </a:rPr>
-              <a:t>ArrayList</a:t>
-            </a:r>
+              <a:t>] &gt;= numbers[i+1])</a:t>
+            </a:r>
+          </a:p>
+          <a:p>
+            <a:pPr marL="0" indent="0">
+              <a:buNone/>
+            </a:pPr>
             <a:r>
               <a:rPr lang="en-US" dirty="0">
                 <a:latin typeface="Courier New" panose="02070309020205020404" pitchFamily="49" charset="0"/>
                 <a:cs typeface="Courier New" panose="02070309020205020404" pitchFamily="49" charset="0"/>
               </a:rPr>
-              <a:t>&lt;Dog&gt; pack){</a:t>
+              <a:t>			return false;</a:t>
             </a:r>
           </a:p>
           <a:p>
@@ -21510,97 +22124,7 @@
                 <a:latin typeface="Courier New" panose="02070309020205020404" pitchFamily="49" charset="0"/>
                 <a:cs typeface="Courier New" panose="02070309020205020404" pitchFamily="49" charset="0"/>
               </a:rPr>
-              <a:t>	Dog most = </a:t>
-            </a:r>
-            <a:r>
-              <a:rPr lang="en-US" dirty="0" err="1">
-                <a:latin typeface="Courier New" panose="02070309020205020404" pitchFamily="49" charset="0"/>
-                <a:cs typeface="Courier New" panose="02070309020205020404" pitchFamily="49" charset="0"/>
-              </a:rPr>
-              <a:t>pack.get</a:t>
-            </a:r>
-            <a:r>
-              <a:rPr lang="en-US" dirty="0">
-                <a:latin typeface="Courier New" panose="02070309020205020404" pitchFamily="49" charset="0"/>
-                <a:cs typeface="Courier New" panose="02070309020205020404" pitchFamily="49" charset="0"/>
-              </a:rPr>
-              <a:t>(0);</a:t>
-            </a:r>
-          </a:p>
-          <a:p>
-            <a:pPr marL="0" indent="0">
-              <a:buNone/>
-            </a:pPr>
-            <a:r>
-              <a:rPr lang="en-US" dirty="0">
-                <a:latin typeface="Courier New" panose="02070309020205020404" pitchFamily="49" charset="0"/>
-                <a:cs typeface="Courier New" panose="02070309020205020404" pitchFamily="49" charset="0"/>
-              </a:rPr>
-              <a:t>	for(Dog dog : pack)</a:t>
-            </a:r>
-          </a:p>
-          <a:p>
-            <a:pPr marL="0" indent="0">
-              <a:buNone/>
-            </a:pPr>
-            <a:r>
-              <a:rPr lang="en-US" dirty="0">
-                <a:latin typeface="Courier New" panose="02070309020205020404" pitchFamily="49" charset="0"/>
-                <a:cs typeface="Courier New" panose="02070309020205020404" pitchFamily="49" charset="0"/>
-              </a:rPr>
-              <a:t>		if(</a:t>
-            </a:r>
-            <a:r>
-              <a:rPr lang="en-US" dirty="0" err="1">
-                <a:latin typeface="Courier New" panose="02070309020205020404" pitchFamily="49" charset="0"/>
-                <a:cs typeface="Courier New" panose="02070309020205020404" pitchFamily="49" charset="0"/>
-              </a:rPr>
-              <a:t>dog.getNumFleas</a:t>
-            </a:r>
-            <a:r>
-              <a:rPr lang="en-US" dirty="0">
-                <a:latin typeface="Courier New" panose="02070309020205020404" pitchFamily="49" charset="0"/>
-                <a:cs typeface="Courier New" panose="02070309020205020404" pitchFamily="49" charset="0"/>
-              </a:rPr>
-              <a:t>() &gt; </a:t>
-            </a:r>
-            <a:r>
-              <a:rPr lang="en-US" dirty="0" err="1">
-                <a:latin typeface="Courier New" panose="02070309020205020404" pitchFamily="49" charset="0"/>
-                <a:cs typeface="Courier New" panose="02070309020205020404" pitchFamily="49" charset="0"/>
-              </a:rPr>
-              <a:t>most.getNumFleas</a:t>
-            </a:r>
-            <a:r>
-              <a:rPr lang="en-US" dirty="0">
-                <a:latin typeface="Courier New" panose="02070309020205020404" pitchFamily="49" charset="0"/>
-                <a:cs typeface="Courier New" panose="02070309020205020404" pitchFamily="49" charset="0"/>
-              </a:rPr>
-              <a:t>())</a:t>
-            </a:r>
-          </a:p>
-          <a:p>
-            <a:pPr marL="0" indent="0">
-              <a:buNone/>
-            </a:pPr>
-            <a:r>
-              <a:rPr lang="en-US" dirty="0">
-                <a:latin typeface="Courier New" panose="02070309020205020404" pitchFamily="49" charset="0"/>
-                <a:cs typeface="Courier New" panose="02070309020205020404" pitchFamily="49" charset="0"/>
-              </a:rPr>
-              <a:t>			most = dog;</a:t>
-            </a:r>
-          </a:p>
-          <a:p>
-            <a:pPr marL="0" indent="0">
-              <a:buNone/>
-            </a:pPr>
-            <a:r>
-              <a:rPr lang="en-US" dirty="0">
-                <a:latin typeface="Courier New" panose="02070309020205020404" pitchFamily="49" charset="0"/>
-                <a:cs typeface="Courier New" panose="02070309020205020404" pitchFamily="49" charset="0"/>
-              </a:rPr>
-              <a:t>	return most;</a:t>
+              <a:t>	return true;</a:t>
             </a:r>
           </a:p>
           <a:p>
@@ -21629,7 +22153,7 @@
     </p:spTree>
     <p:extLst>
       <p:ext uri="{BB962C8B-B14F-4D97-AF65-F5344CB8AC3E}">
-        <p14:creationId xmlns:p14="http://schemas.microsoft.com/office/powerpoint/2010/main" val="325895786"/>
+        <p14:creationId xmlns:p14="http://schemas.microsoft.com/office/powerpoint/2010/main" val="1789203214"/>
       </p:ext>
     </p:extLst>
   </p:cSld>
@@ -21684,13 +22208,8 @@
           <a:p>
             <a:r>
               <a:rPr lang="en-US" dirty="0"/>
-              <a:t>Manipulating an Array using </a:t>
-            </a:r>
-            <a:r>
-              <a:rPr lang="en-US" dirty="0" err="1"/>
-              <a:t>Arraylist</a:t>
-            </a:r>
-            <a:endParaRPr lang="en-US" dirty="0"/>
+              <a:t>Finding the smallest or largest</a:t>
+            </a:r>
           </a:p>
         </p:txBody>
       </p:sp>
@@ -21717,7 +22236,9 @@
           </a:xfrm>
         </p:spPr>
         <p:txBody>
-          <a:bodyPr/>
+          <a:bodyPr>
+            <a:normAutofit fontScale="92500" lnSpcReduction="10000"/>
+          </a:bodyPr>
           <a:lstStyle/>
           <a:p>
             <a:pPr marL="0" indent="0">
@@ -21725,62 +22246,200 @@
             </a:pPr>
             <a:r>
               <a:rPr lang="en-US" dirty="0"/>
-              <a:t>An </a:t>
-            </a:r>
-            <a:r>
-              <a:rPr lang="en-US" dirty="0" err="1"/>
+              <a:t>When you need to return an element in a list (i.e. largest, smallest,…), assign the initial element to the </a:t>
+            </a:r>
+            <a:r>
+              <a:rPr lang="en-US" b="1" dirty="0">
+                <a:solidFill>
+                  <a:srgbClr val="FF0000"/>
+                </a:solidFill>
+              </a:rPr>
+              <a:t>first one </a:t>
+            </a:r>
+            <a:r>
+              <a:rPr lang="en-US" dirty="0"/>
+              <a:t>in the list.</a:t>
+            </a:r>
+          </a:p>
+          <a:p>
+            <a:pPr marL="0" indent="0">
+              <a:buNone/>
+            </a:pPr>
+            <a:endParaRPr lang="en-US" dirty="0"/>
+          </a:p>
+          <a:p>
+            <a:pPr marL="0" indent="0">
+              <a:buNone/>
+            </a:pPr>
+            <a:r>
+              <a:rPr lang="en-US" dirty="0"/>
+              <a:t>Example : You need to find the Dog with the most fleas.</a:t>
+            </a:r>
+          </a:p>
+          <a:p>
+            <a:pPr marL="0" indent="0">
+              <a:buNone/>
+            </a:pPr>
+            <a:r>
+              <a:rPr lang="en-US" dirty="0">
+                <a:latin typeface="Courier New" panose="02070309020205020404" pitchFamily="49" charset="0"/>
+                <a:cs typeface="Courier New" panose="02070309020205020404" pitchFamily="49" charset="0"/>
+              </a:rPr>
+              <a:t>//returns the Dog object in pack with the most fleas</a:t>
+            </a:r>
+          </a:p>
+          <a:p>
+            <a:pPr marL="0" indent="0">
+              <a:buNone/>
+            </a:pPr>
+            <a:r>
+              <a:rPr lang="en-US" dirty="0">
+                <a:latin typeface="Courier New" panose="02070309020205020404" pitchFamily="49" charset="0"/>
+                <a:cs typeface="Courier New" panose="02070309020205020404" pitchFamily="49" charset="0"/>
+              </a:rPr>
+              <a:t>public Dog </a:t>
+            </a:r>
+            <a:r>
+              <a:rPr lang="en-US" dirty="0" err="1">
+                <a:latin typeface="Courier New" panose="02070309020205020404" pitchFamily="49" charset="0"/>
+                <a:cs typeface="Courier New" panose="02070309020205020404" pitchFamily="49" charset="0"/>
+              </a:rPr>
+              <a:t>mostFleas</a:t>
+            </a:r>
+            <a:r>
+              <a:rPr lang="en-US" dirty="0">
+                <a:latin typeface="Courier New" panose="02070309020205020404" pitchFamily="49" charset="0"/>
+                <a:cs typeface="Courier New" panose="02070309020205020404" pitchFamily="49" charset="0"/>
+              </a:rPr>
+              <a:t>(</a:t>
+            </a:r>
+            <a:r>
+              <a:rPr lang="en-US" dirty="0" err="1">
+                <a:latin typeface="Courier New" panose="02070309020205020404" pitchFamily="49" charset="0"/>
+                <a:cs typeface="Courier New" panose="02070309020205020404" pitchFamily="49" charset="0"/>
+              </a:rPr>
               <a:t>ArrayList</a:t>
             </a:r>
             <a:r>
-              <a:rPr lang="en-US" dirty="0"/>
-              <a:t> can be helpful when you are trying to manipulate an array (i.e. remove items, rearrange in random order, etc.).</a:t>
-            </a:r>
-          </a:p>
-          <a:p>
-            <a:pPr marL="0" indent="0">
-              <a:buNone/>
-            </a:pPr>
-            <a:endParaRPr lang="en-US" dirty="0"/>
-          </a:p>
-          <a:p>
-            <a:pPr marL="0" indent="0">
-              <a:buNone/>
-            </a:pPr>
-            <a:r>
-              <a:rPr lang="en-US" dirty="0"/>
-              <a:t>Example: </a:t>
-            </a:r>
-          </a:p>
-          <a:p>
-            <a:pPr marL="0" indent="0">
-              <a:buNone/>
-            </a:pPr>
-            <a:r>
-              <a:rPr lang="en-US" dirty="0"/>
-              <a:t>If you need to remove several objects from an array based one some condition, a strategy would be to save all the objects to an </a:t>
-            </a:r>
-            <a:r>
-              <a:rPr lang="en-US" dirty="0" err="1"/>
-              <a:t>ArrayList</a:t>
-            </a:r>
-            <a:r>
-              <a:rPr lang="en-US" dirty="0"/>
-              <a:t> and remove the objects before storing the remaining objects back to the array.</a:t>
-            </a:r>
-          </a:p>
-          <a:p>
-            <a:pPr marL="0" indent="0">
-              <a:buNone/>
-            </a:pPr>
-            <a:endParaRPr lang="en-US" dirty="0"/>
-          </a:p>
-          <a:p>
-            <a:pPr marL="0" indent="0">
-              <a:buNone/>
-            </a:pPr>
-            <a:r>
-              <a:rPr lang="en-US" dirty="0"/>
-              <a:t>See code on the next slide. </a:t>
+              <a:rPr lang="en-US" dirty="0">
+                <a:latin typeface="Courier New" panose="02070309020205020404" pitchFamily="49" charset="0"/>
+                <a:cs typeface="Courier New" panose="02070309020205020404" pitchFamily="49" charset="0"/>
+              </a:rPr>
+              <a:t>&lt;Dog&gt; pack){</a:t>
+            </a:r>
+          </a:p>
+          <a:p>
+            <a:pPr marL="0" indent="0">
+              <a:buNone/>
+            </a:pPr>
+            <a:r>
+              <a:rPr lang="en-US" dirty="0">
+                <a:latin typeface="Courier New" panose="02070309020205020404" pitchFamily="49" charset="0"/>
+                <a:cs typeface="Courier New" panose="02070309020205020404" pitchFamily="49" charset="0"/>
+              </a:rPr>
+              <a:t>	Dog most = </a:t>
+            </a:r>
+            <a:r>
+              <a:rPr lang="en-US" dirty="0" err="1">
+                <a:latin typeface="Courier New" panose="02070309020205020404" pitchFamily="49" charset="0"/>
+                <a:cs typeface="Courier New" panose="02070309020205020404" pitchFamily="49" charset="0"/>
+              </a:rPr>
+              <a:t>pack.get</a:t>
+            </a:r>
+            <a:r>
+              <a:rPr lang="en-US" dirty="0">
+                <a:latin typeface="Courier New" panose="02070309020205020404" pitchFamily="49" charset="0"/>
+                <a:cs typeface="Courier New" panose="02070309020205020404" pitchFamily="49" charset="0"/>
+              </a:rPr>
+              <a:t>(0);</a:t>
+            </a:r>
+          </a:p>
+          <a:p>
+            <a:pPr marL="0" indent="0">
+              <a:buNone/>
+            </a:pPr>
+            <a:r>
+              <a:rPr lang="en-US" dirty="0">
+                <a:latin typeface="Courier New" panose="02070309020205020404" pitchFamily="49" charset="0"/>
+                <a:cs typeface="Courier New" panose="02070309020205020404" pitchFamily="49" charset="0"/>
+              </a:rPr>
+              <a:t>	for(Dog dog : pack)</a:t>
+            </a:r>
+          </a:p>
+          <a:p>
+            <a:pPr marL="0" indent="0">
+              <a:buNone/>
+            </a:pPr>
+            <a:r>
+              <a:rPr lang="en-US" dirty="0">
+                <a:latin typeface="Courier New" panose="02070309020205020404" pitchFamily="49" charset="0"/>
+                <a:cs typeface="Courier New" panose="02070309020205020404" pitchFamily="49" charset="0"/>
+              </a:rPr>
+              <a:t>		if(</a:t>
+            </a:r>
+            <a:r>
+              <a:rPr lang="en-US" dirty="0" err="1">
+                <a:latin typeface="Courier New" panose="02070309020205020404" pitchFamily="49" charset="0"/>
+                <a:cs typeface="Courier New" panose="02070309020205020404" pitchFamily="49" charset="0"/>
+              </a:rPr>
+              <a:t>dog.getNumFleas</a:t>
+            </a:r>
+            <a:r>
+              <a:rPr lang="en-US" dirty="0">
+                <a:latin typeface="Courier New" panose="02070309020205020404" pitchFamily="49" charset="0"/>
+                <a:cs typeface="Courier New" panose="02070309020205020404" pitchFamily="49" charset="0"/>
+              </a:rPr>
+              <a:t>() &gt; </a:t>
+            </a:r>
+            <a:r>
+              <a:rPr lang="en-US" dirty="0" err="1">
+                <a:latin typeface="Courier New" panose="02070309020205020404" pitchFamily="49" charset="0"/>
+                <a:cs typeface="Courier New" panose="02070309020205020404" pitchFamily="49" charset="0"/>
+              </a:rPr>
+              <a:t>most.getNumFleas</a:t>
+            </a:r>
+            <a:r>
+              <a:rPr lang="en-US" dirty="0">
+                <a:latin typeface="Courier New" panose="02070309020205020404" pitchFamily="49" charset="0"/>
+                <a:cs typeface="Courier New" panose="02070309020205020404" pitchFamily="49" charset="0"/>
+              </a:rPr>
+              <a:t>())</a:t>
+            </a:r>
+          </a:p>
+          <a:p>
+            <a:pPr marL="0" indent="0">
+              <a:buNone/>
+            </a:pPr>
+            <a:r>
+              <a:rPr lang="en-US" dirty="0">
+                <a:latin typeface="Courier New" panose="02070309020205020404" pitchFamily="49" charset="0"/>
+                <a:cs typeface="Courier New" panose="02070309020205020404" pitchFamily="49" charset="0"/>
+              </a:rPr>
+              <a:t>			most = dog;</a:t>
+            </a:r>
+          </a:p>
+          <a:p>
+            <a:pPr marL="0" indent="0">
+              <a:buNone/>
+            </a:pPr>
+            <a:r>
+              <a:rPr lang="en-US" dirty="0">
+                <a:latin typeface="Courier New" panose="02070309020205020404" pitchFamily="49" charset="0"/>
+                <a:cs typeface="Courier New" panose="02070309020205020404" pitchFamily="49" charset="0"/>
+              </a:rPr>
+              <a:t>	return most;</a:t>
+            </a:r>
+          </a:p>
+          <a:p>
+            <a:pPr marL="0" indent="0">
+              <a:buNone/>
+            </a:pPr>
+            <a:r>
+              <a:rPr lang="en-US" dirty="0">
+                <a:latin typeface="Courier New" panose="02070309020205020404" pitchFamily="49" charset="0"/>
+                <a:cs typeface="Courier New" panose="02070309020205020404" pitchFamily="49" charset="0"/>
+              </a:rPr>
+              <a:t>}</a:t>
             </a:r>
           </a:p>
           <a:p>
@@ -21797,7 +22456,7 @@
     </p:spTree>
     <p:extLst>
       <p:ext uri="{BB962C8B-B14F-4D97-AF65-F5344CB8AC3E}">
-        <p14:creationId xmlns:p14="http://schemas.microsoft.com/office/powerpoint/2010/main" val="1543578782"/>
+        <p14:creationId xmlns:p14="http://schemas.microsoft.com/office/powerpoint/2010/main" val="325895786"/>
       </p:ext>
     </p:extLst>
   </p:cSld>
@@ -21885,452 +22544,87 @@
           </a:xfrm>
         </p:spPr>
         <p:txBody>
-          <a:bodyPr>
-            <a:normAutofit/>
-          </a:bodyPr>
+          <a:bodyPr/>
           <a:lstStyle/>
           <a:p>
             <a:pPr marL="0" indent="0">
               <a:buNone/>
             </a:pPr>
             <a:r>
-              <a:rPr lang="en-US" sz="1900" dirty="0">
-                <a:latin typeface="Courier New" panose="02070309020205020404" pitchFamily="49" charset="0"/>
-                <a:cs typeface="Courier New" panose="02070309020205020404" pitchFamily="49" charset="0"/>
-              </a:rPr>
-              <a:t>//returns a new array with bad things removed</a:t>
-            </a:r>
-          </a:p>
-          <a:p>
-            <a:pPr marL="0" indent="0">
-              <a:buNone/>
-            </a:pPr>
-            <a:r>
-              <a:rPr lang="en-US" sz="1900" dirty="0">
-                <a:latin typeface="Courier New" panose="02070309020205020404" pitchFamily="49" charset="0"/>
-                <a:cs typeface="Courier New" panose="02070309020205020404" pitchFamily="49" charset="0"/>
-              </a:rPr>
-              <a:t>public Thing[] </a:t>
-            </a:r>
-            <a:r>
-              <a:rPr lang="en-US" sz="1900" dirty="0" err="1">
-                <a:latin typeface="Courier New" panose="02070309020205020404" pitchFamily="49" charset="0"/>
-                <a:cs typeface="Courier New" panose="02070309020205020404" pitchFamily="49" charset="0"/>
-              </a:rPr>
-              <a:t>removeBadThing</a:t>
-            </a:r>
-            <a:r>
-              <a:rPr lang="en-US" sz="1900" dirty="0">
-                <a:latin typeface="Courier New" panose="02070309020205020404" pitchFamily="49" charset="0"/>
-                <a:cs typeface="Courier New" panose="02070309020205020404" pitchFamily="49" charset="0"/>
-              </a:rPr>
-              <a:t>(Thing[] widgets){ </a:t>
-            </a:r>
-          </a:p>
-          <a:p>
-            <a:pPr marL="0" indent="0">
-              <a:buNone/>
-            </a:pPr>
-            <a:r>
-              <a:rPr lang="en-US" sz="1900" dirty="0">
-                <a:latin typeface="Courier New" panose="02070309020205020404" pitchFamily="49" charset="0"/>
-                <a:cs typeface="Courier New" panose="02070309020205020404" pitchFamily="49" charset="0"/>
-              </a:rPr>
-              <a:t>	</a:t>
-            </a:r>
-            <a:r>
-              <a:rPr lang="en-US" sz="1900" dirty="0" err="1">
-                <a:latin typeface="Courier New" panose="02070309020205020404" pitchFamily="49" charset="0"/>
-                <a:cs typeface="Courier New" panose="02070309020205020404" pitchFamily="49" charset="0"/>
-              </a:rPr>
+              <a:rPr lang="en-US" dirty="0"/>
+              <a:t>An </a:t>
+            </a:r>
+            <a:r>
+              <a:rPr lang="en-US" dirty="0" err="1"/>
               <a:t>ArrayList</a:t>
             </a:r>
             <a:r>
-              <a:rPr lang="en-US" sz="1900" dirty="0">
-                <a:latin typeface="Courier New" panose="02070309020205020404" pitchFamily="49" charset="0"/>
-                <a:cs typeface="Courier New" panose="02070309020205020404" pitchFamily="49" charset="0"/>
-              </a:rPr>
-              <a:t>&lt;Thing&gt; good = new </a:t>
-            </a:r>
-            <a:r>
-              <a:rPr lang="en-US" sz="1900" dirty="0" err="1">
-                <a:latin typeface="Courier New" panose="02070309020205020404" pitchFamily="49" charset="0"/>
-                <a:cs typeface="Courier New" panose="02070309020205020404" pitchFamily="49" charset="0"/>
-              </a:rPr>
+              <a:rPr lang="en-US" dirty="0"/>
+              <a:t> can be helpful when you are trying to manipulate an array (i.e. remove items, rearrange in random order, etc.).</a:t>
+            </a:r>
+          </a:p>
+          <a:p>
+            <a:pPr marL="0" indent="0">
+              <a:buNone/>
+            </a:pPr>
+            <a:endParaRPr lang="en-US" dirty="0"/>
+          </a:p>
+          <a:p>
+            <a:pPr marL="0" indent="0">
+              <a:buNone/>
+            </a:pPr>
+            <a:r>
+              <a:rPr lang="en-US" dirty="0"/>
+              <a:t>Example: </a:t>
+            </a:r>
+          </a:p>
+          <a:p>
+            <a:pPr marL="0" indent="0">
+              <a:buNone/>
+            </a:pPr>
+            <a:r>
+              <a:rPr lang="en-US" dirty="0"/>
+              <a:t>If you need to remove several objects from an array based one some condition, a strategy would be to save all the objects to an </a:t>
+            </a:r>
+            <a:r>
+              <a:rPr lang="en-US" dirty="0" err="1"/>
               <a:t>ArrayList</a:t>
             </a:r>
             <a:r>
-              <a:rPr lang="en-US" sz="1900" dirty="0">
-                <a:latin typeface="Courier New" panose="02070309020205020404" pitchFamily="49" charset="0"/>
-                <a:cs typeface="Courier New" panose="02070309020205020404" pitchFamily="49" charset="0"/>
-              </a:rPr>
-              <a:t>&lt;Thing&gt;();</a:t>
-            </a:r>
-          </a:p>
-          <a:p>
-            <a:pPr marL="0" indent="0">
-              <a:buNone/>
-            </a:pPr>
-            <a:r>
-              <a:rPr lang="en-US" sz="1900" dirty="0">
-                <a:latin typeface="Courier New" panose="02070309020205020404" pitchFamily="49" charset="0"/>
-                <a:cs typeface="Courier New" panose="02070309020205020404" pitchFamily="49" charset="0"/>
-              </a:rPr>
-              <a:t>	for(Thing </a:t>
-            </a:r>
-            <a:r>
-              <a:rPr lang="en-US" sz="1900" dirty="0" err="1">
-                <a:latin typeface="Courier New" panose="02070309020205020404" pitchFamily="49" charset="0"/>
-                <a:cs typeface="Courier New" panose="02070309020205020404" pitchFamily="49" charset="0"/>
-              </a:rPr>
-              <a:t>wid</a:t>
-            </a:r>
-            <a:r>
-              <a:rPr lang="en-US" sz="1900" dirty="0">
-                <a:latin typeface="Courier New" panose="02070309020205020404" pitchFamily="49" charset="0"/>
-                <a:cs typeface="Courier New" panose="02070309020205020404" pitchFamily="49" charset="0"/>
-              </a:rPr>
-              <a:t> : widgets){</a:t>
-            </a:r>
-          </a:p>
-          <a:p>
-            <a:pPr marL="0" indent="0">
-              <a:buNone/>
-            </a:pPr>
-            <a:r>
-              <a:rPr lang="en-US" sz="1900" dirty="0">
-                <a:latin typeface="Courier New" panose="02070309020205020404" pitchFamily="49" charset="0"/>
-                <a:cs typeface="Courier New" panose="02070309020205020404" pitchFamily="49" charset="0"/>
-              </a:rPr>
-              <a:t>		if(!</a:t>
-            </a:r>
-            <a:r>
-              <a:rPr lang="en-US" sz="1900" dirty="0" err="1">
-                <a:latin typeface="Courier New" panose="02070309020205020404" pitchFamily="49" charset="0"/>
-                <a:cs typeface="Courier New" panose="02070309020205020404" pitchFamily="49" charset="0"/>
-              </a:rPr>
-              <a:t>wid.isBad</a:t>
-            </a:r>
-            <a:r>
-              <a:rPr lang="en-US" sz="1900" dirty="0">
-                <a:latin typeface="Courier New" panose="02070309020205020404" pitchFamily="49" charset="0"/>
-                <a:cs typeface="Courier New" panose="02070309020205020404" pitchFamily="49" charset="0"/>
-              </a:rPr>
-              <a:t>()) </a:t>
-            </a:r>
-            <a:r>
-              <a:rPr lang="en-US" sz="1900" dirty="0">
-                <a:solidFill>
-                  <a:srgbClr val="FF0000"/>
-                </a:solidFill>
-                <a:latin typeface="Courier New" panose="02070309020205020404" pitchFamily="49" charset="0"/>
-                <a:cs typeface="Courier New" panose="02070309020205020404" pitchFamily="49" charset="0"/>
-              </a:rPr>
-              <a:t>// </a:t>
-            </a:r>
-            <a:r>
-              <a:rPr lang="en-US" sz="1900" dirty="0" err="1">
-                <a:solidFill>
-                  <a:srgbClr val="FF0000"/>
-                </a:solidFill>
-                <a:latin typeface="Courier New" panose="02070309020205020404" pitchFamily="49" charset="0"/>
-                <a:cs typeface="Courier New" panose="02070309020205020404" pitchFamily="49" charset="0"/>
-              </a:rPr>
-              <a:t>i.e</a:t>
-            </a:r>
-            <a:r>
-              <a:rPr lang="en-US" sz="1900" dirty="0">
-                <a:solidFill>
-                  <a:srgbClr val="FF0000"/>
-                </a:solidFill>
-                <a:latin typeface="Courier New" panose="02070309020205020404" pitchFamily="49" charset="0"/>
-                <a:cs typeface="Courier New" panose="02070309020205020404" pitchFamily="49" charset="0"/>
-              </a:rPr>
-              <a:t> good</a:t>
-            </a:r>
-          </a:p>
-          <a:p>
-            <a:pPr marL="0" indent="0">
-              <a:buNone/>
-            </a:pPr>
-            <a:r>
-              <a:rPr lang="en-US" sz="1900" dirty="0">
-                <a:latin typeface="Courier New" panose="02070309020205020404" pitchFamily="49" charset="0"/>
-                <a:cs typeface="Courier New" panose="02070309020205020404" pitchFamily="49" charset="0"/>
-              </a:rPr>
-              <a:t>			</a:t>
-            </a:r>
-            <a:r>
-              <a:rPr lang="en-US" sz="1900" dirty="0" err="1">
-                <a:latin typeface="Courier New" panose="02070309020205020404" pitchFamily="49" charset="0"/>
-                <a:cs typeface="Courier New" panose="02070309020205020404" pitchFamily="49" charset="0"/>
-              </a:rPr>
-              <a:t>good.add</a:t>
-            </a:r>
-            <a:r>
-              <a:rPr lang="en-US" sz="1900" dirty="0">
-                <a:latin typeface="Courier New" panose="02070309020205020404" pitchFamily="49" charset="0"/>
-                <a:cs typeface="Courier New" panose="02070309020205020404" pitchFamily="49" charset="0"/>
-              </a:rPr>
-              <a:t>(</a:t>
-            </a:r>
-            <a:r>
-              <a:rPr lang="en-US" sz="1900" dirty="0" err="1">
-                <a:latin typeface="Courier New" panose="02070309020205020404" pitchFamily="49" charset="0"/>
-                <a:cs typeface="Courier New" panose="02070309020205020404" pitchFamily="49" charset="0"/>
-              </a:rPr>
-              <a:t>wid</a:t>
-            </a:r>
-            <a:r>
-              <a:rPr lang="en-US" sz="1900" dirty="0">
-                <a:latin typeface="Courier New" panose="02070309020205020404" pitchFamily="49" charset="0"/>
-                <a:cs typeface="Courier New" panose="02070309020205020404" pitchFamily="49" charset="0"/>
-              </a:rPr>
-              <a:t>);</a:t>
-            </a:r>
-          </a:p>
-          <a:p>
-            <a:pPr marL="0" indent="0">
-              <a:buNone/>
-            </a:pPr>
-            <a:r>
-              <a:rPr lang="en-US" sz="1900" dirty="0">
-                <a:latin typeface="Courier New" panose="02070309020205020404" pitchFamily="49" charset="0"/>
-                <a:cs typeface="Courier New" panose="02070309020205020404" pitchFamily="49" charset="0"/>
-              </a:rPr>
-              <a:t>	}</a:t>
-            </a:r>
-          </a:p>
-          <a:p>
-            <a:pPr marL="0" indent="0">
-              <a:buNone/>
-            </a:pPr>
-            <a:r>
-              <a:rPr lang="en-US" sz="1900" dirty="0">
-                <a:latin typeface="Courier New" panose="02070309020205020404" pitchFamily="49" charset="0"/>
-                <a:cs typeface="Courier New" panose="02070309020205020404" pitchFamily="49" charset="0"/>
-              </a:rPr>
-              <a:t>	Thing[] </a:t>
-            </a:r>
-            <a:r>
-              <a:rPr lang="en-US" sz="1900" dirty="0" err="1">
-                <a:latin typeface="Courier New" panose="02070309020205020404" pitchFamily="49" charset="0"/>
-                <a:cs typeface="Courier New" panose="02070309020205020404" pitchFamily="49" charset="0"/>
-              </a:rPr>
-              <a:t>goodOnes</a:t>
-            </a:r>
-            <a:r>
-              <a:rPr lang="en-US" sz="1900" dirty="0">
-                <a:latin typeface="Courier New" panose="02070309020205020404" pitchFamily="49" charset="0"/>
-                <a:cs typeface="Courier New" panose="02070309020205020404" pitchFamily="49" charset="0"/>
-              </a:rPr>
-              <a:t> = new Thing[</a:t>
-            </a:r>
-            <a:r>
-              <a:rPr lang="en-US" sz="1900" dirty="0" err="1">
-                <a:latin typeface="Courier New" panose="02070309020205020404" pitchFamily="49" charset="0"/>
-                <a:cs typeface="Courier New" panose="02070309020205020404" pitchFamily="49" charset="0"/>
-              </a:rPr>
-              <a:t>good.size</a:t>
-            </a:r>
-            <a:r>
-              <a:rPr lang="en-US" sz="1900" dirty="0">
-                <a:latin typeface="Courier New" panose="02070309020205020404" pitchFamily="49" charset="0"/>
-                <a:cs typeface="Courier New" panose="02070309020205020404" pitchFamily="49" charset="0"/>
-              </a:rPr>
-              <a:t>()]; </a:t>
-            </a:r>
-          </a:p>
-          <a:p>
-            <a:pPr marL="0" indent="0">
-              <a:buNone/>
-            </a:pPr>
-            <a:r>
-              <a:rPr lang="en-US" sz="1900" dirty="0">
-                <a:latin typeface="Courier New" panose="02070309020205020404" pitchFamily="49" charset="0"/>
-                <a:cs typeface="Courier New" panose="02070309020205020404" pitchFamily="49" charset="0"/>
-              </a:rPr>
-              <a:t>	for(int </a:t>
-            </a:r>
-            <a:r>
-              <a:rPr lang="en-US" sz="1900" dirty="0" err="1">
-                <a:latin typeface="Courier New" panose="02070309020205020404" pitchFamily="49" charset="0"/>
-                <a:cs typeface="Courier New" panose="02070309020205020404" pitchFamily="49" charset="0"/>
-              </a:rPr>
-              <a:t>i</a:t>
-            </a:r>
-            <a:r>
-              <a:rPr lang="en-US" sz="1900" dirty="0">
-                <a:latin typeface="Courier New" panose="02070309020205020404" pitchFamily="49" charset="0"/>
-                <a:cs typeface="Courier New" panose="02070309020205020404" pitchFamily="49" charset="0"/>
-              </a:rPr>
-              <a:t>=0; </a:t>
-            </a:r>
-            <a:r>
-              <a:rPr lang="en-US" sz="1900" dirty="0" err="1">
-                <a:latin typeface="Courier New" panose="02070309020205020404" pitchFamily="49" charset="0"/>
-                <a:cs typeface="Courier New" panose="02070309020205020404" pitchFamily="49" charset="0"/>
-              </a:rPr>
-              <a:t>i</a:t>
-            </a:r>
-            <a:r>
-              <a:rPr lang="en-US" sz="1900" dirty="0">
-                <a:latin typeface="Courier New" panose="02070309020205020404" pitchFamily="49" charset="0"/>
-                <a:cs typeface="Courier New" panose="02070309020205020404" pitchFamily="49" charset="0"/>
-              </a:rPr>
-              <a:t> &lt; </a:t>
-            </a:r>
-            <a:r>
-              <a:rPr lang="en-US" sz="1900" dirty="0" err="1">
-                <a:latin typeface="Courier New" panose="02070309020205020404" pitchFamily="49" charset="0"/>
-                <a:cs typeface="Courier New" panose="02070309020205020404" pitchFamily="49" charset="0"/>
-              </a:rPr>
-              <a:t>goodOnes.length</a:t>
-            </a:r>
-            <a:r>
-              <a:rPr lang="en-US" sz="1900" dirty="0">
-                <a:latin typeface="Courier New" panose="02070309020205020404" pitchFamily="49" charset="0"/>
-                <a:cs typeface="Courier New" panose="02070309020205020404" pitchFamily="49" charset="0"/>
-              </a:rPr>
-              <a:t>; </a:t>
-            </a:r>
-            <a:r>
-              <a:rPr lang="en-US" sz="1900" dirty="0" err="1">
-                <a:latin typeface="Courier New" panose="02070309020205020404" pitchFamily="49" charset="0"/>
-                <a:cs typeface="Courier New" panose="02070309020205020404" pitchFamily="49" charset="0"/>
-              </a:rPr>
-              <a:t>i</a:t>
-            </a:r>
-            <a:r>
-              <a:rPr lang="en-US" sz="1900" dirty="0">
-                <a:latin typeface="Courier New" panose="02070309020205020404" pitchFamily="49" charset="0"/>
-                <a:cs typeface="Courier New" panose="02070309020205020404" pitchFamily="49" charset="0"/>
-              </a:rPr>
-              <a:t>++)</a:t>
-            </a:r>
-          </a:p>
-          <a:p>
-            <a:pPr marL="0" indent="0">
-              <a:buNone/>
-            </a:pPr>
-            <a:r>
-              <a:rPr lang="en-US" sz="1900" dirty="0">
-                <a:latin typeface="Courier New" panose="02070309020205020404" pitchFamily="49" charset="0"/>
-                <a:cs typeface="Courier New" panose="02070309020205020404" pitchFamily="49" charset="0"/>
-              </a:rPr>
-              <a:t>		</a:t>
-            </a:r>
-            <a:r>
-              <a:rPr lang="en-US" sz="1900" dirty="0" err="1">
-                <a:latin typeface="Courier New" panose="02070309020205020404" pitchFamily="49" charset="0"/>
-                <a:cs typeface="Courier New" panose="02070309020205020404" pitchFamily="49" charset="0"/>
-              </a:rPr>
-              <a:t>goodOnes</a:t>
-            </a:r>
-            <a:r>
-              <a:rPr lang="en-US" sz="1900" dirty="0">
-                <a:latin typeface="Courier New" panose="02070309020205020404" pitchFamily="49" charset="0"/>
-                <a:cs typeface="Courier New" panose="02070309020205020404" pitchFamily="49" charset="0"/>
-              </a:rPr>
-              <a:t>[</a:t>
-            </a:r>
-            <a:r>
-              <a:rPr lang="en-US" sz="1900" dirty="0" err="1">
-                <a:latin typeface="Courier New" panose="02070309020205020404" pitchFamily="49" charset="0"/>
-                <a:cs typeface="Courier New" panose="02070309020205020404" pitchFamily="49" charset="0"/>
-              </a:rPr>
-              <a:t>i</a:t>
-            </a:r>
-            <a:r>
-              <a:rPr lang="en-US" sz="1900" dirty="0">
-                <a:latin typeface="Courier New" panose="02070309020205020404" pitchFamily="49" charset="0"/>
-                <a:cs typeface="Courier New" panose="02070309020205020404" pitchFamily="49" charset="0"/>
-              </a:rPr>
-              <a:t>] = </a:t>
-            </a:r>
-            <a:r>
-              <a:rPr lang="en-US" sz="1900" dirty="0" err="1">
-                <a:latin typeface="Courier New" panose="02070309020205020404" pitchFamily="49" charset="0"/>
-                <a:cs typeface="Courier New" panose="02070309020205020404" pitchFamily="49" charset="0"/>
-              </a:rPr>
-              <a:t>good.get</a:t>
-            </a:r>
-            <a:r>
-              <a:rPr lang="en-US" sz="1900" dirty="0">
-                <a:latin typeface="Courier New" panose="02070309020205020404" pitchFamily="49" charset="0"/>
-                <a:cs typeface="Courier New" panose="02070309020205020404" pitchFamily="49" charset="0"/>
-              </a:rPr>
-              <a:t>(</a:t>
-            </a:r>
-            <a:r>
-              <a:rPr lang="en-US" sz="1900" dirty="0" err="1">
-                <a:latin typeface="Courier New" panose="02070309020205020404" pitchFamily="49" charset="0"/>
-                <a:cs typeface="Courier New" panose="02070309020205020404" pitchFamily="49" charset="0"/>
-              </a:rPr>
-              <a:t>i</a:t>
-            </a:r>
-            <a:r>
-              <a:rPr lang="en-US" sz="1900" dirty="0">
-                <a:latin typeface="Courier New" panose="02070309020205020404" pitchFamily="49" charset="0"/>
-                <a:cs typeface="Courier New" panose="02070309020205020404" pitchFamily="49" charset="0"/>
-              </a:rPr>
-              <a:t>);</a:t>
-            </a:r>
-          </a:p>
-          <a:p>
-            <a:pPr marL="0" indent="0">
-              <a:buNone/>
-            </a:pPr>
-            <a:r>
-              <a:rPr lang="en-US" sz="1900" dirty="0">
-                <a:latin typeface="Courier New" panose="02070309020205020404" pitchFamily="49" charset="0"/>
-                <a:cs typeface="Courier New" panose="02070309020205020404" pitchFamily="49" charset="0"/>
-              </a:rPr>
-              <a:t>	return </a:t>
-            </a:r>
-            <a:r>
-              <a:rPr lang="en-US" sz="1900" dirty="0" err="1">
-                <a:latin typeface="Courier New" panose="02070309020205020404" pitchFamily="49" charset="0"/>
-                <a:cs typeface="Courier New" panose="02070309020205020404" pitchFamily="49" charset="0"/>
-              </a:rPr>
-              <a:t>goodOnes</a:t>
-            </a:r>
-            <a:r>
-              <a:rPr lang="en-US" sz="1900" dirty="0">
-                <a:latin typeface="Courier New" panose="02070309020205020404" pitchFamily="49" charset="0"/>
-                <a:cs typeface="Courier New" panose="02070309020205020404" pitchFamily="49" charset="0"/>
-              </a:rPr>
-              <a:t>;</a:t>
-            </a:r>
-          </a:p>
-          <a:p>
-            <a:pPr marL="0" indent="0">
-              <a:buNone/>
-            </a:pPr>
-            <a:r>
-              <a:rPr lang="en-US" sz="1900" dirty="0">
-                <a:latin typeface="Courier New" panose="02070309020205020404" pitchFamily="49" charset="0"/>
-                <a:cs typeface="Courier New" panose="02070309020205020404" pitchFamily="49" charset="0"/>
-              </a:rPr>
-              <a:t>}</a:t>
-            </a:r>
+              <a:rPr lang="en-US" dirty="0"/>
+              <a:t> and remove the objects before storing the remaining objects back to the array.</a:t>
+            </a:r>
+          </a:p>
+          <a:p>
+            <a:pPr marL="0" indent="0">
+              <a:buNone/>
+            </a:pPr>
+            <a:endParaRPr lang="en-US" dirty="0"/>
+          </a:p>
+          <a:p>
+            <a:pPr marL="0" indent="0">
+              <a:buNone/>
+            </a:pPr>
+            <a:r>
+              <a:rPr lang="en-US" dirty="0"/>
+              <a:t>See code on the next slide. </a:t>
+            </a:r>
+          </a:p>
+          <a:p>
+            <a:pPr marL="0" indent="0">
+              <a:buNone/>
+            </a:pPr>
             <a:br>
-              <a:rPr lang="en-US" sz="1900" dirty="0">
-                <a:latin typeface="Courier New" panose="02070309020205020404" pitchFamily="49" charset="0"/>
-                <a:cs typeface="Courier New" panose="02070309020205020404" pitchFamily="49" charset="0"/>
-              </a:rPr>
+              <a:rPr lang="en-US" dirty="0"/>
             </a:br>
-            <a:endParaRPr lang="en-US" sz="1900" dirty="0">
-              <a:latin typeface="Courier New" panose="02070309020205020404" pitchFamily="49" charset="0"/>
-              <a:cs typeface="Courier New" panose="02070309020205020404" pitchFamily="49" charset="0"/>
-            </a:endParaRPr>
+            <a:endParaRPr lang="en-US" dirty="0"/>
           </a:p>
         </p:txBody>
       </p:sp>
     </p:spTree>
     <p:extLst>
       <p:ext uri="{BB962C8B-B14F-4D97-AF65-F5344CB8AC3E}">
-        <p14:creationId xmlns:p14="http://schemas.microsoft.com/office/powerpoint/2010/main" val="1010857515"/>
+        <p14:creationId xmlns:p14="http://schemas.microsoft.com/office/powerpoint/2010/main" val="1543578782"/>
       </p:ext>
     </p:extLst>
   </p:cSld>
@@ -22385,8 +22679,13 @@
           <a:p>
             <a:r>
               <a:rPr lang="en-US" dirty="0"/>
-              <a:t>Question 3</a:t>
-            </a:r>
+              <a:t>Manipulating an Array using </a:t>
+            </a:r>
+            <a:r>
+              <a:rPr lang="en-US" dirty="0" err="1"/>
+              <a:t>Arraylist</a:t>
+            </a:r>
+            <a:endParaRPr lang="en-US" dirty="0"/>
           </a:p>
         </p:txBody>
       </p:sp>
@@ -22413,45 +22712,443 @@
           </a:xfrm>
         </p:spPr>
         <p:txBody>
-          <a:bodyPr/>
+          <a:bodyPr>
+            <a:normAutofit/>
+          </a:bodyPr>
           <a:lstStyle/>
           <a:p>
             <a:pPr marL="0" indent="0">
               <a:buNone/>
             </a:pPr>
-            <a:endParaRPr lang="en-US" dirty="0">
-              <a:latin typeface="Gill Sans MT" panose="020B0502020104020203" pitchFamily="34" charset="77"/>
-              <a:cs typeface="Courier New" panose="02070309020205020404" pitchFamily="49" charset="0"/>
-            </a:endParaRPr>
-          </a:p>
-          <a:p>
-            <a:pPr marL="0" indent="0">
-              <a:buNone/>
-            </a:pPr>
-            <a:endParaRPr lang="en-US" dirty="0">
-              <a:latin typeface="Gill Sans MT" panose="020B0502020104020203" pitchFamily="34" charset="77"/>
-              <a:cs typeface="Courier New" panose="02070309020205020404" pitchFamily="49" charset="0"/>
-            </a:endParaRPr>
-          </a:p>
-          <a:p>
-            <a:pPr marL="0" indent="0">
-              <a:buNone/>
-            </a:pPr>
-            <a:endParaRPr lang="en-US" dirty="0">
-              <a:latin typeface="Gill Sans MT" panose="020B0502020104020203" pitchFamily="34" charset="77"/>
-              <a:cs typeface="Courier New" panose="02070309020205020404" pitchFamily="49" charset="0"/>
-            </a:endParaRPr>
-          </a:p>
-          <a:p>
-            <a:pPr marL="0" indent="0">
-              <a:buNone/>
-            </a:pPr>
-            <a:r>
-              <a:rPr lang="en-US" dirty="0"/>
-              <a:t>Please do the following 2010 #1, 2013 #1, 2017 #1, 2018 #2, 2021 #3 and check your solutions to prepare for Question 3. </a:t>
-            </a:r>
-            <a:endParaRPr lang="en-US" dirty="0">
-              <a:latin typeface="Gill Sans MT" panose="020B0502020104020203" pitchFamily="34" charset="77"/>
+            <a:r>
+              <a:rPr lang="en-US" sz="1900" dirty="0">
+                <a:latin typeface="Courier New" panose="02070309020205020404" pitchFamily="49" charset="0"/>
+                <a:cs typeface="Courier New" panose="02070309020205020404" pitchFamily="49" charset="0"/>
+              </a:rPr>
+              <a:t>//returns a new array with bad things removed</a:t>
+            </a:r>
+          </a:p>
+          <a:p>
+            <a:pPr marL="0" indent="0">
+              <a:buNone/>
+            </a:pPr>
+            <a:r>
+              <a:rPr lang="en-US" sz="1900" dirty="0">
+                <a:latin typeface="Courier New" panose="02070309020205020404" pitchFamily="49" charset="0"/>
+                <a:cs typeface="Courier New" panose="02070309020205020404" pitchFamily="49" charset="0"/>
+              </a:rPr>
+              <a:t>public Thing[] </a:t>
+            </a:r>
+            <a:r>
+              <a:rPr lang="en-US" sz="1900" dirty="0" err="1">
+                <a:latin typeface="Courier New" panose="02070309020205020404" pitchFamily="49" charset="0"/>
+                <a:cs typeface="Courier New" panose="02070309020205020404" pitchFamily="49" charset="0"/>
+              </a:rPr>
+              <a:t>removeBadThing</a:t>
+            </a:r>
+            <a:r>
+              <a:rPr lang="en-US" sz="1900" dirty="0">
+                <a:latin typeface="Courier New" panose="02070309020205020404" pitchFamily="49" charset="0"/>
+                <a:cs typeface="Courier New" panose="02070309020205020404" pitchFamily="49" charset="0"/>
+              </a:rPr>
+              <a:t>(Thing[] widgets){ </a:t>
+            </a:r>
+          </a:p>
+          <a:p>
+            <a:pPr marL="0" indent="0">
+              <a:buNone/>
+            </a:pPr>
+            <a:r>
+              <a:rPr lang="en-US" sz="1900" dirty="0">
+                <a:latin typeface="Courier New" panose="02070309020205020404" pitchFamily="49" charset="0"/>
+                <a:cs typeface="Courier New" panose="02070309020205020404" pitchFamily="49" charset="0"/>
+              </a:rPr>
+              <a:t>	</a:t>
+            </a:r>
+            <a:r>
+              <a:rPr lang="en-US" sz="1900" dirty="0" err="1">
+                <a:latin typeface="Courier New" panose="02070309020205020404" pitchFamily="49" charset="0"/>
+                <a:cs typeface="Courier New" panose="02070309020205020404" pitchFamily="49" charset="0"/>
+              </a:rPr>
+              <a:t>ArrayList</a:t>
+            </a:r>
+            <a:r>
+              <a:rPr lang="en-US" sz="1900" dirty="0">
+                <a:latin typeface="Courier New" panose="02070309020205020404" pitchFamily="49" charset="0"/>
+                <a:cs typeface="Courier New" panose="02070309020205020404" pitchFamily="49" charset="0"/>
+              </a:rPr>
+              <a:t>&lt;Thing&gt; good = new </a:t>
+            </a:r>
+            <a:r>
+              <a:rPr lang="en-US" sz="1900" dirty="0" err="1">
+                <a:latin typeface="Courier New" panose="02070309020205020404" pitchFamily="49" charset="0"/>
+                <a:cs typeface="Courier New" panose="02070309020205020404" pitchFamily="49" charset="0"/>
+              </a:rPr>
+              <a:t>ArrayList</a:t>
+            </a:r>
+            <a:r>
+              <a:rPr lang="en-US" sz="1900" dirty="0">
+                <a:latin typeface="Courier New" panose="02070309020205020404" pitchFamily="49" charset="0"/>
+                <a:cs typeface="Courier New" panose="02070309020205020404" pitchFamily="49" charset="0"/>
+              </a:rPr>
+              <a:t>&lt;Thing&gt;();</a:t>
+            </a:r>
+          </a:p>
+          <a:p>
+            <a:pPr marL="0" indent="0">
+              <a:buNone/>
+            </a:pPr>
+            <a:r>
+              <a:rPr lang="en-US" sz="1900" dirty="0">
+                <a:latin typeface="Courier New" panose="02070309020205020404" pitchFamily="49" charset="0"/>
+                <a:cs typeface="Courier New" panose="02070309020205020404" pitchFamily="49" charset="0"/>
+              </a:rPr>
+              <a:t>	for(Thing </a:t>
+            </a:r>
+            <a:r>
+              <a:rPr lang="en-US" sz="1900" dirty="0" err="1">
+                <a:latin typeface="Courier New" panose="02070309020205020404" pitchFamily="49" charset="0"/>
+                <a:cs typeface="Courier New" panose="02070309020205020404" pitchFamily="49" charset="0"/>
+              </a:rPr>
+              <a:t>wid</a:t>
+            </a:r>
+            <a:r>
+              <a:rPr lang="en-US" sz="1900" dirty="0">
+                <a:latin typeface="Courier New" panose="02070309020205020404" pitchFamily="49" charset="0"/>
+                <a:cs typeface="Courier New" panose="02070309020205020404" pitchFamily="49" charset="0"/>
+              </a:rPr>
+              <a:t> : widgets){</a:t>
+            </a:r>
+          </a:p>
+          <a:p>
+            <a:pPr marL="0" indent="0">
+              <a:buNone/>
+            </a:pPr>
+            <a:r>
+              <a:rPr lang="en-US" sz="1900" dirty="0">
+                <a:latin typeface="Courier New" panose="02070309020205020404" pitchFamily="49" charset="0"/>
+                <a:cs typeface="Courier New" panose="02070309020205020404" pitchFamily="49" charset="0"/>
+              </a:rPr>
+              <a:t>		if(!</a:t>
+            </a:r>
+            <a:r>
+              <a:rPr lang="en-US" sz="1900" dirty="0" err="1">
+                <a:latin typeface="Courier New" panose="02070309020205020404" pitchFamily="49" charset="0"/>
+                <a:cs typeface="Courier New" panose="02070309020205020404" pitchFamily="49" charset="0"/>
+              </a:rPr>
+              <a:t>wid.isBad</a:t>
+            </a:r>
+            <a:r>
+              <a:rPr lang="en-US" sz="1900" dirty="0">
+                <a:latin typeface="Courier New" panose="02070309020205020404" pitchFamily="49" charset="0"/>
+                <a:cs typeface="Courier New" panose="02070309020205020404" pitchFamily="49" charset="0"/>
+              </a:rPr>
+              <a:t>()) </a:t>
+            </a:r>
+            <a:r>
+              <a:rPr lang="en-US" sz="1900" dirty="0">
+                <a:solidFill>
+                  <a:srgbClr val="FF0000"/>
+                </a:solidFill>
+                <a:latin typeface="Courier New" panose="02070309020205020404" pitchFamily="49" charset="0"/>
+                <a:cs typeface="Courier New" panose="02070309020205020404" pitchFamily="49" charset="0"/>
+              </a:rPr>
+              <a:t>// </a:t>
+            </a:r>
+            <a:r>
+              <a:rPr lang="en-US" sz="1900" dirty="0" err="1">
+                <a:solidFill>
+                  <a:srgbClr val="FF0000"/>
+                </a:solidFill>
+                <a:latin typeface="Courier New" panose="02070309020205020404" pitchFamily="49" charset="0"/>
+                <a:cs typeface="Courier New" panose="02070309020205020404" pitchFamily="49" charset="0"/>
+              </a:rPr>
+              <a:t>i.e</a:t>
+            </a:r>
+            <a:r>
+              <a:rPr lang="en-US" sz="1900" dirty="0">
+                <a:solidFill>
+                  <a:srgbClr val="FF0000"/>
+                </a:solidFill>
+                <a:latin typeface="Courier New" panose="02070309020205020404" pitchFamily="49" charset="0"/>
+                <a:cs typeface="Courier New" panose="02070309020205020404" pitchFamily="49" charset="0"/>
+              </a:rPr>
+              <a:t> good</a:t>
+            </a:r>
+          </a:p>
+          <a:p>
+            <a:pPr marL="0" indent="0">
+              <a:buNone/>
+            </a:pPr>
+            <a:r>
+              <a:rPr lang="en-US" sz="1900" dirty="0">
+                <a:latin typeface="Courier New" panose="02070309020205020404" pitchFamily="49" charset="0"/>
+                <a:cs typeface="Courier New" panose="02070309020205020404" pitchFamily="49" charset="0"/>
+              </a:rPr>
+              <a:t>			</a:t>
+            </a:r>
+            <a:r>
+              <a:rPr lang="en-US" sz="1900" dirty="0" err="1">
+                <a:latin typeface="Courier New" panose="02070309020205020404" pitchFamily="49" charset="0"/>
+                <a:cs typeface="Courier New" panose="02070309020205020404" pitchFamily="49" charset="0"/>
+              </a:rPr>
+              <a:t>good.add</a:t>
+            </a:r>
+            <a:r>
+              <a:rPr lang="en-US" sz="1900" dirty="0">
+                <a:latin typeface="Courier New" panose="02070309020205020404" pitchFamily="49" charset="0"/>
+                <a:cs typeface="Courier New" panose="02070309020205020404" pitchFamily="49" charset="0"/>
+              </a:rPr>
+              <a:t>(</a:t>
+            </a:r>
+            <a:r>
+              <a:rPr lang="en-US" sz="1900" dirty="0" err="1">
+                <a:latin typeface="Courier New" panose="02070309020205020404" pitchFamily="49" charset="0"/>
+                <a:cs typeface="Courier New" panose="02070309020205020404" pitchFamily="49" charset="0"/>
+              </a:rPr>
+              <a:t>wid</a:t>
+            </a:r>
+            <a:r>
+              <a:rPr lang="en-US" sz="1900" dirty="0">
+                <a:latin typeface="Courier New" panose="02070309020205020404" pitchFamily="49" charset="0"/>
+                <a:cs typeface="Courier New" panose="02070309020205020404" pitchFamily="49" charset="0"/>
+              </a:rPr>
+              <a:t>);</a:t>
+            </a:r>
+          </a:p>
+          <a:p>
+            <a:pPr marL="0" indent="0">
+              <a:buNone/>
+            </a:pPr>
+            <a:r>
+              <a:rPr lang="en-US" sz="1900" dirty="0">
+                <a:latin typeface="Courier New" panose="02070309020205020404" pitchFamily="49" charset="0"/>
+                <a:cs typeface="Courier New" panose="02070309020205020404" pitchFamily="49" charset="0"/>
+              </a:rPr>
+              <a:t>	}</a:t>
+            </a:r>
+          </a:p>
+          <a:p>
+            <a:pPr marL="0" indent="0">
+              <a:buNone/>
+            </a:pPr>
+            <a:r>
+              <a:rPr lang="en-US" sz="1900" dirty="0">
+                <a:latin typeface="Courier New" panose="02070309020205020404" pitchFamily="49" charset="0"/>
+                <a:cs typeface="Courier New" panose="02070309020205020404" pitchFamily="49" charset="0"/>
+              </a:rPr>
+              <a:t>	Thing[] </a:t>
+            </a:r>
+            <a:r>
+              <a:rPr lang="en-US" sz="1900" dirty="0" err="1">
+                <a:latin typeface="Courier New" panose="02070309020205020404" pitchFamily="49" charset="0"/>
+                <a:cs typeface="Courier New" panose="02070309020205020404" pitchFamily="49" charset="0"/>
+              </a:rPr>
+              <a:t>goodOnes</a:t>
+            </a:r>
+            <a:r>
+              <a:rPr lang="en-US" sz="1900" dirty="0">
+                <a:latin typeface="Courier New" panose="02070309020205020404" pitchFamily="49" charset="0"/>
+                <a:cs typeface="Courier New" panose="02070309020205020404" pitchFamily="49" charset="0"/>
+              </a:rPr>
+              <a:t> = new Thing[</a:t>
+            </a:r>
+            <a:r>
+              <a:rPr lang="en-US" sz="1900" dirty="0" err="1">
+                <a:latin typeface="Courier New" panose="02070309020205020404" pitchFamily="49" charset="0"/>
+                <a:cs typeface="Courier New" panose="02070309020205020404" pitchFamily="49" charset="0"/>
+              </a:rPr>
+              <a:t>good.size</a:t>
+            </a:r>
+            <a:r>
+              <a:rPr lang="en-US" sz="1900" dirty="0">
+                <a:latin typeface="Courier New" panose="02070309020205020404" pitchFamily="49" charset="0"/>
+                <a:cs typeface="Courier New" panose="02070309020205020404" pitchFamily="49" charset="0"/>
+              </a:rPr>
+              <a:t>()]; </a:t>
+            </a:r>
+          </a:p>
+          <a:p>
+            <a:pPr marL="0" indent="0">
+              <a:buNone/>
+            </a:pPr>
+            <a:r>
+              <a:rPr lang="en-US" sz="1900" dirty="0">
+                <a:latin typeface="Courier New" panose="02070309020205020404" pitchFamily="49" charset="0"/>
+                <a:cs typeface="Courier New" panose="02070309020205020404" pitchFamily="49" charset="0"/>
+              </a:rPr>
+              <a:t>	for(int </a:t>
+            </a:r>
+            <a:r>
+              <a:rPr lang="en-US" sz="1900" dirty="0" err="1">
+                <a:latin typeface="Courier New" panose="02070309020205020404" pitchFamily="49" charset="0"/>
+                <a:cs typeface="Courier New" panose="02070309020205020404" pitchFamily="49" charset="0"/>
+              </a:rPr>
+              <a:t>i</a:t>
+            </a:r>
+            <a:r>
+              <a:rPr lang="en-US" sz="1900" dirty="0">
+                <a:latin typeface="Courier New" panose="02070309020205020404" pitchFamily="49" charset="0"/>
+                <a:cs typeface="Courier New" panose="02070309020205020404" pitchFamily="49" charset="0"/>
+              </a:rPr>
+              <a:t>=0; </a:t>
+            </a:r>
+            <a:r>
+              <a:rPr lang="en-US" sz="1900" dirty="0" err="1">
+                <a:latin typeface="Courier New" panose="02070309020205020404" pitchFamily="49" charset="0"/>
+                <a:cs typeface="Courier New" panose="02070309020205020404" pitchFamily="49" charset="0"/>
+              </a:rPr>
+              <a:t>i</a:t>
+            </a:r>
+            <a:r>
+              <a:rPr lang="en-US" sz="1900" dirty="0">
+                <a:latin typeface="Courier New" panose="02070309020205020404" pitchFamily="49" charset="0"/>
+                <a:cs typeface="Courier New" panose="02070309020205020404" pitchFamily="49" charset="0"/>
+              </a:rPr>
+              <a:t> &lt; </a:t>
+            </a:r>
+            <a:r>
+              <a:rPr lang="en-US" sz="1900" dirty="0" err="1">
+                <a:latin typeface="Courier New" panose="02070309020205020404" pitchFamily="49" charset="0"/>
+                <a:cs typeface="Courier New" panose="02070309020205020404" pitchFamily="49" charset="0"/>
+              </a:rPr>
+              <a:t>goodOnes.length</a:t>
+            </a:r>
+            <a:r>
+              <a:rPr lang="en-US" sz="1900" dirty="0">
+                <a:latin typeface="Courier New" panose="02070309020205020404" pitchFamily="49" charset="0"/>
+                <a:cs typeface="Courier New" panose="02070309020205020404" pitchFamily="49" charset="0"/>
+              </a:rPr>
+              <a:t>; </a:t>
+            </a:r>
+            <a:r>
+              <a:rPr lang="en-US" sz="1900" dirty="0" err="1">
+                <a:latin typeface="Courier New" panose="02070309020205020404" pitchFamily="49" charset="0"/>
+                <a:cs typeface="Courier New" panose="02070309020205020404" pitchFamily="49" charset="0"/>
+              </a:rPr>
+              <a:t>i</a:t>
+            </a:r>
+            <a:r>
+              <a:rPr lang="en-US" sz="1900" dirty="0">
+                <a:latin typeface="Courier New" panose="02070309020205020404" pitchFamily="49" charset="0"/>
+                <a:cs typeface="Courier New" panose="02070309020205020404" pitchFamily="49" charset="0"/>
+              </a:rPr>
+              <a:t>++)</a:t>
+            </a:r>
+          </a:p>
+          <a:p>
+            <a:pPr marL="0" indent="0">
+              <a:buNone/>
+            </a:pPr>
+            <a:r>
+              <a:rPr lang="en-US" sz="1900" dirty="0">
+                <a:latin typeface="Courier New" panose="02070309020205020404" pitchFamily="49" charset="0"/>
+                <a:cs typeface="Courier New" panose="02070309020205020404" pitchFamily="49" charset="0"/>
+              </a:rPr>
+              <a:t>		</a:t>
+            </a:r>
+            <a:r>
+              <a:rPr lang="en-US" sz="1900" dirty="0" err="1">
+                <a:latin typeface="Courier New" panose="02070309020205020404" pitchFamily="49" charset="0"/>
+                <a:cs typeface="Courier New" panose="02070309020205020404" pitchFamily="49" charset="0"/>
+              </a:rPr>
+              <a:t>goodOnes</a:t>
+            </a:r>
+            <a:r>
+              <a:rPr lang="en-US" sz="1900" dirty="0">
+                <a:latin typeface="Courier New" panose="02070309020205020404" pitchFamily="49" charset="0"/>
+                <a:cs typeface="Courier New" panose="02070309020205020404" pitchFamily="49" charset="0"/>
+              </a:rPr>
+              <a:t>[</a:t>
+            </a:r>
+            <a:r>
+              <a:rPr lang="en-US" sz="1900" dirty="0" err="1">
+                <a:latin typeface="Courier New" panose="02070309020205020404" pitchFamily="49" charset="0"/>
+                <a:cs typeface="Courier New" panose="02070309020205020404" pitchFamily="49" charset="0"/>
+              </a:rPr>
+              <a:t>i</a:t>
+            </a:r>
+            <a:r>
+              <a:rPr lang="en-US" sz="1900" dirty="0">
+                <a:latin typeface="Courier New" panose="02070309020205020404" pitchFamily="49" charset="0"/>
+                <a:cs typeface="Courier New" panose="02070309020205020404" pitchFamily="49" charset="0"/>
+              </a:rPr>
+              <a:t>] = </a:t>
+            </a:r>
+            <a:r>
+              <a:rPr lang="en-US" sz="1900" dirty="0" err="1">
+                <a:latin typeface="Courier New" panose="02070309020205020404" pitchFamily="49" charset="0"/>
+                <a:cs typeface="Courier New" panose="02070309020205020404" pitchFamily="49" charset="0"/>
+              </a:rPr>
+              <a:t>good.get</a:t>
+            </a:r>
+            <a:r>
+              <a:rPr lang="en-US" sz="1900" dirty="0">
+                <a:latin typeface="Courier New" panose="02070309020205020404" pitchFamily="49" charset="0"/>
+                <a:cs typeface="Courier New" panose="02070309020205020404" pitchFamily="49" charset="0"/>
+              </a:rPr>
+              <a:t>(</a:t>
+            </a:r>
+            <a:r>
+              <a:rPr lang="en-US" sz="1900" dirty="0" err="1">
+                <a:latin typeface="Courier New" panose="02070309020205020404" pitchFamily="49" charset="0"/>
+                <a:cs typeface="Courier New" panose="02070309020205020404" pitchFamily="49" charset="0"/>
+              </a:rPr>
+              <a:t>i</a:t>
+            </a:r>
+            <a:r>
+              <a:rPr lang="en-US" sz="1900" dirty="0">
+                <a:latin typeface="Courier New" panose="02070309020205020404" pitchFamily="49" charset="0"/>
+                <a:cs typeface="Courier New" panose="02070309020205020404" pitchFamily="49" charset="0"/>
+              </a:rPr>
+              <a:t>);</a:t>
+            </a:r>
+          </a:p>
+          <a:p>
+            <a:pPr marL="0" indent="0">
+              <a:buNone/>
+            </a:pPr>
+            <a:r>
+              <a:rPr lang="en-US" sz="1900" dirty="0">
+                <a:latin typeface="Courier New" panose="02070309020205020404" pitchFamily="49" charset="0"/>
+                <a:cs typeface="Courier New" panose="02070309020205020404" pitchFamily="49" charset="0"/>
+              </a:rPr>
+              <a:t>	return </a:t>
+            </a:r>
+            <a:r>
+              <a:rPr lang="en-US" sz="1900" dirty="0" err="1">
+                <a:latin typeface="Courier New" panose="02070309020205020404" pitchFamily="49" charset="0"/>
+                <a:cs typeface="Courier New" panose="02070309020205020404" pitchFamily="49" charset="0"/>
+              </a:rPr>
+              <a:t>goodOnes</a:t>
+            </a:r>
+            <a:r>
+              <a:rPr lang="en-US" sz="1900" dirty="0">
+                <a:latin typeface="Courier New" panose="02070309020205020404" pitchFamily="49" charset="0"/>
+                <a:cs typeface="Courier New" panose="02070309020205020404" pitchFamily="49" charset="0"/>
+              </a:rPr>
+              <a:t>;</a:t>
+            </a:r>
+          </a:p>
+          <a:p>
+            <a:pPr marL="0" indent="0">
+              <a:buNone/>
+            </a:pPr>
+            <a:r>
+              <a:rPr lang="en-US" sz="1900" dirty="0">
+                <a:latin typeface="Courier New" panose="02070309020205020404" pitchFamily="49" charset="0"/>
+                <a:cs typeface="Courier New" panose="02070309020205020404" pitchFamily="49" charset="0"/>
+              </a:rPr>
+              <a:t>}</a:t>
+            </a:r>
+            <a:br>
+              <a:rPr lang="en-US" sz="1900" dirty="0">
+                <a:latin typeface="Courier New" panose="02070309020205020404" pitchFamily="49" charset="0"/>
+                <a:cs typeface="Courier New" panose="02070309020205020404" pitchFamily="49" charset="0"/>
+              </a:rPr>
+            </a:br>
+            <a:endParaRPr lang="en-US" sz="1900" dirty="0">
+              <a:latin typeface="Courier New" panose="02070309020205020404" pitchFamily="49" charset="0"/>
               <a:cs typeface="Courier New" panose="02070309020205020404" pitchFamily="49" charset="0"/>
             </a:endParaRPr>
           </a:p>
@@ -22460,7 +23157,7 @@
     </p:spTree>
     <p:extLst>
       <p:ext uri="{BB962C8B-B14F-4D97-AF65-F5344CB8AC3E}">
-        <p14:creationId xmlns:p14="http://schemas.microsoft.com/office/powerpoint/2010/main" val="4143838269"/>
+        <p14:creationId xmlns:p14="http://schemas.microsoft.com/office/powerpoint/2010/main" val="1010857515"/>
       </p:ext>
     </p:extLst>
   </p:cSld>
@@ -22505,41 +23202,92 @@
         </p:nvSpPr>
         <p:spPr>
           <a:xfrm>
-            <a:off x="628650" y="2563244"/>
+            <a:off x="167177" y="128185"/>
             <a:ext cx="7886700" cy="588511"/>
           </a:xfrm>
         </p:spPr>
         <p:txBody>
-          <a:bodyPr>
-            <a:normAutofit fontScale="90000"/>
-          </a:bodyPr>
+          <a:bodyPr/>
           <a:lstStyle/>
           <a:p>
             <a:r>
               <a:rPr lang="en-US" dirty="0"/>
-              <a:t>Question 4: 2D Array</a:t>
-            </a:r>
-            <a:br>
+              <a:t>Question 3</a:t>
+            </a:r>
+          </a:p>
+        </p:txBody>
+      </p:sp>
+      <p:sp>
+        <p:nvSpPr>
+          <p:cNvPr id="3" name="Content Placeholder 2">
+            <a:extLst>
+              <a:ext uri="{FF2B5EF4-FFF2-40B4-BE49-F238E27FC236}">
+                <a16:creationId xmlns:a16="http://schemas.microsoft.com/office/drawing/2014/main" id="{CE6BD10B-9D13-604D-9877-97B355109287}"/>
+              </a:ext>
+            </a:extLst>
+          </p:cNvPr>
+          <p:cNvSpPr>
+            <a:spLocks noGrp="1"/>
+          </p:cNvSpPr>
+          <p:nvPr>
+            <p:ph idx="1"/>
+          </p:nvPr>
+        </p:nvSpPr>
+        <p:spPr>
+          <a:xfrm>
+            <a:off x="167177" y="888763"/>
+            <a:ext cx="8780270" cy="4623273"/>
+          </a:xfrm>
+        </p:spPr>
+        <p:txBody>
+          <a:bodyPr/>
+          <a:lstStyle/>
+          <a:p>
+            <a:pPr marL="0" indent="0">
+              <a:buNone/>
+            </a:pPr>
+            <a:endParaRPr lang="en-US" dirty="0">
+              <a:latin typeface="Gill Sans MT" panose="020B0502020104020203" pitchFamily="34" charset="77"/>
+              <a:cs typeface="Courier New" panose="02070309020205020404" pitchFamily="49" charset="0"/>
+            </a:endParaRPr>
+          </a:p>
+          <a:p>
+            <a:pPr marL="0" indent="0">
+              <a:buNone/>
+            </a:pPr>
+            <a:endParaRPr lang="en-US" dirty="0">
+              <a:latin typeface="Gill Sans MT" panose="020B0502020104020203" pitchFamily="34" charset="77"/>
+              <a:cs typeface="Courier New" panose="02070309020205020404" pitchFamily="49" charset="0"/>
+            </a:endParaRPr>
+          </a:p>
+          <a:p>
+            <a:pPr marL="0" indent="0">
+              <a:buNone/>
+            </a:pPr>
+            <a:endParaRPr lang="en-US" dirty="0">
+              <a:latin typeface="Gill Sans MT" panose="020B0502020104020203" pitchFamily="34" charset="77"/>
+              <a:cs typeface="Courier New" panose="02070309020205020404" pitchFamily="49" charset="0"/>
+            </a:endParaRPr>
+          </a:p>
+          <a:p>
+            <a:pPr marL="0" indent="0">
+              <a:buNone/>
+            </a:pPr>
+            <a:r>
               <a:rPr lang="en-US" dirty="0"/>
-            </a:br>
-            <a:r>
-              <a:rPr lang="en-US" dirty="0"/>
-              <a:t>See previous years' similar FRQs: </a:t>
-            </a:r>
-            <a:br>
-              <a:rPr lang="en-US" dirty="0"/>
-            </a:br>
-            <a:r>
-              <a:rPr lang="en-US" dirty="0"/>
-              <a:t>2019 #4, 2018 #4, 2017 #4, 2016 #3, 2021#4</a:t>
-            </a:r>
+              <a:t>Please do the following 2010 #1, 2013 #1, 2017 #1, 2018 #2, 2021 #3 and check your solutions to prepare for Question 3. </a:t>
+            </a:r>
+            <a:endParaRPr lang="en-US" dirty="0">
+              <a:latin typeface="Gill Sans MT" panose="020B0502020104020203" pitchFamily="34" charset="77"/>
+              <a:cs typeface="Courier New" panose="02070309020205020404" pitchFamily="49" charset="0"/>
+            </a:endParaRPr>
           </a:p>
         </p:txBody>
       </p:sp>
     </p:spTree>
     <p:extLst>
       <p:ext uri="{BB962C8B-B14F-4D97-AF65-F5344CB8AC3E}">
-        <p14:creationId xmlns:p14="http://schemas.microsoft.com/office/powerpoint/2010/main" val="2802854376"/>
+        <p14:creationId xmlns:p14="http://schemas.microsoft.com/office/powerpoint/2010/main" val="4143838269"/>
       </p:ext>
     </p:extLst>
   </p:cSld>
@@ -22584,249 +23332,33 @@
         </p:nvSpPr>
         <p:spPr>
           <a:xfrm>
-            <a:off x="167177" y="128185"/>
+            <a:off x="628650" y="2563244"/>
             <a:ext cx="7886700" cy="588511"/>
           </a:xfrm>
         </p:spPr>
         <p:txBody>
-          <a:bodyPr/>
-          <a:lstStyle/>
-          <a:p>
-            <a:r>
-              <a:rPr lang="en-US" dirty="0"/>
-              <a:t>Row Major Order Traversal</a:t>
-            </a:r>
-          </a:p>
-        </p:txBody>
-      </p:sp>
-      <p:sp>
-        <p:nvSpPr>
-          <p:cNvPr id="3" name="Content Placeholder 2">
-            <a:extLst>
-              <a:ext uri="{FF2B5EF4-FFF2-40B4-BE49-F238E27FC236}">
-                <a16:creationId xmlns:a16="http://schemas.microsoft.com/office/drawing/2014/main" id="{CE6BD10B-9D13-604D-9877-97B355109287}"/>
-              </a:ext>
-            </a:extLst>
-          </p:cNvPr>
-          <p:cNvSpPr>
-            <a:spLocks noGrp="1"/>
-          </p:cNvSpPr>
-          <p:nvPr>
-            <p:ph idx="1"/>
-          </p:nvPr>
-        </p:nvSpPr>
-        <p:spPr>
-          <a:xfrm>
-            <a:off x="167177" y="716696"/>
-            <a:ext cx="8976822" cy="4795341"/>
-          </a:xfrm>
-        </p:spPr>
-        <p:txBody>
           <a:bodyPr>
-            <a:normAutofit lnSpcReduction="10000"/>
+            <a:normAutofit fontScale="90000"/>
           </a:bodyPr>
           <a:lstStyle/>
           <a:p>
-            <a:pPr marL="0" indent="0">
-              <a:buNone/>
-            </a:pPr>
             <a:r>
               <a:rPr lang="en-US" dirty="0"/>
-              <a:t>Example :  Count the number of Students objects whose GPA is above a threshold. </a:t>
-            </a:r>
-            <a:r>
-              <a:rPr lang="en-US" dirty="0">
-                <a:solidFill>
-                  <a:srgbClr val="FF0000"/>
-                </a:solidFill>
-              </a:rPr>
-              <a:t>(row major order)</a:t>
-            </a:r>
-          </a:p>
-          <a:p>
-            <a:pPr marL="0" indent="0">
-              <a:buNone/>
-            </a:pPr>
-            <a:r>
-              <a:rPr lang="en-US" sz="1800" dirty="0">
-                <a:latin typeface="Courier New" panose="02070309020205020404" pitchFamily="49" charset="0"/>
-                <a:cs typeface="Courier New" panose="02070309020205020404" pitchFamily="49" charset="0"/>
-              </a:rPr>
-              <a:t>public class Course{</a:t>
-            </a:r>
-          </a:p>
-          <a:p>
-            <a:pPr marL="0" indent="0">
-              <a:buNone/>
-            </a:pPr>
-            <a:r>
-              <a:rPr lang="en-US" sz="1800" dirty="0">
-                <a:latin typeface="Courier New" panose="02070309020205020404" pitchFamily="49" charset="0"/>
-                <a:cs typeface="Courier New" panose="02070309020205020404" pitchFamily="49" charset="0"/>
-              </a:rPr>
-              <a:t>	Student[][] students;</a:t>
-            </a:r>
-          </a:p>
-          <a:p>
-            <a:pPr marL="0" indent="0">
-              <a:buNone/>
-            </a:pPr>
-            <a:r>
-              <a:rPr lang="en-US" sz="1800" dirty="0">
-                <a:latin typeface="Courier New" panose="02070309020205020404" pitchFamily="49" charset="0"/>
-                <a:cs typeface="Courier New" panose="02070309020205020404" pitchFamily="49" charset="0"/>
-              </a:rPr>
-              <a:t>	// constructors not shown</a:t>
-            </a:r>
-          </a:p>
-          <a:p>
-            <a:pPr marL="0" indent="0">
-              <a:buNone/>
-            </a:pPr>
-            <a:r>
-              <a:rPr lang="en-US" sz="1800" dirty="0">
-                <a:latin typeface="Courier New" panose="02070309020205020404" pitchFamily="49" charset="0"/>
-                <a:cs typeface="Courier New" panose="02070309020205020404" pitchFamily="49" charset="0"/>
-              </a:rPr>
-              <a:t>	public int </a:t>
-            </a:r>
-            <a:r>
-              <a:rPr lang="en-US" sz="1800" dirty="0" err="1">
-                <a:latin typeface="Courier New" panose="02070309020205020404" pitchFamily="49" charset="0"/>
-                <a:cs typeface="Courier New" panose="02070309020205020404" pitchFamily="49" charset="0"/>
-              </a:rPr>
-              <a:t>aboveThreshold</a:t>
-            </a:r>
-            <a:r>
-              <a:rPr lang="en-US" sz="1800" dirty="0">
-                <a:latin typeface="Courier New" panose="02070309020205020404" pitchFamily="49" charset="0"/>
-                <a:cs typeface="Courier New" panose="02070309020205020404" pitchFamily="49" charset="0"/>
-              </a:rPr>
-              <a:t>(double threshold){</a:t>
-            </a:r>
-          </a:p>
-          <a:p>
-            <a:pPr marL="0" indent="0">
-              <a:buNone/>
-            </a:pPr>
-            <a:r>
-              <a:rPr lang="en-US" sz="1800" dirty="0">
-                <a:latin typeface="Courier New" panose="02070309020205020404" pitchFamily="49" charset="0"/>
-                <a:cs typeface="Courier New" panose="02070309020205020404" pitchFamily="49" charset="0"/>
-              </a:rPr>
-              <a:t>		int count = 0; </a:t>
-            </a:r>
-          </a:p>
-          <a:p>
-            <a:pPr marL="0" indent="0">
-              <a:buNone/>
-            </a:pPr>
-            <a:r>
-              <a:rPr lang="en-US" sz="1800" dirty="0">
-                <a:latin typeface="Courier New" panose="02070309020205020404" pitchFamily="49" charset="0"/>
-                <a:cs typeface="Courier New" panose="02070309020205020404" pitchFamily="49" charset="0"/>
-              </a:rPr>
-              <a:t>		for(int row = 0; row &lt; </a:t>
-            </a:r>
-            <a:r>
-              <a:rPr lang="en-US" sz="1800" dirty="0" err="1">
-                <a:latin typeface="Courier New" panose="02070309020205020404" pitchFamily="49" charset="0"/>
-                <a:cs typeface="Courier New" panose="02070309020205020404" pitchFamily="49" charset="0"/>
-              </a:rPr>
-              <a:t>students.length</a:t>
-            </a:r>
-            <a:r>
-              <a:rPr lang="en-US" sz="1800" dirty="0">
-                <a:latin typeface="Courier New" panose="02070309020205020404" pitchFamily="49" charset="0"/>
-                <a:cs typeface="Courier New" panose="02070309020205020404" pitchFamily="49" charset="0"/>
-              </a:rPr>
-              <a:t>; row++){</a:t>
-            </a:r>
-          </a:p>
-          <a:p>
-            <a:pPr marL="0" indent="0">
-              <a:buNone/>
-            </a:pPr>
-            <a:r>
-              <a:rPr lang="en-US" sz="1800" dirty="0">
-                <a:latin typeface="Courier New" panose="02070309020205020404" pitchFamily="49" charset="0"/>
-                <a:cs typeface="Courier New" panose="02070309020205020404" pitchFamily="49" charset="0"/>
-              </a:rPr>
-              <a:t>		  for(int 	col = 0; col &lt; students[0].length; col++){</a:t>
-            </a:r>
-          </a:p>
-          <a:p>
-            <a:pPr marL="0" indent="0">
-              <a:buNone/>
-            </a:pPr>
-            <a:r>
-              <a:rPr lang="en-US" sz="1800" dirty="0">
-                <a:latin typeface="Courier New" panose="02070309020205020404" pitchFamily="49" charset="0"/>
-                <a:cs typeface="Courier New" panose="02070309020205020404" pitchFamily="49" charset="0"/>
-              </a:rPr>
-              <a:t>			if(students[row][col].</a:t>
-            </a:r>
-            <a:r>
-              <a:rPr lang="en-US" sz="1800" dirty="0" err="1">
-                <a:latin typeface="Courier New" panose="02070309020205020404" pitchFamily="49" charset="0"/>
-                <a:cs typeface="Courier New" panose="02070309020205020404" pitchFamily="49" charset="0"/>
-              </a:rPr>
-              <a:t>getGpa</a:t>
-            </a:r>
-            <a:r>
-              <a:rPr lang="en-US" sz="1800" dirty="0">
-                <a:latin typeface="Courier New" panose="02070309020205020404" pitchFamily="49" charset="0"/>
-                <a:cs typeface="Courier New" panose="02070309020205020404" pitchFamily="49" charset="0"/>
-              </a:rPr>
-              <a:t>() &gt; threshold)</a:t>
-            </a:r>
-          </a:p>
-          <a:p>
-            <a:pPr marL="0" indent="0">
-              <a:buNone/>
-            </a:pPr>
-            <a:r>
-              <a:rPr lang="en-US" sz="1800" dirty="0">
-                <a:latin typeface="Courier New" panose="02070309020205020404" pitchFamily="49" charset="0"/>
-                <a:cs typeface="Courier New" panose="02070309020205020404" pitchFamily="49" charset="0"/>
-              </a:rPr>
-              <a:t>				count++;</a:t>
-            </a:r>
-          </a:p>
-          <a:p>
-            <a:pPr marL="0" indent="0">
-              <a:buNone/>
-            </a:pPr>
-            <a:r>
-              <a:rPr lang="en-US" sz="1800" dirty="0">
-                <a:latin typeface="Courier New" panose="02070309020205020404" pitchFamily="49" charset="0"/>
-                <a:cs typeface="Courier New" panose="02070309020205020404" pitchFamily="49" charset="0"/>
-              </a:rPr>
-              <a:t>		  }}</a:t>
-            </a:r>
-          </a:p>
-          <a:p>
-            <a:pPr marL="0" indent="0">
-              <a:buNone/>
-            </a:pPr>
-            <a:r>
-              <a:rPr lang="en-US" sz="1800" dirty="0">
-                <a:latin typeface="Courier New" panose="02070309020205020404" pitchFamily="49" charset="0"/>
-                <a:cs typeface="Courier New" panose="02070309020205020404" pitchFamily="49" charset="0"/>
-              </a:rPr>
-              <a:t>		return count;</a:t>
-            </a:r>
-          </a:p>
-          <a:p>
-            <a:pPr marL="0" indent="0">
-              <a:buNone/>
-            </a:pPr>
-            <a:r>
-              <a:rPr lang="en-US" sz="1800" dirty="0">
-                <a:latin typeface="Courier New" panose="02070309020205020404" pitchFamily="49" charset="0"/>
-                <a:cs typeface="Courier New" panose="02070309020205020404" pitchFamily="49" charset="0"/>
-              </a:rPr>
-              <a:t>	}</a:t>
+              <a:t>Question 4: 2D Array</a:t>
+            </a:r>
+            <a:br>
+              <a:rPr lang="en-US" dirty="0"/>
+            </a:br>
+            <a:r>
+              <a:rPr lang="en-US" dirty="0"/>
+              <a:t>See previous years' similar FRQs: </a:t>
+            </a:r>
+            <a:br>
+              <a:rPr lang="en-US" dirty="0"/>
+            </a:br>
+            <a:r>
+              <a:rPr lang="en-US" dirty="0"/>
+              <a:t>2019 #4, 2018 #4, 2017 #4, 2016 #3, 2021#4</a:t>
             </a:r>
           </a:p>
         </p:txBody>
@@ -22834,7 +23366,7 @@
     </p:spTree>
     <p:extLst>
       <p:ext uri="{BB962C8B-B14F-4D97-AF65-F5344CB8AC3E}">
-        <p14:creationId xmlns:p14="http://schemas.microsoft.com/office/powerpoint/2010/main" val="371263916"/>
+        <p14:creationId xmlns:p14="http://schemas.microsoft.com/office/powerpoint/2010/main" val="2802854376"/>
       </p:ext>
     </p:extLst>
   </p:cSld>
@@ -23296,7 +23828,7 @@
           <a:p>
             <a:r>
               <a:rPr lang="en-US" dirty="0"/>
-              <a:t>Column Major Order Traversal</a:t>
+              <a:t>Row Major Order Traversal</a:t>
             </a:r>
           </a:p>
         </p:txBody>
@@ -23342,7 +23874,7 @@
                   <a:srgbClr val="FF0000"/>
                 </a:solidFill>
               </a:rPr>
-              <a:t>(column major order)</a:t>
+              <a:t>(row major order)</a:t>
             </a:r>
           </a:p>
           <a:p>
@@ -23428,44 +23960,59 @@
                 <a:latin typeface="Courier New" panose="02070309020205020404" pitchFamily="49" charset="0"/>
                 <a:cs typeface="Courier New" panose="02070309020205020404" pitchFamily="49" charset="0"/>
               </a:rPr>
-              <a:t>		for(int col = 0; col &lt; students[0].length</a:t>
-            </a:r>
-            <a:r>
-              <a:rPr lang="en-US" sz="1800">
-                <a:latin typeface="Courier New" panose="02070309020205020404" pitchFamily="49" charset="0"/>
-                <a:cs typeface="Courier New" panose="02070309020205020404" pitchFamily="49" charset="0"/>
-              </a:rPr>
-              <a:t>; col++){</a:t>
-            </a:r>
-            <a:endParaRPr lang="en-US" sz="1800" dirty="0">
-              <a:latin typeface="Courier New" panose="02070309020205020404" pitchFamily="49" charset="0"/>
-              <a:cs typeface="Courier New" panose="02070309020205020404" pitchFamily="49" charset="0"/>
-            </a:endParaRPr>
-          </a:p>
-          <a:p>
-            <a:pPr marL="0" indent="0">
-              <a:buNone/>
-            </a:pPr>
+              <a:t>		for(int row = 0; row &lt; </a:t>
+            </a:r>
+            <a:r>
+              <a:rPr lang="en-US" sz="1800" dirty="0" err="1">
+                <a:latin typeface="Courier New" panose="02070309020205020404" pitchFamily="49" charset="0"/>
+                <a:cs typeface="Courier New" panose="02070309020205020404" pitchFamily="49" charset="0"/>
+              </a:rPr>
+              <a:t>students.length</a:t>
+            </a:r>
             <a:r>
               <a:rPr lang="en-US" sz="1800" dirty="0">
                 <a:latin typeface="Courier New" panose="02070309020205020404" pitchFamily="49" charset="0"/>
                 <a:cs typeface="Courier New" panose="02070309020205020404" pitchFamily="49" charset="0"/>
               </a:rPr>
-              <a:t>		  for(int 	row = 0; row &lt; </a:t>
+              <a:t>; row++){</a:t>
+            </a:r>
+          </a:p>
+          <a:p>
+            <a:pPr marL="0" indent="0">
+              <a:buNone/>
+            </a:pPr>
+            <a:r>
+              <a:rPr lang="en-US" sz="1800" dirty="0">
+                <a:latin typeface="Courier New" panose="02070309020205020404" pitchFamily="49" charset="0"/>
+                <a:cs typeface="Courier New" panose="02070309020205020404" pitchFamily="49" charset="0"/>
+              </a:rPr>
+              <a:t>		  for(int 	col = 0; col &lt; students[0].length; col++){</a:t>
+            </a:r>
+          </a:p>
+          <a:p>
+            <a:pPr marL="0" indent="0">
+              <a:buNone/>
+            </a:pPr>
+            <a:r>
+              <a:rPr lang="en-US" sz="1800" dirty="0">
+                <a:latin typeface="Courier New" panose="02070309020205020404" pitchFamily="49" charset="0"/>
+                <a:cs typeface="Courier New" panose="02070309020205020404" pitchFamily="49" charset="0"/>
+              </a:rPr>
+              <a:t>			if(students[row][col].</a:t>
             </a:r>
             <a:r>
               <a:rPr lang="en-US" sz="1800" dirty="0" err="1">
                 <a:latin typeface="Courier New" panose="02070309020205020404" pitchFamily="49" charset="0"/>
                 <a:cs typeface="Courier New" panose="02070309020205020404" pitchFamily="49" charset="0"/>
               </a:rPr>
-              <a:t>students.length</a:t>
+              <a:t>getGpa</a:t>
             </a:r>
             <a:r>
               <a:rPr lang="en-US" sz="1800" dirty="0">
                 <a:latin typeface="Courier New" panose="02070309020205020404" pitchFamily="49" charset="0"/>
                 <a:cs typeface="Courier New" panose="02070309020205020404" pitchFamily="49" charset="0"/>
               </a:rPr>
-              <a:t>; row++){</a:t>
+              <a:t>() &gt; threshold)</a:t>
             </a:r>
           </a:p>
           <a:p>
@@ -23477,45 +24024,19 @@
                 <a:latin typeface="Courier New" panose="02070309020205020404" pitchFamily="49" charset="0"/>
                 <a:cs typeface="Courier New" panose="02070309020205020404" pitchFamily="49" charset="0"/>
               </a:rPr>
-              <a:t>			if(students[row][col].</a:t>
-            </a:r>
-            <a:r>
-              <a:rPr lang="en-US" sz="1800" dirty="0" err="1">
-                <a:latin typeface="Courier New" panose="02070309020205020404" pitchFamily="49" charset="0"/>
-                <a:cs typeface="Courier New" panose="02070309020205020404" pitchFamily="49" charset="0"/>
-              </a:rPr>
-              <a:t>getGpa</a:t>
-            </a:r>
+              <a:t>				count++;</a:t>
+            </a:r>
+          </a:p>
+          <a:p>
+            <a:pPr marL="0" indent="0">
+              <a:buNone/>
+            </a:pPr>
             <a:r>
               <a:rPr lang="en-US" sz="1800" dirty="0">
                 <a:latin typeface="Courier New" panose="02070309020205020404" pitchFamily="49" charset="0"/>
                 <a:cs typeface="Courier New" panose="02070309020205020404" pitchFamily="49" charset="0"/>
               </a:rPr>
-              <a:t>() &gt; threshold)</a:t>
-            </a:r>
-          </a:p>
-          <a:p>
-            <a:pPr marL="0" indent="0">
-              <a:buNone/>
-            </a:pPr>
-            <a:r>
-              <a:rPr lang="en-US" sz="1800" dirty="0">
-                <a:latin typeface="Courier New" panose="02070309020205020404" pitchFamily="49" charset="0"/>
-                <a:cs typeface="Courier New" panose="02070309020205020404" pitchFamily="49" charset="0"/>
-              </a:rPr>
-              <a:t>				count++;</a:t>
-            </a:r>
-          </a:p>
-          <a:p>
-            <a:pPr marL="0" indent="0">
-              <a:buNone/>
-            </a:pPr>
-            <a:r>
-              <a:rPr lang="en-US" sz="1800" dirty="0">
-                <a:latin typeface="Courier New" panose="02070309020205020404" pitchFamily="49" charset="0"/>
-                <a:cs typeface="Courier New" panose="02070309020205020404" pitchFamily="49" charset="0"/>
-              </a:rPr>
-              <a:t>		}</a:t>
+              <a:t>		  }}</a:t>
             </a:r>
           </a:p>
           <a:p>
@@ -23547,7 +24068,7 @@
     </p:spTree>
     <p:extLst>
       <p:ext uri="{BB962C8B-B14F-4D97-AF65-F5344CB8AC3E}">
-        <p14:creationId xmlns:p14="http://schemas.microsoft.com/office/powerpoint/2010/main" val="1114803321"/>
+        <p14:creationId xmlns:p14="http://schemas.microsoft.com/office/powerpoint/2010/main" val="371263916"/>
       </p:ext>
     </p:extLst>
   </p:cSld>
@@ -23602,7 +24123,7 @@
           <a:p>
             <a:r>
               <a:rPr lang="en-US" dirty="0"/>
-              <a:t>Along One Row</a:t>
+              <a:t>Column Major Order Traversal</a:t>
             </a:r>
           </a:p>
         </p:txBody>
@@ -23640,7 +24161,7 @@
             </a:pPr>
             <a:r>
               <a:rPr lang="en-US" dirty="0"/>
-              <a:t>Example :  Count the number of Students objects whose GPA is above a threshold in the given </a:t>
+              <a:t>Example :  Count the number of Students objects whose GPA is above a threshold. </a:t>
             </a:r>
             <a:r>
               <a:rPr lang="en-US" dirty="0">
@@ -23648,11 +24169,7 @@
                   <a:srgbClr val="FF0000"/>
                 </a:solidFill>
               </a:rPr>
-              <a:t>row</a:t>
-            </a:r>
-            <a:r>
-              <a:rPr lang="en-US" dirty="0"/>
-              <a:t>. </a:t>
+              <a:t>(column major order)</a:t>
             </a:r>
           </a:p>
           <a:p>
@@ -23695,6 +24212,58 @@
             <a:pPr marL="0" indent="0">
               <a:buNone/>
             </a:pPr>
+            <a:r>
+              <a:rPr lang="en-US" sz="1800" dirty="0">
+                <a:latin typeface="Courier New" panose="02070309020205020404" pitchFamily="49" charset="0"/>
+                <a:cs typeface="Courier New" panose="02070309020205020404" pitchFamily="49" charset="0"/>
+              </a:rPr>
+              <a:t>	public int </a:t>
+            </a:r>
+            <a:r>
+              <a:rPr lang="en-US" sz="1800" dirty="0" err="1">
+                <a:latin typeface="Courier New" panose="02070309020205020404" pitchFamily="49" charset="0"/>
+                <a:cs typeface="Courier New" panose="02070309020205020404" pitchFamily="49" charset="0"/>
+              </a:rPr>
+              <a:t>aboveThreshold</a:t>
+            </a:r>
+            <a:r>
+              <a:rPr lang="en-US" sz="1800" dirty="0">
+                <a:latin typeface="Courier New" panose="02070309020205020404" pitchFamily="49" charset="0"/>
+                <a:cs typeface="Courier New" panose="02070309020205020404" pitchFamily="49" charset="0"/>
+              </a:rPr>
+              <a:t>(double threshold){</a:t>
+            </a:r>
+          </a:p>
+          <a:p>
+            <a:pPr marL="0" indent="0">
+              <a:buNone/>
+            </a:pPr>
+            <a:r>
+              <a:rPr lang="en-US" sz="1800" dirty="0">
+                <a:latin typeface="Courier New" panose="02070309020205020404" pitchFamily="49" charset="0"/>
+                <a:cs typeface="Courier New" panose="02070309020205020404" pitchFamily="49" charset="0"/>
+              </a:rPr>
+              <a:t>		int count = 0; </a:t>
+            </a:r>
+          </a:p>
+          <a:p>
+            <a:pPr marL="0" indent="0">
+              <a:buNone/>
+            </a:pPr>
+            <a:r>
+              <a:rPr lang="en-US" sz="1800" dirty="0">
+                <a:latin typeface="Courier New" panose="02070309020205020404" pitchFamily="49" charset="0"/>
+                <a:cs typeface="Courier New" panose="02070309020205020404" pitchFamily="49" charset="0"/>
+              </a:rPr>
+              <a:t>		for(int col = 0; col &lt; students[0].length</a:t>
+            </a:r>
+            <a:r>
+              <a:rPr lang="en-US" sz="1800">
+                <a:latin typeface="Courier New" panose="02070309020205020404" pitchFamily="49" charset="0"/>
+                <a:cs typeface="Courier New" panose="02070309020205020404" pitchFamily="49" charset="0"/>
+              </a:rPr>
+              <a:t>; col++){</a:t>
+            </a:r>
             <a:endParaRPr lang="en-US" sz="1800" dirty="0">
               <a:latin typeface="Courier New" panose="02070309020205020404" pitchFamily="49" charset="0"/>
               <a:cs typeface="Courier New" panose="02070309020205020404" pitchFamily="49" charset="0"/>
@@ -23709,62 +24278,21 @@
                 <a:latin typeface="Courier New" panose="02070309020205020404" pitchFamily="49" charset="0"/>
                 <a:cs typeface="Courier New" panose="02070309020205020404" pitchFamily="49" charset="0"/>
               </a:rPr>
-              <a:t>	public int </a:t>
+              <a:t>		  for(int 	row = 0; row &lt; </a:t>
             </a:r>
             <a:r>
               <a:rPr lang="en-US" sz="1800" dirty="0" err="1">
                 <a:latin typeface="Courier New" panose="02070309020205020404" pitchFamily="49" charset="0"/>
                 <a:cs typeface="Courier New" panose="02070309020205020404" pitchFamily="49" charset="0"/>
               </a:rPr>
-              <a:t>aboveThreshold</a:t>
+              <a:t>students.length</a:t>
             </a:r>
             <a:r>
               <a:rPr lang="en-US" sz="1800" dirty="0">
                 <a:latin typeface="Courier New" panose="02070309020205020404" pitchFamily="49" charset="0"/>
                 <a:cs typeface="Courier New" panose="02070309020205020404" pitchFamily="49" charset="0"/>
               </a:rPr>
-              <a:t>(int row, double threshold){</a:t>
-            </a:r>
-          </a:p>
-          <a:p>
-            <a:pPr marL="0" indent="0">
-              <a:buNone/>
-            </a:pPr>
-            <a:r>
-              <a:rPr lang="en-US" sz="1800" dirty="0">
-                <a:latin typeface="Courier New" panose="02070309020205020404" pitchFamily="49" charset="0"/>
-                <a:cs typeface="Courier New" panose="02070309020205020404" pitchFamily="49" charset="0"/>
-              </a:rPr>
-              <a:t>		int count = 0; </a:t>
-            </a:r>
-          </a:p>
-          <a:p>
-            <a:pPr marL="0" indent="0">
-              <a:buNone/>
-            </a:pPr>
-            <a:r>
-              <a:rPr lang="en-US" sz="1800" dirty="0">
-                <a:latin typeface="Courier New" panose="02070309020205020404" pitchFamily="49" charset="0"/>
-                <a:cs typeface="Courier New" panose="02070309020205020404" pitchFamily="49" charset="0"/>
-              </a:rPr>
-              <a:t>		for(int col = 0; col &lt; </a:t>
-            </a:r>
-            <a:r>
-              <a:rPr lang="en-US" sz="1800" dirty="0">
-                <a:solidFill>
-                  <a:srgbClr val="FF0000"/>
-                </a:solidFill>
-                <a:latin typeface="Courier New" panose="02070309020205020404" pitchFamily="49" charset="0"/>
-                <a:cs typeface="Courier New" panose="02070309020205020404" pitchFamily="49" charset="0"/>
-              </a:rPr>
-              <a:t>students[row].length</a:t>
-            </a:r>
-            <a:r>
-              <a:rPr lang="en-US" sz="1800" dirty="0">
-                <a:latin typeface="Courier New" panose="02070309020205020404" pitchFamily="49" charset="0"/>
-                <a:cs typeface="Courier New" panose="02070309020205020404" pitchFamily="49" charset="0"/>
-              </a:rPr>
-              <a:t>; col++){</a:t>
+              <a:t>; row++){</a:t>
             </a:r>
           </a:p>
           <a:p>
@@ -23846,7 +24374,7 @@
     </p:spTree>
     <p:extLst>
       <p:ext uri="{BB962C8B-B14F-4D97-AF65-F5344CB8AC3E}">
-        <p14:creationId xmlns:p14="http://schemas.microsoft.com/office/powerpoint/2010/main" val="2556757169"/>
+        <p14:creationId xmlns:p14="http://schemas.microsoft.com/office/powerpoint/2010/main" val="1114803321"/>
       </p:ext>
     </p:extLst>
   </p:cSld>
@@ -23901,7 +24429,7 @@
           <a:p>
             <a:r>
               <a:rPr lang="en-US" dirty="0"/>
-              <a:t>Along One Column</a:t>
+              <a:t>Along One Row</a:t>
             </a:r>
           </a:p>
         </p:txBody>
@@ -23929,7 +24457,9 @@
           </a:xfrm>
         </p:spPr>
         <p:txBody>
-          <a:bodyPr/>
+          <a:bodyPr>
+            <a:normAutofit lnSpcReduction="10000"/>
+          </a:bodyPr>
           <a:lstStyle/>
           <a:p>
             <a:pPr marL="0" indent="0">
@@ -23945,7 +24475,7 @@
                   <a:srgbClr val="FF0000"/>
                 </a:solidFill>
               </a:rPr>
-              <a:t>column</a:t>
+              <a:t>row</a:t>
             </a:r>
             <a:r>
               <a:rPr lang="en-US" dirty="0"/>
@@ -23992,6 +24522,15 @@
             <a:pPr marL="0" indent="0">
               <a:buNone/>
             </a:pPr>
+            <a:endParaRPr lang="en-US" sz="1800" dirty="0">
+              <a:latin typeface="Courier New" panose="02070309020205020404" pitchFamily="49" charset="0"/>
+              <a:cs typeface="Courier New" panose="02070309020205020404" pitchFamily="49" charset="0"/>
+            </a:endParaRPr>
+          </a:p>
+          <a:p>
+            <a:pPr marL="0" indent="0">
+              <a:buNone/>
+            </a:pPr>
             <a:r>
               <a:rPr lang="en-US" sz="1800" dirty="0">
                 <a:latin typeface="Courier New" panose="02070309020205020404" pitchFamily="49" charset="0"/>
@@ -24011,7 +24550,7 @@
                 <a:latin typeface="Courier New" panose="02070309020205020404" pitchFamily="49" charset="0"/>
                 <a:cs typeface="Courier New" panose="02070309020205020404" pitchFamily="49" charset="0"/>
               </a:rPr>
-              <a:t>(int col, double threshold){</a:t>
+              <a:t>(int row, double threshold){</a:t>
             </a:r>
           </a:p>
           <a:p>
@@ -24035,24 +24574,24 @@
                 <a:latin typeface="Courier New" panose="02070309020205020404" pitchFamily="49" charset="0"/>
                 <a:cs typeface="Courier New" panose="02070309020205020404" pitchFamily="49" charset="0"/>
               </a:rPr>
-              <a:t>		for(int row = 0; row &lt; </a:t>
-            </a:r>
-            <a:r>
-              <a:rPr lang="en-US" sz="1800" dirty="0" err="1">
+              <a:t>		for(int col = 0; col &lt; </a:t>
+            </a:r>
+            <a:r>
+              <a:rPr lang="en-US" sz="1800" dirty="0">
                 <a:solidFill>
                   <a:srgbClr val="FF0000"/>
                 </a:solidFill>
                 <a:latin typeface="Courier New" panose="02070309020205020404" pitchFamily="49" charset="0"/>
                 <a:cs typeface="Courier New" panose="02070309020205020404" pitchFamily="49" charset="0"/>
               </a:rPr>
-              <a:t>students.length</a:t>
+              <a:t>students[row].length</a:t>
             </a:r>
             <a:r>
               <a:rPr lang="en-US" sz="1800" dirty="0">
                 <a:latin typeface="Courier New" panose="02070309020205020404" pitchFamily="49" charset="0"/>
                 <a:cs typeface="Courier New" panose="02070309020205020404" pitchFamily="49" charset="0"/>
               </a:rPr>
-              <a:t>; row++){</a:t>
+              <a:t>; col++){</a:t>
             </a:r>
           </a:p>
           <a:p>
@@ -24134,7 +24673,7 @@
     </p:spTree>
     <p:extLst>
       <p:ext uri="{BB962C8B-B14F-4D97-AF65-F5344CB8AC3E}">
-        <p14:creationId xmlns:p14="http://schemas.microsoft.com/office/powerpoint/2010/main" val="74938920"/>
+        <p14:creationId xmlns:p14="http://schemas.microsoft.com/office/powerpoint/2010/main" val="2556757169"/>
       </p:ext>
     </p:extLst>
   </p:cSld>
@@ -24189,7 +24728,7 @@
           <a:p>
             <a:r>
               <a:rPr lang="en-US" dirty="0"/>
-              <a:t>Major Diagonal  Traversal</a:t>
+              <a:t>Along One Column</a:t>
             </a:r>
           </a:p>
         </p:txBody>
@@ -24225,7 +24764,7 @@
             </a:pPr>
             <a:r>
               <a:rPr lang="en-US" dirty="0"/>
-              <a:t>Example :  Count the number of Students objects whose GPA is above threshold along the </a:t>
+              <a:t>Example :  Count the number of Students objects whose GPA is above a threshold in the given </a:t>
             </a:r>
             <a:r>
               <a:rPr lang="en-US" dirty="0">
@@ -24233,11 +24772,11 @@
                   <a:srgbClr val="FF0000"/>
                 </a:solidFill>
               </a:rPr>
-              <a:t>major diagonal</a:t>
+              <a:t>column</a:t>
             </a:r>
             <a:r>
               <a:rPr lang="en-US" dirty="0"/>
-              <a:t>.  Assume 2D array is square. </a:t>
+              <a:t>. </a:t>
             </a:r>
           </a:p>
           <a:p>
@@ -24299,7 +24838,7 @@
                 <a:latin typeface="Courier New" panose="02070309020205020404" pitchFamily="49" charset="0"/>
                 <a:cs typeface="Courier New" panose="02070309020205020404" pitchFamily="49" charset="0"/>
               </a:rPr>
-              <a:t>(double threshold){</a:t>
+              <a:t>(int col, double threshold){</a:t>
             </a:r>
           </a:p>
           <a:p>
@@ -24323,103 +24862,36 @@
                 <a:latin typeface="Courier New" panose="02070309020205020404" pitchFamily="49" charset="0"/>
                 <a:cs typeface="Courier New" panose="02070309020205020404" pitchFamily="49" charset="0"/>
               </a:rPr>
-              <a:t>		for(int </a:t>
+              <a:t>		for(int row = 0; row &lt; </a:t>
             </a:r>
             <a:r>
               <a:rPr lang="en-US" sz="1800" dirty="0" err="1">
-                <a:latin typeface="Courier New" panose="02070309020205020404" pitchFamily="49" charset="0"/>
-                <a:cs typeface="Courier New" panose="02070309020205020404" pitchFamily="49" charset="0"/>
-              </a:rPr>
-              <a:t>i</a:t>
+                <a:solidFill>
+                  <a:srgbClr val="FF0000"/>
+                </a:solidFill>
+                <a:latin typeface="Courier New" panose="02070309020205020404" pitchFamily="49" charset="0"/>
+                <a:cs typeface="Courier New" panose="02070309020205020404" pitchFamily="49" charset="0"/>
+              </a:rPr>
+              <a:t>students.length</a:t>
             </a:r>
             <a:r>
               <a:rPr lang="en-US" sz="1800" dirty="0">
                 <a:latin typeface="Courier New" panose="02070309020205020404" pitchFamily="49" charset="0"/>
                 <a:cs typeface="Courier New" panose="02070309020205020404" pitchFamily="49" charset="0"/>
               </a:rPr>
-              <a:t> = 0; </a:t>
-            </a:r>
-            <a:r>
-              <a:rPr lang="en-US" sz="1800" dirty="0" err="1">
-                <a:latin typeface="Courier New" panose="02070309020205020404" pitchFamily="49" charset="0"/>
-                <a:cs typeface="Courier New" panose="02070309020205020404" pitchFamily="49" charset="0"/>
-              </a:rPr>
-              <a:t>i</a:t>
-            </a:r>
+              <a:t>; row++){</a:t>
+            </a:r>
+          </a:p>
+          <a:p>
+            <a:pPr marL="0" indent="0">
+              <a:buNone/>
+            </a:pPr>
             <a:r>
               <a:rPr lang="en-US" sz="1800" dirty="0">
                 <a:latin typeface="Courier New" panose="02070309020205020404" pitchFamily="49" charset="0"/>
                 <a:cs typeface="Courier New" panose="02070309020205020404" pitchFamily="49" charset="0"/>
               </a:rPr>
-              <a:t> &lt; </a:t>
-            </a:r>
-            <a:r>
-              <a:rPr lang="en-US" sz="1800" dirty="0" err="1">
-                <a:latin typeface="Courier New" panose="02070309020205020404" pitchFamily="49" charset="0"/>
-                <a:cs typeface="Courier New" panose="02070309020205020404" pitchFamily="49" charset="0"/>
-              </a:rPr>
-              <a:t>students.length</a:t>
-            </a:r>
-            <a:r>
-              <a:rPr lang="en-US" sz="1800" dirty="0">
-                <a:latin typeface="Courier New" panose="02070309020205020404" pitchFamily="49" charset="0"/>
-                <a:cs typeface="Courier New" panose="02070309020205020404" pitchFamily="49" charset="0"/>
-              </a:rPr>
-              <a:t>; </a:t>
-            </a:r>
-            <a:r>
-              <a:rPr lang="en-US" sz="1800" dirty="0" err="1">
-                <a:latin typeface="Courier New" panose="02070309020205020404" pitchFamily="49" charset="0"/>
-                <a:cs typeface="Courier New" panose="02070309020205020404" pitchFamily="49" charset="0"/>
-              </a:rPr>
-              <a:t>i</a:t>
-            </a:r>
-            <a:r>
-              <a:rPr lang="en-US" sz="1800" dirty="0">
-                <a:latin typeface="Courier New" panose="02070309020205020404" pitchFamily="49" charset="0"/>
-                <a:cs typeface="Courier New" panose="02070309020205020404" pitchFamily="49" charset="0"/>
-              </a:rPr>
-              <a:t>++){</a:t>
-            </a:r>
-          </a:p>
-          <a:p>
-            <a:pPr marL="0" indent="0">
-              <a:buNone/>
-            </a:pPr>
-            <a:r>
-              <a:rPr lang="en-US" sz="1800" dirty="0">
-                <a:latin typeface="Courier New" panose="02070309020205020404" pitchFamily="49" charset="0"/>
-                <a:cs typeface="Courier New" panose="02070309020205020404" pitchFamily="49" charset="0"/>
-              </a:rPr>
-              <a:t>			if(students[</a:t>
-            </a:r>
-            <a:r>
-              <a:rPr lang="en-US" sz="1800" dirty="0" err="1">
-                <a:latin typeface="Courier New" panose="02070309020205020404" pitchFamily="49" charset="0"/>
-                <a:cs typeface="Courier New" panose="02070309020205020404" pitchFamily="49" charset="0"/>
-              </a:rPr>
-              <a:t>i</a:t>
-            </a:r>
-            <a:r>
-              <a:rPr lang="en-US" sz="1800" dirty="0">
-                <a:latin typeface="Courier New" panose="02070309020205020404" pitchFamily="49" charset="0"/>
-                <a:cs typeface="Courier New" panose="02070309020205020404" pitchFamily="49" charset="0"/>
-              </a:rPr>
-              <a:t>][</a:t>
-            </a:r>
-            <a:r>
-              <a:rPr lang="en-US" sz="1800" dirty="0" err="1">
-                <a:latin typeface="Courier New" panose="02070309020205020404" pitchFamily="49" charset="0"/>
-                <a:cs typeface="Courier New" panose="02070309020205020404" pitchFamily="49" charset="0"/>
-              </a:rPr>
-              <a:t>i</a:t>
-            </a:r>
-            <a:r>
-              <a:rPr lang="en-US" sz="1800" dirty="0">
-                <a:latin typeface="Courier New" panose="02070309020205020404" pitchFamily="49" charset="0"/>
-                <a:cs typeface="Courier New" panose="02070309020205020404" pitchFamily="49" charset="0"/>
-              </a:rPr>
-              <a:t>].</a:t>
+              <a:t>			if(students[row][col].</a:t>
             </a:r>
             <a:r>
               <a:rPr lang="en-US" sz="1800" dirty="0" err="1">
@@ -24489,7 +24961,7 @@
     </p:spTree>
     <p:extLst>
       <p:ext uri="{BB962C8B-B14F-4D97-AF65-F5344CB8AC3E}">
-        <p14:creationId xmlns:p14="http://schemas.microsoft.com/office/powerpoint/2010/main" val="775703315"/>
+        <p14:creationId xmlns:p14="http://schemas.microsoft.com/office/powerpoint/2010/main" val="74938920"/>
       </p:ext>
     </p:extLst>
   </p:cSld>
@@ -24544,6 +25016,361 @@
           <a:p>
             <a:r>
               <a:rPr lang="en-US" dirty="0"/>
+              <a:t>Major Diagonal  Traversal</a:t>
+            </a:r>
+          </a:p>
+        </p:txBody>
+      </p:sp>
+      <p:sp>
+        <p:nvSpPr>
+          <p:cNvPr id="3" name="Content Placeholder 2">
+            <a:extLst>
+              <a:ext uri="{FF2B5EF4-FFF2-40B4-BE49-F238E27FC236}">
+                <a16:creationId xmlns:a16="http://schemas.microsoft.com/office/drawing/2014/main" id="{CE6BD10B-9D13-604D-9877-97B355109287}"/>
+              </a:ext>
+            </a:extLst>
+          </p:cNvPr>
+          <p:cNvSpPr>
+            <a:spLocks noGrp="1"/>
+          </p:cNvSpPr>
+          <p:nvPr>
+            <p:ph idx="1"/>
+          </p:nvPr>
+        </p:nvSpPr>
+        <p:spPr>
+          <a:xfrm>
+            <a:off x="167177" y="716696"/>
+            <a:ext cx="8976822" cy="4795341"/>
+          </a:xfrm>
+        </p:spPr>
+        <p:txBody>
+          <a:bodyPr/>
+          <a:lstStyle/>
+          <a:p>
+            <a:pPr marL="0" indent="0">
+              <a:buNone/>
+            </a:pPr>
+            <a:r>
+              <a:rPr lang="en-US" dirty="0"/>
+              <a:t>Example :  Count the number of Students objects whose GPA is above threshold along the </a:t>
+            </a:r>
+            <a:r>
+              <a:rPr lang="en-US" dirty="0">
+                <a:solidFill>
+                  <a:srgbClr val="FF0000"/>
+                </a:solidFill>
+              </a:rPr>
+              <a:t>major diagonal</a:t>
+            </a:r>
+            <a:r>
+              <a:rPr lang="en-US" dirty="0"/>
+              <a:t>.  Assume 2D array is square. </a:t>
+            </a:r>
+          </a:p>
+          <a:p>
+            <a:pPr marL="0" indent="0">
+              <a:buNone/>
+            </a:pPr>
+            <a:r>
+              <a:rPr lang="en-US" sz="1800" dirty="0">
+                <a:latin typeface="Courier New" panose="02070309020205020404" pitchFamily="49" charset="0"/>
+                <a:cs typeface="Courier New" panose="02070309020205020404" pitchFamily="49" charset="0"/>
+              </a:rPr>
+              <a:t>public class Course{</a:t>
+            </a:r>
+          </a:p>
+          <a:p>
+            <a:pPr marL="0" indent="0">
+              <a:buNone/>
+            </a:pPr>
+            <a:r>
+              <a:rPr lang="en-US" sz="1800" dirty="0">
+                <a:latin typeface="Courier New" panose="02070309020205020404" pitchFamily="49" charset="0"/>
+                <a:cs typeface="Courier New" panose="02070309020205020404" pitchFamily="49" charset="0"/>
+              </a:rPr>
+              <a:t>	Student[][] students;</a:t>
+            </a:r>
+          </a:p>
+          <a:p>
+            <a:pPr marL="0" indent="0">
+              <a:buNone/>
+            </a:pPr>
+            <a:r>
+              <a:rPr lang="en-US" sz="1800" dirty="0">
+                <a:latin typeface="Courier New" panose="02070309020205020404" pitchFamily="49" charset="0"/>
+                <a:cs typeface="Courier New" panose="02070309020205020404" pitchFamily="49" charset="0"/>
+              </a:rPr>
+              <a:t>	// constructors not shown</a:t>
+            </a:r>
+          </a:p>
+          <a:p>
+            <a:pPr marL="0" indent="0">
+              <a:buNone/>
+            </a:pPr>
+            <a:r>
+              <a:rPr lang="en-US" sz="1800" dirty="0">
+                <a:latin typeface="Courier New" panose="02070309020205020404" pitchFamily="49" charset="0"/>
+                <a:cs typeface="Courier New" panose="02070309020205020404" pitchFamily="49" charset="0"/>
+              </a:rPr>
+              <a:t>	public int </a:t>
+            </a:r>
+            <a:r>
+              <a:rPr lang="en-US" sz="1800" dirty="0" err="1">
+                <a:latin typeface="Courier New" panose="02070309020205020404" pitchFamily="49" charset="0"/>
+                <a:cs typeface="Courier New" panose="02070309020205020404" pitchFamily="49" charset="0"/>
+              </a:rPr>
+              <a:t>aboveThreshold</a:t>
+            </a:r>
+            <a:r>
+              <a:rPr lang="en-US" sz="1800" dirty="0">
+                <a:latin typeface="Courier New" panose="02070309020205020404" pitchFamily="49" charset="0"/>
+                <a:cs typeface="Courier New" panose="02070309020205020404" pitchFamily="49" charset="0"/>
+              </a:rPr>
+              <a:t>(double threshold){</a:t>
+            </a:r>
+          </a:p>
+          <a:p>
+            <a:pPr marL="0" indent="0">
+              <a:buNone/>
+            </a:pPr>
+            <a:r>
+              <a:rPr lang="en-US" sz="1800" dirty="0">
+                <a:latin typeface="Courier New" panose="02070309020205020404" pitchFamily="49" charset="0"/>
+                <a:cs typeface="Courier New" panose="02070309020205020404" pitchFamily="49" charset="0"/>
+              </a:rPr>
+              <a:t>		int count = 0; </a:t>
+            </a:r>
+          </a:p>
+          <a:p>
+            <a:pPr marL="0" indent="0">
+              <a:buNone/>
+            </a:pPr>
+            <a:r>
+              <a:rPr lang="en-US" sz="1800" dirty="0">
+                <a:latin typeface="Courier New" panose="02070309020205020404" pitchFamily="49" charset="0"/>
+                <a:cs typeface="Courier New" panose="02070309020205020404" pitchFamily="49" charset="0"/>
+              </a:rPr>
+              <a:t>		for(int </a:t>
+            </a:r>
+            <a:r>
+              <a:rPr lang="en-US" sz="1800" dirty="0" err="1">
+                <a:latin typeface="Courier New" panose="02070309020205020404" pitchFamily="49" charset="0"/>
+                <a:cs typeface="Courier New" panose="02070309020205020404" pitchFamily="49" charset="0"/>
+              </a:rPr>
+              <a:t>i</a:t>
+            </a:r>
+            <a:r>
+              <a:rPr lang="en-US" sz="1800" dirty="0">
+                <a:latin typeface="Courier New" panose="02070309020205020404" pitchFamily="49" charset="0"/>
+                <a:cs typeface="Courier New" panose="02070309020205020404" pitchFamily="49" charset="0"/>
+              </a:rPr>
+              <a:t> = 0; </a:t>
+            </a:r>
+            <a:r>
+              <a:rPr lang="en-US" sz="1800" dirty="0" err="1">
+                <a:latin typeface="Courier New" panose="02070309020205020404" pitchFamily="49" charset="0"/>
+                <a:cs typeface="Courier New" panose="02070309020205020404" pitchFamily="49" charset="0"/>
+              </a:rPr>
+              <a:t>i</a:t>
+            </a:r>
+            <a:r>
+              <a:rPr lang="en-US" sz="1800" dirty="0">
+                <a:latin typeface="Courier New" panose="02070309020205020404" pitchFamily="49" charset="0"/>
+                <a:cs typeface="Courier New" panose="02070309020205020404" pitchFamily="49" charset="0"/>
+              </a:rPr>
+              <a:t> &lt; </a:t>
+            </a:r>
+            <a:r>
+              <a:rPr lang="en-US" sz="1800" dirty="0" err="1">
+                <a:latin typeface="Courier New" panose="02070309020205020404" pitchFamily="49" charset="0"/>
+                <a:cs typeface="Courier New" panose="02070309020205020404" pitchFamily="49" charset="0"/>
+              </a:rPr>
+              <a:t>students.length</a:t>
+            </a:r>
+            <a:r>
+              <a:rPr lang="en-US" sz="1800" dirty="0">
+                <a:latin typeface="Courier New" panose="02070309020205020404" pitchFamily="49" charset="0"/>
+                <a:cs typeface="Courier New" panose="02070309020205020404" pitchFamily="49" charset="0"/>
+              </a:rPr>
+              <a:t>; </a:t>
+            </a:r>
+            <a:r>
+              <a:rPr lang="en-US" sz="1800" dirty="0" err="1">
+                <a:latin typeface="Courier New" panose="02070309020205020404" pitchFamily="49" charset="0"/>
+                <a:cs typeface="Courier New" panose="02070309020205020404" pitchFamily="49" charset="0"/>
+              </a:rPr>
+              <a:t>i</a:t>
+            </a:r>
+            <a:r>
+              <a:rPr lang="en-US" sz="1800" dirty="0">
+                <a:latin typeface="Courier New" panose="02070309020205020404" pitchFamily="49" charset="0"/>
+                <a:cs typeface="Courier New" panose="02070309020205020404" pitchFamily="49" charset="0"/>
+              </a:rPr>
+              <a:t>++){</a:t>
+            </a:r>
+          </a:p>
+          <a:p>
+            <a:pPr marL="0" indent="0">
+              <a:buNone/>
+            </a:pPr>
+            <a:r>
+              <a:rPr lang="en-US" sz="1800" dirty="0">
+                <a:latin typeface="Courier New" panose="02070309020205020404" pitchFamily="49" charset="0"/>
+                <a:cs typeface="Courier New" panose="02070309020205020404" pitchFamily="49" charset="0"/>
+              </a:rPr>
+              <a:t>			if(students[</a:t>
+            </a:r>
+            <a:r>
+              <a:rPr lang="en-US" sz="1800" dirty="0" err="1">
+                <a:latin typeface="Courier New" panose="02070309020205020404" pitchFamily="49" charset="0"/>
+                <a:cs typeface="Courier New" panose="02070309020205020404" pitchFamily="49" charset="0"/>
+              </a:rPr>
+              <a:t>i</a:t>
+            </a:r>
+            <a:r>
+              <a:rPr lang="en-US" sz="1800" dirty="0">
+                <a:latin typeface="Courier New" panose="02070309020205020404" pitchFamily="49" charset="0"/>
+                <a:cs typeface="Courier New" panose="02070309020205020404" pitchFamily="49" charset="0"/>
+              </a:rPr>
+              <a:t>][</a:t>
+            </a:r>
+            <a:r>
+              <a:rPr lang="en-US" sz="1800" dirty="0" err="1">
+                <a:latin typeface="Courier New" panose="02070309020205020404" pitchFamily="49" charset="0"/>
+                <a:cs typeface="Courier New" panose="02070309020205020404" pitchFamily="49" charset="0"/>
+              </a:rPr>
+              <a:t>i</a:t>
+            </a:r>
+            <a:r>
+              <a:rPr lang="en-US" sz="1800" dirty="0">
+                <a:latin typeface="Courier New" panose="02070309020205020404" pitchFamily="49" charset="0"/>
+                <a:cs typeface="Courier New" panose="02070309020205020404" pitchFamily="49" charset="0"/>
+              </a:rPr>
+              <a:t>].</a:t>
+            </a:r>
+            <a:r>
+              <a:rPr lang="en-US" sz="1800" dirty="0" err="1">
+                <a:latin typeface="Courier New" panose="02070309020205020404" pitchFamily="49" charset="0"/>
+                <a:cs typeface="Courier New" panose="02070309020205020404" pitchFamily="49" charset="0"/>
+              </a:rPr>
+              <a:t>getGpa</a:t>
+            </a:r>
+            <a:r>
+              <a:rPr lang="en-US" sz="1800" dirty="0">
+                <a:latin typeface="Courier New" panose="02070309020205020404" pitchFamily="49" charset="0"/>
+                <a:cs typeface="Courier New" panose="02070309020205020404" pitchFamily="49" charset="0"/>
+              </a:rPr>
+              <a:t>() &gt; threshold)</a:t>
+            </a:r>
+          </a:p>
+          <a:p>
+            <a:pPr marL="0" indent="0">
+              <a:buNone/>
+            </a:pPr>
+            <a:r>
+              <a:rPr lang="en-US" sz="1800" dirty="0">
+                <a:latin typeface="Courier New" panose="02070309020205020404" pitchFamily="49" charset="0"/>
+                <a:cs typeface="Courier New" panose="02070309020205020404" pitchFamily="49" charset="0"/>
+              </a:rPr>
+              <a:t>				count++;</a:t>
+            </a:r>
+          </a:p>
+          <a:p>
+            <a:pPr marL="0" indent="0">
+              <a:buNone/>
+            </a:pPr>
+            <a:r>
+              <a:rPr lang="en-US" sz="1800" dirty="0">
+                <a:latin typeface="Courier New" panose="02070309020205020404" pitchFamily="49" charset="0"/>
+                <a:cs typeface="Courier New" panose="02070309020205020404" pitchFamily="49" charset="0"/>
+              </a:rPr>
+              <a:t>		}</a:t>
+            </a:r>
+          </a:p>
+          <a:p>
+            <a:pPr marL="0" indent="0">
+              <a:buNone/>
+            </a:pPr>
+            <a:r>
+              <a:rPr lang="en-US" sz="1800" dirty="0">
+                <a:latin typeface="Courier New" panose="02070309020205020404" pitchFamily="49" charset="0"/>
+                <a:cs typeface="Courier New" panose="02070309020205020404" pitchFamily="49" charset="0"/>
+              </a:rPr>
+              <a:t>		return count;</a:t>
+            </a:r>
+          </a:p>
+          <a:p>
+            <a:pPr marL="0" indent="0">
+              <a:buNone/>
+            </a:pPr>
+            <a:r>
+              <a:rPr lang="en-US" sz="1800" dirty="0">
+                <a:latin typeface="Courier New" panose="02070309020205020404" pitchFamily="49" charset="0"/>
+                <a:cs typeface="Courier New" panose="02070309020205020404" pitchFamily="49" charset="0"/>
+              </a:rPr>
+              <a:t>	}</a:t>
+            </a:r>
+          </a:p>
+        </p:txBody>
+      </p:sp>
+    </p:spTree>
+    <p:extLst>
+      <p:ext uri="{BB962C8B-B14F-4D97-AF65-F5344CB8AC3E}">
+        <p14:creationId xmlns:p14="http://schemas.microsoft.com/office/powerpoint/2010/main" val="775703315"/>
+      </p:ext>
+    </p:extLst>
+  </p:cSld>
+  <p:clrMapOvr>
+    <a:masterClrMapping/>
+  </p:clrMapOvr>
+</p:sld>
+</file>
+
+<file path=ppt/slides/slide45.xml><?xml version="1.0" encoding="utf-8"?>
+<p:sld xmlns:a="http://schemas.openxmlformats.org/drawingml/2006/main" xmlns:r="http://schemas.openxmlformats.org/officeDocument/2006/relationships" xmlns:p="http://schemas.openxmlformats.org/presentationml/2006/main">
+  <p:cSld>
+    <p:spTree>
+      <p:nvGrpSpPr>
+        <p:cNvPr id="1" name=""/>
+        <p:cNvGrpSpPr/>
+        <p:nvPr/>
+      </p:nvGrpSpPr>
+      <p:grpSpPr>
+        <a:xfrm>
+          <a:off x="0" y="0"/>
+          <a:ext cx="0" cy="0"/>
+          <a:chOff x="0" y="0"/>
+          <a:chExt cx="0" cy="0"/>
+        </a:xfrm>
+      </p:grpSpPr>
+      <p:sp>
+        <p:nvSpPr>
+          <p:cNvPr id="2" name="Title 1">
+            <a:extLst>
+              <a:ext uri="{FF2B5EF4-FFF2-40B4-BE49-F238E27FC236}">
+                <a16:creationId xmlns:a16="http://schemas.microsoft.com/office/drawing/2014/main" id="{BC6F9511-CB58-AC49-AD98-860912780FFE}"/>
+              </a:ext>
+            </a:extLst>
+          </p:cNvPr>
+          <p:cNvSpPr>
+            <a:spLocks noGrp="1"/>
+          </p:cNvSpPr>
+          <p:nvPr>
+            <p:ph type="title"/>
+          </p:nvPr>
+        </p:nvSpPr>
+        <p:spPr>
+          <a:xfrm>
+            <a:off x="167177" y="128185"/>
+            <a:ext cx="7886700" cy="588511"/>
+          </a:xfrm>
+        </p:spPr>
+        <p:txBody>
+          <a:bodyPr/>
+          <a:lstStyle/>
+          <a:p>
+            <a:r>
+              <a:rPr lang="en-US" dirty="0"/>
               <a:t>Minor Diagonal  Traversal</a:t>
             </a:r>
           </a:p>
@@ -24868,7 +25695,7 @@
 </p:sld>
 </file>
 
-<file path=ppt/slides/slide45.xml><?xml version="1.0" encoding="utf-8"?>
+<file path=ppt/slides/slide46.xml><?xml version="1.0" encoding="utf-8"?>
 <p:sld xmlns:a="http://schemas.openxmlformats.org/drawingml/2006/main" xmlns:r="http://schemas.openxmlformats.org/officeDocument/2006/relationships" xmlns:p="http://schemas.openxmlformats.org/presentationml/2006/main">
   <p:cSld>
     <p:spTree>
@@ -25043,172 +25870,7 @@
           <a:p>
             <a:r>
               <a:rPr lang="en-US" dirty="0"/>
-              <a:t>General Scoring</a:t>
-            </a:r>
-          </a:p>
-        </p:txBody>
-      </p:sp>
-      <p:sp>
-        <p:nvSpPr>
-          <p:cNvPr id="3" name="Content Placeholder 2">
-            <a:extLst>
-              <a:ext uri="{FF2B5EF4-FFF2-40B4-BE49-F238E27FC236}">
-                <a16:creationId xmlns:a16="http://schemas.microsoft.com/office/drawing/2014/main" id="{253D8156-5F46-4246-9D56-D51881AA7D5F}"/>
-              </a:ext>
-            </a:extLst>
-          </p:cNvPr>
-          <p:cNvSpPr>
-            <a:spLocks noGrp="1"/>
-          </p:cNvSpPr>
-          <p:nvPr>
-            <p:ph idx="1"/>
-          </p:nvPr>
-        </p:nvSpPr>
-        <p:spPr>
-          <a:xfrm>
-            <a:off x="176367" y="1052052"/>
-            <a:ext cx="8338984" cy="4095417"/>
-          </a:xfrm>
-        </p:spPr>
-        <p:txBody>
-          <a:bodyPr/>
-          <a:lstStyle/>
-          <a:p>
-            <a:pPr marL="0" indent="0">
-              <a:buNone/>
-            </a:pPr>
-            <a:endParaRPr lang="en-US" dirty="0"/>
-          </a:p>
-          <a:p>
-            <a:pPr marL="0" indent="0">
-              <a:buNone/>
-            </a:pPr>
-            <a:r>
-              <a:rPr lang="en-US" dirty="0"/>
-              <a:t>MCQ Score:  x / 40</a:t>
-            </a:r>
-          </a:p>
-          <a:p>
-            <a:pPr marL="0" indent="0">
-              <a:buNone/>
-            </a:pPr>
-            <a:r>
-              <a:rPr lang="en-US" dirty="0"/>
-              <a:t>FRQ Score:  y / 40</a:t>
-            </a:r>
-          </a:p>
-          <a:p>
-            <a:pPr marL="0" indent="0">
-              <a:buNone/>
-            </a:pPr>
-            <a:r>
-              <a:rPr lang="en-US" dirty="0"/>
-              <a:t>Total Score: (x + y) / 80 </a:t>
-            </a:r>
-          </a:p>
-          <a:p>
-            <a:pPr marL="0" indent="0">
-              <a:buNone/>
-            </a:pPr>
-            <a:endParaRPr lang="en-US" dirty="0"/>
-          </a:p>
-          <a:p>
-            <a:pPr marL="0" indent="0">
-              <a:buNone/>
-            </a:pPr>
-            <a:r>
-              <a:rPr lang="en-US" dirty="0"/>
-              <a:t>AP Score:</a:t>
-            </a:r>
-          </a:p>
-          <a:p>
-            <a:pPr marL="0" indent="0">
-              <a:buNone/>
-            </a:pPr>
-            <a:r>
-              <a:rPr lang="en-US" dirty="0"/>
-              <a:t>5	x + y &gt;= 62 (at least 78%) </a:t>
-            </a:r>
-          </a:p>
-          <a:p>
-            <a:pPr marL="0" indent="0">
-              <a:buNone/>
-            </a:pPr>
-            <a:r>
-              <a:rPr lang="en-US" dirty="0"/>
-              <a:t>4	x + y &gt;= 47 (at least 59%)</a:t>
-            </a:r>
-          </a:p>
-          <a:p>
-            <a:pPr marL="0" indent="0">
-              <a:buNone/>
-            </a:pPr>
-            <a:r>
-              <a:rPr lang="en-US" dirty="0"/>
-              <a:t>3	x + y &gt;= 37 (at least  46%)</a:t>
-            </a:r>
-          </a:p>
-        </p:txBody>
-      </p:sp>
-    </p:spTree>
-    <p:extLst>
-      <p:ext uri="{BB962C8B-B14F-4D97-AF65-F5344CB8AC3E}">
-        <p14:creationId xmlns:p14="http://schemas.microsoft.com/office/powerpoint/2010/main" val="767340180"/>
-      </p:ext>
-    </p:extLst>
-  </p:cSld>
-  <p:clrMapOvr>
-    <a:masterClrMapping/>
-  </p:clrMapOvr>
-</p:sld>
-</file>
-
-<file path=ppt/slides/slide6.xml><?xml version="1.0" encoding="utf-8"?>
-<p:sld xmlns:a="http://schemas.openxmlformats.org/drawingml/2006/main" xmlns:r="http://schemas.openxmlformats.org/officeDocument/2006/relationships" xmlns:p="http://schemas.openxmlformats.org/presentationml/2006/main">
-  <p:cSld>
-    <p:spTree>
-      <p:nvGrpSpPr>
-        <p:cNvPr id="1" name=""/>
-        <p:cNvGrpSpPr/>
-        <p:nvPr/>
-      </p:nvGrpSpPr>
-      <p:grpSpPr>
-        <a:xfrm>
-          <a:off x="0" y="0"/>
-          <a:ext cx="0" cy="0"/>
-          <a:chOff x="0" y="0"/>
-          <a:chExt cx="0" cy="0"/>
-        </a:xfrm>
-      </p:grpSpPr>
-      <p:sp>
-        <p:nvSpPr>
-          <p:cNvPr id="2" name="Title 1">
-            <a:extLst>
-              <a:ext uri="{FF2B5EF4-FFF2-40B4-BE49-F238E27FC236}">
-                <a16:creationId xmlns:a16="http://schemas.microsoft.com/office/drawing/2014/main" id="{336CA5FD-BC21-BE48-85C3-49E7B9CD3613}"/>
-              </a:ext>
-            </a:extLst>
-          </p:cNvPr>
-          <p:cNvSpPr>
-            <a:spLocks noGrp="1"/>
-          </p:cNvSpPr>
-          <p:nvPr>
-            <p:ph type="title"/>
-          </p:nvPr>
-        </p:nvSpPr>
-        <p:spPr>
-          <a:xfrm>
-            <a:off x="176366" y="207206"/>
-            <a:ext cx="7886700" cy="720649"/>
-          </a:xfrm>
-        </p:spPr>
-        <p:txBody>
-          <a:bodyPr/>
-          <a:lstStyle/>
-          <a:p>
-            <a:r>
-              <a:rPr lang="en-US" dirty="0"/>
-              <a:t>Multiple Choice</a:t>
+              <a:t>What's New in the 2025–26 Course</a:t>
             </a:r>
           </a:p>
         </p:txBody>
@@ -25252,7 +25914,7 @@
             </a:pPr>
             <a:r>
               <a:rPr lang="en-US" b="1" dirty="0"/>
-              <a:t>Goal: Everyone should be able to get at least 20 out of 40 questions correct. </a:t>
+              <a:t>The course is now 4 units instead of 10. Four things changed that affect this exam: </a:t>
             </a:r>
           </a:p>
           <a:p>
@@ -25267,7 +25929,7 @@
             </a:pPr>
             <a:r>
               <a:rPr lang="en-US" dirty="0"/>
-              <a:t>During the first pass through the exam, only spend time on “easy” problems: problems are short and succinct and you know you can get right if you are careful. </a:t>
+              <a:t>GONE: inheritance and polymorphism. No extends, super, method overriding, or the Object class. Overriding toString is also out of scope. </a:t>
             </a:r>
             <a:r>
               <a:rPr lang="en-US" dirty="0">
@@ -25275,11 +25937,11 @@
                   <a:srgbClr val="FF0000"/>
                 </a:solidFill>
               </a:rPr>
-              <a:t>SKIP</a:t>
+              <a:t/>
             </a:r>
             <a:r>
               <a:rPr lang="en-US" dirty="0"/>
-              <a:t> hard or wordy questions that ask about sorting algorithms(merge, selection, insertion) or binary search. </a:t>
+              <a:t/>
             </a:r>
           </a:p>
           <a:p>
@@ -25294,7 +25956,7 @@
             </a:pPr>
             <a:r>
               <a:rPr lang="en-US" dirty="0"/>
-              <a:t>During the second pass, spend time on the “medium” questions; questions that you are confident that you can get right but might need a bit more time. </a:t>
+              <a:t>NEW: reading text files. Know File, Scanner(File f), hasNext(), close() and String.split(). Reading only — there is no file writing on the exam. </a:t>
             </a:r>
           </a:p>
           <a:p>
@@ -25309,7 +25971,7 @@
             </a:pPr>
             <a:r>
               <a:rPr lang="en-US" dirty="0"/>
-              <a:t>Note: For some, strategically it might make sense to </a:t>
+              <a:t>NEW: data sets and the ethics of collecting them — privacy risk, data quality, and choosing an appropriate data set for a problem. </a:t>
             </a:r>
             <a:r>
               <a:rPr lang="en-US" dirty="0">
@@ -25317,7 +25979,7 @@
                   <a:srgbClr val="FF0000"/>
                 </a:solidFill>
               </a:rPr>
-              <a:t>entirely skip 4-8 of the hardest MC questions and instead spend more time on the other questions. Guess the answers to these skipped questions at the end. </a:t>
+              <a:t>Also watch out: the wrapper constructors new Integer(5) and intValue() are off the reference sheet. Use Integer.parseInt and Integer.MIN_VALUE / MAX_VALUE instead.</a:t>
             </a:r>
           </a:p>
         </p:txBody>
@@ -25512,7 +26174,521 @@
 </p:sld>
 </file>
 
+<file path=ppt/slides/slide6.xml><?xml version="1.0" encoding="utf-8"?>
+<p:sld xmlns:a="http://schemas.openxmlformats.org/drawingml/2006/main" xmlns:r="http://schemas.openxmlformats.org/officeDocument/2006/relationships" xmlns:p="http://schemas.openxmlformats.org/presentationml/2006/main">
+  <p:cSld>
+    <p:spTree>
+      <p:nvGrpSpPr>
+        <p:cNvPr id="1" name=""/>
+        <p:cNvGrpSpPr/>
+        <p:nvPr/>
+      </p:nvGrpSpPr>
+      <p:grpSpPr>
+        <a:xfrm>
+          <a:off x="0" y="0"/>
+          <a:ext cx="0" cy="0"/>
+          <a:chOff x="0" y="0"/>
+          <a:chExt cx="0" cy="0"/>
+        </a:xfrm>
+      </p:grpSpPr>
+      <p:sp>
+        <p:nvSpPr>
+          <p:cNvPr id="2" name="Title 1">
+            <a:extLst>
+              <a:ext uri="{FF2B5EF4-FFF2-40B4-BE49-F238E27FC236}">
+                <a16:creationId xmlns:a16="http://schemas.microsoft.com/office/drawing/2014/main" id="{336CA5FD-BC21-BE48-85C3-49E7B9CD3613}"/>
+              </a:ext>
+            </a:extLst>
+          </p:cNvPr>
+          <p:cNvSpPr>
+            <a:spLocks noGrp="1"/>
+          </p:cNvSpPr>
+          <p:nvPr>
+            <p:ph type="title"/>
+          </p:nvPr>
+        </p:nvSpPr>
+        <p:spPr>
+          <a:xfrm>
+            <a:off x="176366" y="207206"/>
+            <a:ext cx="7886700" cy="720649"/>
+          </a:xfrm>
+        </p:spPr>
+        <p:txBody>
+          <a:bodyPr/>
+          <a:lstStyle/>
+          <a:p>
+            <a:r>
+              <a:rPr lang="en-US" dirty="0"/>
+              <a:t>General Scoring</a:t>
+            </a:r>
+          </a:p>
+        </p:txBody>
+      </p:sp>
+      <p:sp>
+        <p:nvSpPr>
+          <p:cNvPr id="3" name="Content Placeholder 2">
+            <a:extLst>
+              <a:ext uri="{FF2B5EF4-FFF2-40B4-BE49-F238E27FC236}">
+                <a16:creationId xmlns:a16="http://schemas.microsoft.com/office/drawing/2014/main" id="{253D8156-5F46-4246-9D56-D51881AA7D5F}"/>
+              </a:ext>
+            </a:extLst>
+          </p:cNvPr>
+          <p:cNvSpPr>
+            <a:spLocks noGrp="1"/>
+          </p:cNvSpPr>
+          <p:nvPr>
+            <p:ph idx="1"/>
+          </p:nvPr>
+        </p:nvSpPr>
+        <p:spPr>
+          <a:xfrm>
+            <a:off x="176367" y="1052052"/>
+            <a:ext cx="8338984" cy="4095417"/>
+          </a:xfrm>
+        </p:spPr>
+        <p:txBody>
+          <a:bodyPr/>
+          <a:lstStyle/>
+          <a:p>
+            <a:pPr marL="0" indent="0">
+              <a:buNone/>
+            </a:pPr>
+            <a:endParaRPr lang="en-US" dirty="0"/>
+          </a:p>
+          <a:p>
+            <a:pPr marL="0" indent="0">
+              <a:buNone/>
+            </a:pPr>
+            <a:r>
+              <a:rPr lang="en-US" dirty="0"/>
+              <a:t>MCQ Score:  x / 42   (55% of exam score)</a:t>
+            </a:r>
+          </a:p>
+          <a:p>
+            <a:pPr marL="0" indent="0">
+              <a:buNone/>
+            </a:pPr>
+            <a:r>
+              <a:rPr lang="en-US" dirty="0"/>
+              <a:t>FRQ Score:  y / 25   (45% of exam score)</a:t>
+            </a:r>
+          </a:p>
+          <a:p>
+            <a:pPr marL="0" indent="0">
+              <a:buNone/>
+            </a:pPr>
+            <a:r>
+              <a:rPr lang="en-US" dirty="0"/>
+              <a:t>Composite:  0.55(x / 42)  +  0.45(y / 25) </a:t>
+            </a:r>
+          </a:p>
+          <a:p>
+            <a:pPr marL="0" indent="0">
+              <a:buNone/>
+            </a:pPr>
+            <a:endParaRPr lang="en-US" dirty="0"/>
+          </a:p>
+          <a:p>
+            <a:pPr marL="0" indent="0">
+              <a:buNone/>
+            </a:pPr>
+            <a:r>
+              <a:rPr lang="en-US" dirty="0"/>
+              <a:t>AP Score (approximate — based on past curves):</a:t>
+            </a:r>
+          </a:p>
+          <a:p>
+            <a:pPr marL="0" indent="0">
+              <a:buNone/>
+            </a:pPr>
+            <a:r>
+              <a:rPr lang="en-US" dirty="0"/>
+              <a:t>5	composite &gt;= 78% </a:t>
+            </a:r>
+          </a:p>
+          <a:p>
+            <a:pPr marL="0" indent="0">
+              <a:buNone/>
+            </a:pPr>
+            <a:r>
+              <a:rPr lang="en-US" dirty="0"/>
+              <a:t>4	composite &gt;= 59%</a:t>
+            </a:r>
+          </a:p>
+          <a:p>
+            <a:pPr marL="0" indent="0">
+              <a:buNone/>
+            </a:pPr>
+            <a:r>
+              <a:rPr lang="en-US" dirty="0"/>
+              <a:t>3	composite &gt;= 46%</a:t>
+            </a:r>
+          </a:p>
+        </p:txBody>
+      </p:sp>
+    </p:spTree>
+    <p:extLst>
+      <p:ext uri="{BB962C8B-B14F-4D97-AF65-F5344CB8AC3E}">
+        <p14:creationId xmlns:p14="http://schemas.microsoft.com/office/powerpoint/2010/main" val="767340180"/>
+      </p:ext>
+    </p:extLst>
+  </p:cSld>
+  <p:clrMapOvr>
+    <a:masterClrMapping/>
+  </p:clrMapOvr>
+</p:sld>
+</file>
+
 <file path=ppt/slides/slide7.xml><?xml version="1.0" encoding="utf-8"?>
+<p:sld xmlns:a="http://schemas.openxmlformats.org/drawingml/2006/main" xmlns:r="http://schemas.openxmlformats.org/officeDocument/2006/relationships" xmlns:p="http://schemas.openxmlformats.org/presentationml/2006/main">
+  <p:cSld>
+    <p:spTree>
+      <p:nvGrpSpPr>
+        <p:cNvPr id="1" name=""/>
+        <p:cNvGrpSpPr/>
+        <p:nvPr/>
+      </p:nvGrpSpPr>
+      <p:grpSpPr>
+        <a:xfrm>
+          <a:off x="0" y="0"/>
+          <a:ext cx="0" cy="0"/>
+          <a:chOff x="0" y="0"/>
+          <a:chExt cx="0" cy="0"/>
+        </a:xfrm>
+      </p:grpSpPr>
+      <p:sp>
+        <p:nvSpPr>
+          <p:cNvPr id="2" name="Title 1">
+            <a:extLst>
+              <a:ext uri="{FF2B5EF4-FFF2-40B4-BE49-F238E27FC236}">
+                <a16:creationId xmlns:a16="http://schemas.microsoft.com/office/drawing/2014/main" id="{336CA5FD-BC21-BE48-85C3-49E7B9CD3613}"/>
+              </a:ext>
+            </a:extLst>
+          </p:cNvPr>
+          <p:cNvSpPr>
+            <a:spLocks noGrp="1"/>
+          </p:cNvSpPr>
+          <p:nvPr>
+            <p:ph type="title"/>
+          </p:nvPr>
+        </p:nvSpPr>
+        <p:spPr>
+          <a:xfrm>
+            <a:off x="176366" y="207206"/>
+            <a:ext cx="7886700" cy="720649"/>
+          </a:xfrm>
+        </p:spPr>
+        <p:txBody>
+          <a:bodyPr/>
+          <a:lstStyle/>
+          <a:p>
+            <a:r>
+              <a:rPr lang="en-US" dirty="0"/>
+              <a:t>Multiple Choice</a:t>
+            </a:r>
+          </a:p>
+        </p:txBody>
+      </p:sp>
+      <p:sp>
+        <p:nvSpPr>
+          <p:cNvPr id="3" name="Content Placeholder 2">
+            <a:extLst>
+              <a:ext uri="{FF2B5EF4-FFF2-40B4-BE49-F238E27FC236}">
+                <a16:creationId xmlns:a16="http://schemas.microsoft.com/office/drawing/2014/main" id="{253D8156-5F46-4246-9D56-D51881AA7D5F}"/>
+              </a:ext>
+            </a:extLst>
+          </p:cNvPr>
+          <p:cNvSpPr>
+            <a:spLocks noGrp="1"/>
+          </p:cNvSpPr>
+          <p:nvPr>
+            <p:ph idx="1"/>
+          </p:nvPr>
+        </p:nvSpPr>
+        <p:spPr>
+          <a:xfrm>
+            <a:off x="161925" y="825909"/>
+            <a:ext cx="8805709" cy="4758813"/>
+          </a:xfrm>
+        </p:spPr>
+        <p:txBody>
+          <a:bodyPr>
+            <a:normAutofit lnSpcReduction="10000"/>
+          </a:bodyPr>
+          <a:lstStyle/>
+          <a:p>
+            <a:pPr marL="0" indent="0">
+              <a:buNone/>
+            </a:pPr>
+            <a:endParaRPr lang="en-US" dirty="0"/>
+          </a:p>
+          <a:p>
+            <a:pPr marL="0" indent="0">
+              <a:buNone/>
+            </a:pPr>
+            <a:r>
+              <a:rPr lang="en-US" b="1" dirty="0"/>
+              <a:t>Goal: Everyone should be able to get at least 21 out of 42 questions correct. </a:t>
+            </a:r>
+          </a:p>
+          <a:p>
+            <a:pPr marL="0" indent="0">
+              <a:buNone/>
+            </a:pPr>
+            <a:endParaRPr lang="en-US" dirty="0"/>
+          </a:p>
+          <a:p>
+            <a:pPr marL="0" indent="0">
+              <a:buNone/>
+            </a:pPr>
+            <a:r>
+              <a:rPr lang="en-US" dirty="0"/>
+              <a:t>During the first pass through the exam, only spend time on “easy” problems: problems are short and succinct and you know you can get right if you are careful. </a:t>
+            </a:r>
+            <a:r>
+              <a:rPr lang="en-US" dirty="0">
+                <a:solidFill>
+                  <a:srgbClr val="FF0000"/>
+                </a:solidFill>
+              </a:rPr>
+              <a:t>SKIP</a:t>
+            </a:r>
+            <a:r>
+              <a:rPr lang="en-US" dirty="0"/>
+              <a:t> hard or wordy questions that ask about sorting algorithms(merge, selection, insertion) or binary search. </a:t>
+            </a:r>
+          </a:p>
+          <a:p>
+            <a:pPr marL="0" indent="0">
+              <a:buNone/>
+            </a:pPr>
+            <a:endParaRPr lang="en-US" dirty="0"/>
+          </a:p>
+          <a:p>
+            <a:pPr marL="0" indent="0">
+              <a:buNone/>
+            </a:pPr>
+            <a:r>
+              <a:rPr lang="en-US" dirty="0"/>
+              <a:t>During the second pass, spend time on the “medium” questions; questions that you are confident that you can get right but might need a bit more time. </a:t>
+            </a:r>
+          </a:p>
+          <a:p>
+            <a:pPr marL="0" indent="0">
+              <a:buNone/>
+            </a:pPr>
+            <a:endParaRPr lang="en-US" dirty="0"/>
+          </a:p>
+          <a:p>
+            <a:pPr marL="0" indent="0">
+              <a:buNone/>
+            </a:pPr>
+            <a:r>
+              <a:rPr lang="en-US" dirty="0"/>
+              <a:t>Note: For some, strategically it might make sense to </a:t>
+            </a:r>
+            <a:r>
+              <a:rPr lang="en-US" dirty="0">
+                <a:solidFill>
+                  <a:srgbClr val="FF0000"/>
+                </a:solidFill>
+              </a:rPr>
+              <a:t>entirely skip 4-8 of the hardest MC questions and instead spend more time on the other questions. Guess the answers to these skipped questions at the end. Each question now has 4 answer choices (down from 5), so a blind guess is 1 in 4. </a:t>
+            </a:r>
+          </a:p>
+        </p:txBody>
+      </p:sp>
+    </p:spTree>
+    <p:extLst>
+      <p:ext uri="{BB962C8B-B14F-4D97-AF65-F5344CB8AC3E}">
+        <p14:creationId xmlns:p14="http://schemas.microsoft.com/office/powerpoint/2010/main" val="3937576981"/>
+      </p:ext>
+    </p:extLst>
+  </p:cSld>
+  <p:clrMapOvr>
+    <a:masterClrMapping/>
+  </p:clrMapOvr>
+  <p:timing>
+    <p:tnLst>
+      <p:par>
+        <p:cTn id="1" dur="indefinite" restart="never" nodeType="tmRoot">
+          <p:childTnLst>
+            <p:seq concurrent="1" nextAc="seek">
+              <p:cTn id="2" dur="indefinite" nodeType="mainSeq">
+                <p:childTnLst>
+                  <p:par>
+                    <p:cTn id="3" fill="hold">
+                      <p:stCondLst>
+                        <p:cond delay="indefinite"/>
+                      </p:stCondLst>
+                      <p:childTnLst>
+                        <p:par>
+                          <p:cTn id="4" fill="hold">
+                            <p:stCondLst>
+                              <p:cond delay="0"/>
+                            </p:stCondLst>
+                            <p:childTnLst>
+                              <p:par>
+                                <p:cTn id="5" presetID="1" presetClass="entr" presetSubtype="0" fill="hold" nodeType="clickEffect">
+                                  <p:stCondLst>
+                                    <p:cond delay="0"/>
+                                  </p:stCondLst>
+                                  <p:childTnLst>
+                                    <p:set>
+                                      <p:cBhvr>
+                                        <p:cTn id="6" dur="1" fill="hold">
+                                          <p:stCondLst>
+                                            <p:cond delay="0"/>
+                                          </p:stCondLst>
+                                        </p:cTn>
+                                        <p:tgtEl>
+                                          <p:spTgt spid="3">
+                                            <p:txEl>
+                                              <p:pRg st="3" end="3"/>
+                                            </p:txEl>
+                                          </p:spTgt>
+                                        </p:tgtEl>
+                                        <p:attrNameLst>
+                                          <p:attrName>style.visibility</p:attrName>
+                                        </p:attrNameLst>
+                                      </p:cBhvr>
+                                      <p:to>
+                                        <p:strVal val="visible"/>
+                                      </p:to>
+                                    </p:set>
+                                  </p:childTnLst>
+                                </p:cTn>
+                              </p:par>
+                            </p:childTnLst>
+                          </p:cTn>
+                        </p:par>
+                      </p:childTnLst>
+                    </p:cTn>
+                  </p:par>
+                  <p:par>
+                    <p:cTn id="7" fill="hold">
+                      <p:stCondLst>
+                        <p:cond delay="indefinite"/>
+                      </p:stCondLst>
+                      <p:childTnLst>
+                        <p:par>
+                          <p:cTn id="8" fill="hold">
+                            <p:stCondLst>
+                              <p:cond delay="0"/>
+                            </p:stCondLst>
+                            <p:childTnLst>
+                              <p:par>
+                                <p:cTn id="9" presetID="1" presetClass="entr" presetSubtype="0" fill="hold" nodeType="clickEffect">
+                                  <p:stCondLst>
+                                    <p:cond delay="0"/>
+                                  </p:stCondLst>
+                                  <p:childTnLst>
+                                    <p:set>
+                                      <p:cBhvr>
+                                        <p:cTn id="10" dur="1" fill="hold">
+                                          <p:stCondLst>
+                                            <p:cond delay="0"/>
+                                          </p:stCondLst>
+                                        </p:cTn>
+                                        <p:tgtEl>
+                                          <p:spTgt spid="3">
+                                            <p:txEl>
+                                              <p:pRg st="5" end="5"/>
+                                            </p:txEl>
+                                          </p:spTgt>
+                                        </p:tgtEl>
+                                        <p:attrNameLst>
+                                          <p:attrName>style.visibility</p:attrName>
+                                        </p:attrNameLst>
+                                      </p:cBhvr>
+                                      <p:to>
+                                        <p:strVal val="visible"/>
+                                      </p:to>
+                                    </p:set>
+                                  </p:childTnLst>
+                                </p:cTn>
+                              </p:par>
+                            </p:childTnLst>
+                          </p:cTn>
+                        </p:par>
+                      </p:childTnLst>
+                    </p:cTn>
+                  </p:par>
+                  <p:par>
+                    <p:cTn id="11" fill="hold">
+                      <p:stCondLst>
+                        <p:cond delay="indefinite"/>
+                      </p:stCondLst>
+                      <p:childTnLst>
+                        <p:par>
+                          <p:cTn id="12" fill="hold">
+                            <p:stCondLst>
+                              <p:cond delay="0"/>
+                            </p:stCondLst>
+                            <p:childTnLst>
+                              <p:par>
+                                <p:cTn id="13" presetID="1" presetClass="entr" presetSubtype="0" fill="hold" nodeType="clickEffect">
+                                  <p:stCondLst>
+                                    <p:cond delay="0"/>
+                                  </p:stCondLst>
+                                  <p:childTnLst>
+                                    <p:set>
+                                      <p:cBhvr>
+                                        <p:cTn id="14" dur="1" fill="hold">
+                                          <p:stCondLst>
+                                            <p:cond delay="0"/>
+                                          </p:stCondLst>
+                                        </p:cTn>
+                                        <p:tgtEl>
+                                          <p:spTgt spid="3">
+                                            <p:txEl>
+                                              <p:pRg st="7" end="7"/>
+                                            </p:txEl>
+                                          </p:spTgt>
+                                        </p:tgtEl>
+                                        <p:attrNameLst>
+                                          <p:attrName>style.visibility</p:attrName>
+                                        </p:attrNameLst>
+                                      </p:cBhvr>
+                                      <p:to>
+                                        <p:strVal val="visible"/>
+                                      </p:to>
+                                    </p:set>
+                                  </p:childTnLst>
+                                </p:cTn>
+                              </p:par>
+                            </p:childTnLst>
+                          </p:cTn>
+                        </p:par>
+                      </p:childTnLst>
+                    </p:cTn>
+                  </p:par>
+                </p:childTnLst>
+              </p:cTn>
+              <p:prevCondLst>
+                <p:cond evt="onPrev" delay="0">
+                  <p:tgtEl>
+                    <p:sldTgt/>
+                  </p:tgtEl>
+                </p:cond>
+              </p:prevCondLst>
+              <p:nextCondLst>
+                <p:cond evt="onNext" delay="0">
+                  <p:tgtEl>
+                    <p:sldTgt/>
+                  </p:tgtEl>
+                </p:cond>
+              </p:nextCondLst>
+            </p:seq>
+          </p:childTnLst>
+        </p:cTn>
+      </p:par>
+    </p:tnLst>
+  </p:timing>
+</p:sld>
+</file>
+
+<file path=ppt/slides/slide8.xml><?xml version="1.0" encoding="utf-8"?>
 <p:sld xmlns:a="http://schemas.openxmlformats.org/drawingml/2006/main" xmlns:r="http://schemas.openxmlformats.org/officeDocument/2006/relationships" xmlns:p="http://schemas.openxmlformats.org/presentationml/2006/main">
   <p:cSld>
     <p:spTree>
@@ -26172,7 +27348,7 @@
 </p:sld>
 </file>
 
-<file path=ppt/slides/slide8.xml><?xml version="1.0" encoding="utf-8"?>
+<file path=ppt/slides/slide9.xml><?xml version="1.0" encoding="utf-8"?>
 <p:sld xmlns:a="http://schemas.openxmlformats.org/drawingml/2006/main" xmlns:r="http://schemas.openxmlformats.org/officeDocument/2006/relationships" xmlns:p="http://schemas.openxmlformats.org/presentationml/2006/main">
   <p:cSld>
     <p:spTree>
@@ -26393,615 +27569,6 @@
                                           <p:spTgt spid="3">
                                             <p:txEl>
                                               <p:pRg st="3" end="3"/>
-                                            </p:txEl>
-                                          </p:spTgt>
-                                        </p:tgtEl>
-                                        <p:attrNameLst>
-                                          <p:attrName>style.visibility</p:attrName>
-                                        </p:attrNameLst>
-                                      </p:cBhvr>
-                                      <p:to>
-                                        <p:strVal val="visible"/>
-                                      </p:to>
-                                    </p:set>
-                                  </p:childTnLst>
-                                </p:cTn>
-                              </p:par>
-                            </p:childTnLst>
-                          </p:cTn>
-                        </p:par>
-                      </p:childTnLst>
-                    </p:cTn>
-                  </p:par>
-                </p:childTnLst>
-              </p:cTn>
-              <p:prevCondLst>
-                <p:cond evt="onPrev" delay="0">
-                  <p:tgtEl>
-                    <p:sldTgt/>
-                  </p:tgtEl>
-                </p:cond>
-              </p:prevCondLst>
-              <p:nextCondLst>
-                <p:cond evt="onNext" delay="0">
-                  <p:tgtEl>
-                    <p:sldTgt/>
-                  </p:tgtEl>
-                </p:cond>
-              </p:nextCondLst>
-            </p:seq>
-          </p:childTnLst>
-        </p:cTn>
-      </p:par>
-    </p:tnLst>
-  </p:timing>
-</p:sld>
-</file>
-
-<file path=ppt/slides/slide9.xml><?xml version="1.0" encoding="utf-8"?>
-<p:sld xmlns:a="http://schemas.openxmlformats.org/drawingml/2006/main" xmlns:r="http://schemas.openxmlformats.org/officeDocument/2006/relationships" xmlns:p="http://schemas.openxmlformats.org/presentationml/2006/main">
-  <p:cSld>
-    <p:spTree>
-      <p:nvGrpSpPr>
-        <p:cNvPr id="1" name=""/>
-        <p:cNvGrpSpPr/>
-        <p:nvPr/>
-      </p:nvGrpSpPr>
-      <p:grpSpPr>
-        <a:xfrm>
-          <a:off x="0" y="0"/>
-          <a:ext cx="0" cy="0"/>
-          <a:chOff x="0" y="0"/>
-          <a:chExt cx="0" cy="0"/>
-        </a:xfrm>
-      </p:grpSpPr>
-      <p:sp>
-        <p:nvSpPr>
-          <p:cNvPr id="2" name="Title 1">
-            <a:extLst>
-              <a:ext uri="{FF2B5EF4-FFF2-40B4-BE49-F238E27FC236}">
-                <a16:creationId xmlns:a16="http://schemas.microsoft.com/office/drawing/2014/main" id="{8AF91A8F-AAF8-3144-AEDE-0172CA6382EB}"/>
-              </a:ext>
-            </a:extLst>
-          </p:cNvPr>
-          <p:cNvSpPr>
-            <a:spLocks noGrp="1"/>
-          </p:cNvSpPr>
-          <p:nvPr>
-            <p:ph type="title"/>
-          </p:nvPr>
-        </p:nvSpPr>
-        <p:spPr>
-          <a:xfrm>
-            <a:off x="94004" y="133611"/>
-            <a:ext cx="7891506" cy="616283"/>
-          </a:xfrm>
-        </p:spPr>
-        <p:txBody>
-          <a:bodyPr/>
-          <a:lstStyle/>
-          <a:p>
-            <a:r>
-              <a:rPr lang="en-US" dirty="0"/>
-              <a:t>Free Response </a:t>
-            </a:r>
-          </a:p>
-        </p:txBody>
-      </p:sp>
-      <p:sp>
-        <p:nvSpPr>
-          <p:cNvPr id="3" name="Content Placeholder 2">
-            <a:extLst>
-              <a:ext uri="{FF2B5EF4-FFF2-40B4-BE49-F238E27FC236}">
-                <a16:creationId xmlns:a16="http://schemas.microsoft.com/office/drawing/2014/main" id="{03423960-73AA-8F4D-8DA1-9E54D69D5DA3}"/>
-              </a:ext>
-            </a:extLst>
-          </p:cNvPr>
-          <p:cNvSpPr>
-            <a:spLocks noGrp="1"/>
-          </p:cNvSpPr>
-          <p:nvPr>
-            <p:ph idx="1"/>
-          </p:nvPr>
-        </p:nvSpPr>
-        <p:spPr>
-          <a:xfrm>
-            <a:off x="170916" y="769121"/>
-            <a:ext cx="8716710" cy="4666003"/>
-          </a:xfrm>
-        </p:spPr>
-        <p:txBody>
-          <a:bodyPr>
-            <a:normAutofit fontScale="92500" lnSpcReduction="10000"/>
-          </a:bodyPr>
-          <a:lstStyle/>
-          <a:p>
-            <a:pPr marL="0" indent="0">
-              <a:buNone/>
-            </a:pPr>
-            <a:r>
-              <a:rPr lang="en-US" dirty="0"/>
-              <a:t>General Strategies for FRQS:</a:t>
-            </a:r>
-          </a:p>
-          <a:p>
-            <a:pPr marL="0" indent="0" fontAlgn="base">
-              <a:buNone/>
-            </a:pPr>
-            <a:r>
-              <a:rPr lang="en-US" sz="2000" dirty="0"/>
-              <a:t>8) Write down some code for every question! </a:t>
-            </a:r>
-            <a:r>
-              <a:rPr lang="en-US" sz="2000" dirty="0">
-                <a:solidFill>
-                  <a:srgbClr val="FF0000"/>
-                </a:solidFill>
-              </a:rPr>
-              <a:t>Leave Nothing Blank! Get partial credit if not full credit!</a:t>
-            </a:r>
-          </a:p>
-          <a:p>
-            <a:pPr lvl="1" fontAlgn="base"/>
-            <a:r>
-              <a:rPr lang="en-US" dirty="0"/>
-              <a:t>does it need a loop?</a:t>
-            </a:r>
-          </a:p>
-          <a:p>
-            <a:pPr lvl="1" fontAlgn="base"/>
-            <a:r>
-              <a:rPr lang="en-US" dirty="0"/>
-              <a:t>an if statement?</a:t>
-            </a:r>
-          </a:p>
-          <a:p>
-            <a:pPr lvl="1" fontAlgn="base"/>
-            <a:r>
-              <a:rPr lang="en-US" dirty="0"/>
-              <a:t>return statement or assignment statement?</a:t>
-            </a:r>
-          </a:p>
-          <a:p>
-            <a:pPr marL="0" indent="0">
-              <a:buNone/>
-            </a:pPr>
-            <a:endParaRPr lang="en-US" dirty="0"/>
-          </a:p>
-          <a:p>
-            <a:pPr marL="0" indent="0">
-              <a:buNone/>
-            </a:pPr>
-            <a:r>
-              <a:rPr lang="en-US" dirty="0"/>
-              <a:t>Example 1:</a:t>
-            </a:r>
-          </a:p>
-          <a:p>
-            <a:pPr marL="0" indent="0">
-              <a:buNone/>
-            </a:pPr>
-            <a:r>
-              <a:rPr lang="en-US" dirty="0">
-                <a:latin typeface="Courier New" panose="02070309020205020404" pitchFamily="49" charset="0"/>
-                <a:cs typeface="Courier New" panose="02070309020205020404" pitchFamily="49" charset="0"/>
-              </a:rPr>
-              <a:t>public </a:t>
-            </a:r>
-            <a:r>
-              <a:rPr lang="en-US" dirty="0">
-                <a:solidFill>
-                  <a:srgbClr val="FF0000"/>
-                </a:solidFill>
-                <a:latin typeface="Courier New" panose="02070309020205020404" pitchFamily="49" charset="0"/>
-                <a:cs typeface="Courier New" panose="02070309020205020404" pitchFamily="49" charset="0"/>
-              </a:rPr>
-              <a:t>double</a:t>
-            </a:r>
-            <a:r>
-              <a:rPr lang="en-US" dirty="0">
-                <a:latin typeface="Courier New" panose="02070309020205020404" pitchFamily="49" charset="0"/>
-                <a:cs typeface="Courier New" panose="02070309020205020404" pitchFamily="49" charset="0"/>
-              </a:rPr>
-              <a:t> </a:t>
-            </a:r>
-            <a:r>
-              <a:rPr lang="en-US" dirty="0" err="1">
-                <a:latin typeface="Courier New" panose="02070309020205020404" pitchFamily="49" charset="0"/>
-                <a:cs typeface="Courier New" panose="02070309020205020404" pitchFamily="49" charset="0"/>
-              </a:rPr>
-              <a:t>funMethod</a:t>
-            </a:r>
-            <a:r>
-              <a:rPr lang="en-US" dirty="0">
-                <a:latin typeface="Courier New" panose="02070309020205020404" pitchFamily="49" charset="0"/>
-                <a:cs typeface="Courier New" panose="02070309020205020404" pitchFamily="49" charset="0"/>
-              </a:rPr>
-              <a:t>(){</a:t>
-            </a:r>
-          </a:p>
-          <a:p>
-            <a:pPr marL="0" indent="0">
-              <a:buNone/>
-            </a:pPr>
-            <a:r>
-              <a:rPr lang="en-US" dirty="0">
-                <a:latin typeface="Courier New" panose="02070309020205020404" pitchFamily="49" charset="0"/>
-                <a:cs typeface="Courier New" panose="02070309020205020404" pitchFamily="49" charset="0"/>
-              </a:rPr>
-              <a:t>	double result;</a:t>
-            </a:r>
-          </a:p>
-          <a:p>
-            <a:pPr marL="0" indent="0">
-              <a:buNone/>
-            </a:pPr>
-            <a:r>
-              <a:rPr lang="en-US" dirty="0">
-                <a:latin typeface="Courier New" panose="02070309020205020404" pitchFamily="49" charset="0"/>
-                <a:cs typeface="Courier New" panose="02070309020205020404" pitchFamily="49" charset="0"/>
-              </a:rPr>
-              <a:t>	…</a:t>
-            </a:r>
-          </a:p>
-          <a:p>
-            <a:pPr marL="0" indent="0">
-              <a:buNone/>
-            </a:pPr>
-            <a:r>
-              <a:rPr lang="en-US" dirty="0">
-                <a:latin typeface="Courier New" panose="02070309020205020404" pitchFamily="49" charset="0"/>
-                <a:cs typeface="Courier New" panose="02070309020205020404" pitchFamily="49" charset="0"/>
-              </a:rPr>
-              <a:t>	</a:t>
-            </a:r>
-            <a:r>
-              <a:rPr lang="en-US" dirty="0">
-                <a:solidFill>
-                  <a:srgbClr val="FF0000"/>
-                </a:solidFill>
-                <a:latin typeface="Courier New" panose="02070309020205020404" pitchFamily="49" charset="0"/>
-                <a:cs typeface="Courier New" panose="02070309020205020404" pitchFamily="49" charset="0"/>
-              </a:rPr>
-              <a:t>return result;</a:t>
-            </a:r>
-          </a:p>
-          <a:p>
-            <a:pPr marL="0" indent="0">
-              <a:buNone/>
-            </a:pPr>
-            <a:r>
-              <a:rPr lang="en-US" dirty="0">
-                <a:latin typeface="Courier New" panose="02070309020205020404" pitchFamily="49" charset="0"/>
-                <a:cs typeface="Courier New" panose="02070309020205020404" pitchFamily="49" charset="0"/>
-              </a:rPr>
-              <a:t>}</a:t>
-            </a:r>
-          </a:p>
-          <a:p>
-            <a:pPr marL="0" indent="0">
-              <a:buNone/>
-            </a:pPr>
-            <a:br>
-              <a:rPr lang="en-US" dirty="0"/>
-            </a:br>
-            <a:endParaRPr lang="en-US" dirty="0"/>
-          </a:p>
-        </p:txBody>
-      </p:sp>
-    </p:spTree>
-    <p:extLst>
-      <p:ext uri="{BB962C8B-B14F-4D97-AF65-F5344CB8AC3E}">
-        <p14:creationId xmlns:p14="http://schemas.microsoft.com/office/powerpoint/2010/main" val="3582612531"/>
-      </p:ext>
-    </p:extLst>
-  </p:cSld>
-  <p:clrMapOvr>
-    <a:masterClrMapping/>
-  </p:clrMapOvr>
-  <p:timing>
-    <p:tnLst>
-      <p:par>
-        <p:cTn id="1" dur="indefinite" restart="never" nodeType="tmRoot">
-          <p:childTnLst>
-            <p:seq concurrent="1" nextAc="seek">
-              <p:cTn id="2" dur="indefinite" nodeType="mainSeq">
-                <p:childTnLst>
-                  <p:par>
-                    <p:cTn id="3" fill="hold">
-                      <p:stCondLst>
-                        <p:cond delay="indefinite"/>
-                      </p:stCondLst>
-                      <p:childTnLst>
-                        <p:par>
-                          <p:cTn id="4" fill="hold">
-                            <p:stCondLst>
-                              <p:cond delay="0"/>
-                            </p:stCondLst>
-                            <p:childTnLst>
-                              <p:par>
-                                <p:cTn id="5" presetID="1" presetClass="entr" presetSubtype="0" fill="hold" nodeType="clickEffect">
-                                  <p:stCondLst>
-                                    <p:cond delay="0"/>
-                                  </p:stCondLst>
-                                  <p:childTnLst>
-                                    <p:set>
-                                      <p:cBhvr>
-                                        <p:cTn id="6" dur="1" fill="hold">
-                                          <p:stCondLst>
-                                            <p:cond delay="0"/>
-                                          </p:stCondLst>
-                                        </p:cTn>
-                                        <p:tgtEl>
-                                          <p:spTgt spid="3">
-                                            <p:txEl>
-                                              <p:pRg st="2" end="2"/>
-                                            </p:txEl>
-                                          </p:spTgt>
-                                        </p:tgtEl>
-                                        <p:attrNameLst>
-                                          <p:attrName>style.visibility</p:attrName>
-                                        </p:attrNameLst>
-                                      </p:cBhvr>
-                                      <p:to>
-                                        <p:strVal val="visible"/>
-                                      </p:to>
-                                    </p:set>
-                                  </p:childTnLst>
-                                </p:cTn>
-                              </p:par>
-                              <p:par>
-                                <p:cTn id="7" presetID="1" presetClass="entr" presetSubtype="0" fill="hold" nodeType="withEffect">
-                                  <p:stCondLst>
-                                    <p:cond delay="0"/>
-                                  </p:stCondLst>
-                                  <p:childTnLst>
-                                    <p:set>
-                                      <p:cBhvr>
-                                        <p:cTn id="8" dur="1" fill="hold">
-                                          <p:stCondLst>
-                                            <p:cond delay="0"/>
-                                          </p:stCondLst>
-                                        </p:cTn>
-                                        <p:tgtEl>
-                                          <p:spTgt spid="3">
-                                            <p:txEl>
-                                              <p:pRg st="3" end="3"/>
-                                            </p:txEl>
-                                          </p:spTgt>
-                                        </p:tgtEl>
-                                        <p:attrNameLst>
-                                          <p:attrName>style.visibility</p:attrName>
-                                        </p:attrNameLst>
-                                      </p:cBhvr>
-                                      <p:to>
-                                        <p:strVal val="visible"/>
-                                      </p:to>
-                                    </p:set>
-                                  </p:childTnLst>
-                                </p:cTn>
-                              </p:par>
-                              <p:par>
-                                <p:cTn id="9" presetID="1" presetClass="entr" presetSubtype="0" fill="hold" nodeType="withEffect">
-                                  <p:stCondLst>
-                                    <p:cond delay="0"/>
-                                  </p:stCondLst>
-                                  <p:childTnLst>
-                                    <p:set>
-                                      <p:cBhvr>
-                                        <p:cTn id="10" dur="1" fill="hold">
-                                          <p:stCondLst>
-                                            <p:cond delay="0"/>
-                                          </p:stCondLst>
-                                        </p:cTn>
-                                        <p:tgtEl>
-                                          <p:spTgt spid="3">
-                                            <p:txEl>
-                                              <p:pRg st="4" end="4"/>
-                                            </p:txEl>
-                                          </p:spTgt>
-                                        </p:tgtEl>
-                                        <p:attrNameLst>
-                                          <p:attrName>style.visibility</p:attrName>
-                                        </p:attrNameLst>
-                                      </p:cBhvr>
-                                      <p:to>
-                                        <p:strVal val="visible"/>
-                                      </p:to>
-                                    </p:set>
-                                  </p:childTnLst>
-                                </p:cTn>
-                              </p:par>
-                            </p:childTnLst>
-                          </p:cTn>
-                        </p:par>
-                      </p:childTnLst>
-                    </p:cTn>
-                  </p:par>
-                  <p:par>
-                    <p:cTn id="11" fill="hold">
-                      <p:stCondLst>
-                        <p:cond delay="indefinite"/>
-                      </p:stCondLst>
-                      <p:childTnLst>
-                        <p:par>
-                          <p:cTn id="12" fill="hold">
-                            <p:stCondLst>
-                              <p:cond delay="0"/>
-                            </p:stCondLst>
-                            <p:childTnLst>
-                              <p:par>
-                                <p:cTn id="13" presetID="1" presetClass="entr" presetSubtype="0" fill="hold" nodeType="clickEffect">
-                                  <p:stCondLst>
-                                    <p:cond delay="0"/>
-                                  </p:stCondLst>
-                                  <p:childTnLst>
-                                    <p:set>
-                                      <p:cBhvr>
-                                        <p:cTn id="14" dur="1" fill="hold">
-                                          <p:stCondLst>
-                                            <p:cond delay="0"/>
-                                          </p:stCondLst>
-                                        </p:cTn>
-                                        <p:tgtEl>
-                                          <p:spTgt spid="3">
-                                            <p:txEl>
-                                              <p:pRg st="6" end="6"/>
-                                            </p:txEl>
-                                          </p:spTgt>
-                                        </p:tgtEl>
-                                        <p:attrNameLst>
-                                          <p:attrName>style.visibility</p:attrName>
-                                        </p:attrNameLst>
-                                      </p:cBhvr>
-                                      <p:to>
-                                        <p:strVal val="visible"/>
-                                      </p:to>
-                                    </p:set>
-                                  </p:childTnLst>
-                                </p:cTn>
-                              </p:par>
-                              <p:par>
-                                <p:cTn id="15" presetID="1" presetClass="entr" presetSubtype="0" fill="hold" nodeType="withEffect">
-                                  <p:stCondLst>
-                                    <p:cond delay="0"/>
-                                  </p:stCondLst>
-                                  <p:childTnLst>
-                                    <p:set>
-                                      <p:cBhvr>
-                                        <p:cTn id="16" dur="1" fill="hold">
-                                          <p:stCondLst>
-                                            <p:cond delay="0"/>
-                                          </p:stCondLst>
-                                        </p:cTn>
-                                        <p:tgtEl>
-                                          <p:spTgt spid="3">
-                                            <p:txEl>
-                                              <p:pRg st="7" end="7"/>
-                                            </p:txEl>
-                                          </p:spTgt>
-                                        </p:tgtEl>
-                                        <p:attrNameLst>
-                                          <p:attrName>style.visibility</p:attrName>
-                                        </p:attrNameLst>
-                                      </p:cBhvr>
-                                      <p:to>
-                                        <p:strVal val="visible"/>
-                                      </p:to>
-                                    </p:set>
-                                  </p:childTnLst>
-                                </p:cTn>
-                              </p:par>
-                              <p:par>
-                                <p:cTn id="17" presetID="1" presetClass="entr" presetSubtype="0" fill="hold" nodeType="withEffect">
-                                  <p:stCondLst>
-                                    <p:cond delay="0"/>
-                                  </p:stCondLst>
-                                  <p:childTnLst>
-                                    <p:set>
-                                      <p:cBhvr>
-                                        <p:cTn id="18" dur="1" fill="hold">
-                                          <p:stCondLst>
-                                            <p:cond delay="0"/>
-                                          </p:stCondLst>
-                                        </p:cTn>
-                                        <p:tgtEl>
-                                          <p:spTgt spid="3">
-                                            <p:txEl>
-                                              <p:pRg st="8" end="8"/>
-                                            </p:txEl>
-                                          </p:spTgt>
-                                        </p:tgtEl>
-                                        <p:attrNameLst>
-                                          <p:attrName>style.visibility</p:attrName>
-                                        </p:attrNameLst>
-                                      </p:cBhvr>
-                                      <p:to>
-                                        <p:strVal val="visible"/>
-                                      </p:to>
-                                    </p:set>
-                                  </p:childTnLst>
-                                </p:cTn>
-                              </p:par>
-                              <p:par>
-                                <p:cTn id="19" presetID="1" presetClass="entr" presetSubtype="0" fill="hold" nodeType="withEffect">
-                                  <p:stCondLst>
-                                    <p:cond delay="0"/>
-                                  </p:stCondLst>
-                                  <p:childTnLst>
-                                    <p:set>
-                                      <p:cBhvr>
-                                        <p:cTn id="20" dur="1" fill="hold">
-                                          <p:stCondLst>
-                                            <p:cond delay="0"/>
-                                          </p:stCondLst>
-                                        </p:cTn>
-                                        <p:tgtEl>
-                                          <p:spTgt spid="3">
-                                            <p:txEl>
-                                              <p:pRg st="9" end="9"/>
-                                            </p:txEl>
-                                          </p:spTgt>
-                                        </p:tgtEl>
-                                        <p:attrNameLst>
-                                          <p:attrName>style.visibility</p:attrName>
-                                        </p:attrNameLst>
-                                      </p:cBhvr>
-                                      <p:to>
-                                        <p:strVal val="visible"/>
-                                      </p:to>
-                                    </p:set>
-                                  </p:childTnLst>
-                                </p:cTn>
-                              </p:par>
-                              <p:par>
-                                <p:cTn id="21" presetID="1" presetClass="entr" presetSubtype="0" fill="hold" nodeType="withEffect">
-                                  <p:stCondLst>
-                                    <p:cond delay="0"/>
-                                  </p:stCondLst>
-                                  <p:childTnLst>
-                                    <p:set>
-                                      <p:cBhvr>
-                                        <p:cTn id="22" dur="1" fill="hold">
-                                          <p:stCondLst>
-                                            <p:cond delay="0"/>
-                                          </p:stCondLst>
-                                        </p:cTn>
-                                        <p:tgtEl>
-                                          <p:spTgt spid="3">
-                                            <p:txEl>
-                                              <p:pRg st="10" end="10"/>
-                                            </p:txEl>
-                                          </p:spTgt>
-                                        </p:tgtEl>
-                                        <p:attrNameLst>
-                                          <p:attrName>style.visibility</p:attrName>
-                                        </p:attrNameLst>
-                                      </p:cBhvr>
-                                      <p:to>
-                                        <p:strVal val="visible"/>
-                                      </p:to>
-                                    </p:set>
-                                  </p:childTnLst>
-                                </p:cTn>
-                              </p:par>
-                              <p:par>
-                                <p:cTn id="23" presetID="1" presetClass="entr" presetSubtype="0" fill="hold" nodeType="withEffect">
-                                  <p:stCondLst>
-                                    <p:cond delay="0"/>
-                                  </p:stCondLst>
-                                  <p:childTnLst>
-                                    <p:set>
-                                      <p:cBhvr>
-                                        <p:cTn id="24" dur="1" fill="hold">
-                                          <p:stCondLst>
-                                            <p:cond delay="0"/>
-                                          </p:stCondLst>
-                                        </p:cTn>
-                                        <p:tgtEl>
-                                          <p:spTgt spid="3">
-                                            <p:txEl>
-                                              <p:pRg st="11" end="11"/>
                                             </p:txEl>
                                           </p:spTgt>
                                         </p:tgtEl>
